--- a/slides/SecureTrace_Presentation.pptx
+++ b/slides/SecureTrace_Presentation.pptx
@@ -4,9 +4,6 @@
   <p:sldMasterIdLst>
     <p:sldMasterId id="2147483648" r:id="rId1"/>
   </p:sldMasterIdLst>
-  <p:notesMasterIdLst>
-    <p:notesMasterId r:id="rId13"/>
-  </p:notesMasterIdLst>
   <p:sldIdLst>
     <p:sldId id="256" r:id="rId2"/>
     <p:sldId id="257" r:id="rId3"/>
@@ -20,7 +17,10 @@
     <p:sldId id="265" r:id="rId11"/>
     <p:sldId id="266" r:id="rId12"/>
   </p:sldIdLst>
-  <p:sldSz cx="9144000" cy="5143500" type="screen16x9"/>
+  <p:notesMasterIdLst>
+    <p:notesMasterId r:id="rId13"/>
+  </p:notesMasterIdLst>
+  <p:sldSz cx="9144000" cy="5143500"/>
   <p:notesSz cx="5143500" cy="9144000"/>
   <p:defaultTextStyle>
     <a:lvl1pPr marL="0" algn="l" defTabSz="914400" rtl="0" eaLnBrk="1" latinLnBrk="0" hangingPunct="1">
@@ -114,11 +114,6 @@
       </a:defRPr>
     </a:lvl9pPr>
   </p:defaultTextStyle>
-  <p:extLst>
-    <p:ext uri="{EFAFB233-063F-42B5-8137-9DF3F51BA10A}">
-      <p15:sldGuideLst xmlns:p15="http://schemas.microsoft.com/office/powerpoint/2012/main"/>
-    </p:ext>
-  </p:extLst>
 </p:presentation>
 </file>
 
@@ -144,10 +139,234 @@
           <a:chExt cx="0" cy="0"/>
         </a:xfrm>
       </p:grpSpPr>
+      <p:sp>
+        <p:nvSpPr>
+          <p:cNvPr id="2" name="Header Placeholder 1"/>
+          <p:cNvSpPr>
+            <a:spLocks noGrp="1"/>
+          </p:cNvSpPr>
+          <p:nvPr>
+            <p:ph type="hdr" sz="quarter"/>
+          </p:nvPr>
+        </p:nvSpPr>
+        <p:spPr>
+          <a:xfrm>
+            <a:off x="0" y="0"/>
+            <a:ext cx="2971800" cy="458788"/>
+          </a:xfrm>
+          <a:prstGeom prst="rect">
+            <a:avLst/>
+          </a:prstGeom>
+        </p:spPr>
+        <p:txBody>
+          <a:bodyPr vert="horz" lIns="91440" tIns="45720" rIns="91440" bIns="45720" rtlCol="0"/>
+          <a:lstStyle>
+            <a:lvl1pPr algn="l">
+              <a:defRPr sz="1200"/>
+            </a:lvl1pPr>
+          </a:lstStyle>
+          <a:p>
+            <a:endParaRPr lang="en-US"/>
+          </a:p>
+        </p:txBody>
+      </p:sp>
+      <p:sp>
+        <p:nvSpPr>
+          <p:cNvPr id="3" name="Date Placeholder 2"/>
+          <p:cNvSpPr>
+            <a:spLocks noGrp="1"/>
+          </p:cNvSpPr>
+          <p:nvPr>
+            <p:ph type="dt" idx="1"/>
+          </p:nvPr>
+        </p:nvSpPr>
+        <p:spPr>
+          <a:xfrm>
+            <a:off x="3884613" y="0"/>
+            <a:ext cx="2971800" cy="458788"/>
+          </a:xfrm>
+          <a:prstGeom prst="rect">
+            <a:avLst/>
+          </a:prstGeom>
+        </p:spPr>
+        <p:txBody>
+          <a:bodyPr vert="horz" lIns="91440" tIns="45720" rIns="91440" bIns="45720" rtlCol="0"/>
+          <a:lstStyle>
+            <a:lvl1pPr algn="r">
+              <a:defRPr sz="1200"/>
+            </a:lvl1pPr>
+          </a:lstStyle>
+          <a:p>
+            <a:fld id="{5282F153-3F37-0F45-9E97-73ACFA13230C}" type="datetimeFigureOut">
+              <a:rPr lang="en-US"/>
+              <a:t>7/23/19</a:t>
+            </a:fld>
+            <a:endParaRPr lang="en-US"/>
+          </a:p>
+        </p:txBody>
+      </p:sp>
+      <p:sp>
+        <p:nvSpPr>
+          <p:cNvPr id="4" name="Slide Image Placeholder 3"/>
+          <p:cNvSpPr>
+            <a:spLocks noGrp="1" noRot="1" noChangeAspect="1"/>
+          </p:cNvSpPr>
+          <p:nvPr>
+            <p:ph type="sldImg" idx="2"/>
+          </p:nvPr>
+        </p:nvSpPr>
+        <p:spPr>
+          <a:xfrm>
+            <a:off x="685800" y="1143000"/>
+            <a:ext cx="5486400" cy="3086100"/>
+          </a:xfrm>
+          <a:prstGeom prst="rect">
+            <a:avLst/>
+          </a:prstGeom>
+          <a:noFill/>
+          <a:ln w="12700">
+            <a:solidFill>
+              <a:prstClr val="black"/>
+            </a:solidFill>
+          </a:ln>
+        </p:spPr>
+        <p:txBody>
+          <a:bodyPr vert="horz" lIns="91440" tIns="45720" rIns="91440" bIns="45720" rtlCol="0" anchor="ctr"/>
+          <a:lstStyle/>
+          <a:p>
+            <a:endParaRPr lang="en-US"/>
+          </a:p>
+        </p:txBody>
+      </p:sp>
+      <p:sp>
+        <p:nvSpPr>
+          <p:cNvPr id="5" name="Notes Placeholder 4"/>
+          <p:cNvSpPr>
+            <a:spLocks noGrp="1"/>
+          </p:cNvSpPr>
+          <p:nvPr>
+            <p:ph type="body" sz="quarter" idx="3"/>
+          </p:nvPr>
+        </p:nvSpPr>
+        <p:spPr>
+          <a:xfrm>
+            <a:off x="685800" y="4400550"/>
+            <a:ext cx="5486400" cy="3600450"/>
+          </a:xfrm>
+          <a:prstGeom prst="rect">
+            <a:avLst/>
+          </a:prstGeom>
+        </p:spPr>
+        <p:txBody>
+          <a:bodyPr vert="horz" lIns="91440" tIns="45720" rIns="91440" bIns="45720" rtlCol="0"/>
+          <a:lstStyle/>
+          <a:p>
+            <a:pPr lvl="0"/>
+            <a:r>
+              <a:rPr lang="en-US"/>
+              <a:t>Click to edit Master text styles</a:t>
+            </a:r>
+          </a:p>
+          <a:p>
+            <a:pPr lvl="1"/>
+            <a:r>
+              <a:rPr lang="en-US"/>
+              <a:t>Second level</a:t>
+            </a:r>
+          </a:p>
+          <a:p>
+            <a:pPr lvl="2"/>
+            <a:r>
+              <a:rPr lang="en-US"/>
+              <a:t>Third level</a:t>
+            </a:r>
+          </a:p>
+          <a:p>
+            <a:pPr lvl="3"/>
+            <a:r>
+              <a:rPr lang="en-US"/>
+              <a:t>Fourth level</a:t>
+            </a:r>
+          </a:p>
+          <a:p>
+            <a:pPr lvl="4"/>
+            <a:r>
+              <a:rPr lang="en-US"/>
+              <a:t>Fifth level</a:t>
+            </a:r>
+          </a:p>
+        </p:txBody>
+      </p:sp>
+      <p:sp>
+        <p:nvSpPr>
+          <p:cNvPr id="6" name="Footer Placeholder 5"/>
+          <p:cNvSpPr>
+            <a:spLocks noGrp="1"/>
+          </p:cNvSpPr>
+          <p:nvPr>
+            <p:ph type="ftr" sz="quarter" idx="4"/>
+          </p:nvPr>
+        </p:nvSpPr>
+        <p:spPr>
+          <a:xfrm>
+            <a:off x="0" y="8685213"/>
+            <a:ext cx="2971800" cy="458787"/>
+          </a:xfrm>
+          <a:prstGeom prst="rect">
+            <a:avLst/>
+          </a:prstGeom>
+        </p:spPr>
+        <p:txBody>
+          <a:bodyPr vert="horz" lIns="91440" tIns="45720" rIns="91440" bIns="45720" rtlCol="0" anchor="b"/>
+          <a:lstStyle>
+            <a:lvl1pPr algn="l">
+              <a:defRPr sz="1200"/>
+            </a:lvl1pPr>
+          </a:lstStyle>
+          <a:p>
+            <a:endParaRPr lang="en-US"/>
+          </a:p>
+        </p:txBody>
+      </p:sp>
+      <p:sp>
+        <p:nvSpPr>
+          <p:cNvPr id="7" name="Slide Number Placeholder 6"/>
+          <p:cNvSpPr>
+            <a:spLocks noGrp="1"/>
+          </p:cNvSpPr>
+          <p:nvPr>
+            <p:ph type="sldNum" sz="quarter" idx="5"/>
+          </p:nvPr>
+        </p:nvSpPr>
+        <p:spPr>
+          <a:xfrm>
+            <a:off x="3884613" y="8685213"/>
+            <a:ext cx="2971800" cy="458787"/>
+          </a:xfrm>
+          <a:prstGeom prst="rect">
+            <a:avLst/>
+          </a:prstGeom>
+        </p:spPr>
+        <p:txBody>
+          <a:bodyPr vert="horz" lIns="91440" tIns="45720" rIns="91440" bIns="45720" rtlCol="0" anchor="b"/>
+          <a:lstStyle>
+            <a:lvl1pPr algn="r">
+              <a:defRPr sz="1200"/>
+            </a:lvl1pPr>
+          </a:lstStyle>
+          <a:p>
+            <a:fld id="{CE5E9CC1-C706-0F49-92D6-E571CC5EEA8F}" type="slidenum">
+              <a:rPr lang="en-US"/>
+              <a:t>‹#›</a:t>
+            </a:fld>
+            <a:endParaRPr lang="en-US"/>
+          </a:p>
+        </p:txBody>
+      </p:sp>
     </p:spTree>
     <p:extLst>
       <p:ext uri="{BB962C8B-B14F-4D97-AF65-F5344CB8AC3E}">
-        <p14:creationId xmlns:p14="http://schemas.microsoft.com/office/powerpoint/2010/main" val="3617178434"/>
+        <p14:creationId xmlns:p14="http://schemas.microsoft.com/office/powerpoint/2010/main" val="1024086991"/>
       </p:ext>
     </p:extLst>
   </p:cSld>
@@ -291,6 +510,10 @@
           <a:bodyPr/>
           <a:lstStyle/>
           <a:p>
+            <a:r>
+              <a:rPr lang="en-US" dirty="0"/>
+              <a:t/>
+            </a:r>
             <a:endParaRPr lang="en-US" dirty="0"/>
           </a:p>
         </p:txBody>
@@ -375,6 +598,10 @@
           <a:bodyPr/>
           <a:lstStyle/>
           <a:p>
+            <a:r>
+              <a:rPr lang="en-US" dirty="0"/>
+              <a:t/>
+            </a:r>
             <a:endParaRPr lang="en-US" dirty="0"/>
           </a:p>
         </p:txBody>
@@ -459,6 +686,10 @@
           <a:bodyPr/>
           <a:lstStyle/>
           <a:p>
+            <a:r>
+              <a:rPr lang="en-US" dirty="0"/>
+              <a:t/>
+            </a:r>
             <a:endParaRPr lang="en-US" dirty="0"/>
           </a:p>
         </p:txBody>
@@ -543,6 +774,10 @@
           <a:bodyPr/>
           <a:lstStyle/>
           <a:p>
+            <a:r>
+              <a:rPr lang="en-US" dirty="0"/>
+              <a:t/>
+            </a:r>
             <a:endParaRPr lang="en-US" dirty="0"/>
           </a:p>
         </p:txBody>
@@ -627,6 +862,10 @@
           <a:bodyPr/>
           <a:lstStyle/>
           <a:p>
+            <a:r>
+              <a:rPr lang="en-US" dirty="0"/>
+              <a:t/>
+            </a:r>
             <a:endParaRPr lang="en-US" dirty="0"/>
           </a:p>
         </p:txBody>
@@ -711,6 +950,10 @@
           <a:bodyPr/>
           <a:lstStyle/>
           <a:p>
+            <a:r>
+              <a:rPr lang="en-US" dirty="0"/>
+              <a:t/>
+            </a:r>
             <a:endParaRPr lang="en-US" dirty="0"/>
           </a:p>
         </p:txBody>
@@ -795,6 +1038,10 @@
           <a:bodyPr/>
           <a:lstStyle/>
           <a:p>
+            <a:r>
+              <a:rPr lang="en-US" dirty="0"/>
+              <a:t/>
+            </a:r>
             <a:endParaRPr lang="en-US" dirty="0"/>
           </a:p>
         </p:txBody>
@@ -879,6 +1126,10 @@
           <a:bodyPr/>
           <a:lstStyle/>
           <a:p>
+            <a:r>
+              <a:rPr lang="en-US" dirty="0"/>
+              <a:t/>
+            </a:r>
             <a:endParaRPr lang="en-US" dirty="0"/>
           </a:p>
         </p:txBody>
@@ -963,6 +1214,10 @@
           <a:bodyPr/>
           <a:lstStyle/>
           <a:p>
+            <a:r>
+              <a:rPr lang="en-US" dirty="0"/>
+              <a:t/>
+            </a:r>
             <a:endParaRPr lang="en-US" dirty="0"/>
           </a:p>
         </p:txBody>
@@ -1047,6 +1302,10 @@
           <a:bodyPr/>
           <a:lstStyle/>
           <a:p>
+            <a:r>
+              <a:rPr lang="en-US" dirty="0"/>
+              <a:t/>
+            </a:r>
             <a:endParaRPr lang="en-US" dirty="0"/>
           </a:p>
         </p:txBody>
@@ -1131,6 +1390,10 @@
           <a:bodyPr/>
           <a:lstStyle/>
           <a:p>
+            <a:r>
+              <a:rPr lang="en-US" dirty="0"/>
+              <a:t/>
+            </a:r>
             <a:endParaRPr lang="en-US" dirty="0"/>
           </a:p>
         </p:txBody>
@@ -1204,11 +1467,6 @@
 <file path=ppt/slideMasters/slideMaster1.xml><?xml version="1.0" encoding="utf-8"?>
 <p:sldMaster xmlns:a="http://schemas.openxmlformats.org/drawingml/2006/main" xmlns:r="http://schemas.openxmlformats.org/officeDocument/2006/relationships" xmlns:p="http://schemas.openxmlformats.org/presentationml/2006/main">
   <p:cSld>
-    <p:bg>
-      <p:bgRef idx="1001">
-        <a:schemeClr val="bg1"/>
-      </p:bgRef>
-    </p:bg>
     <p:spTree>
       <p:nvGrpSpPr>
         <p:cNvPr id="1" name=""/>
@@ -1491,7 +1749,6 @@
         <a:solidFill>
           <a:srgbClr val="1A1A2E"/>
         </a:solidFill>
-        <a:effectLst/>
       </p:bgPr>
     </p:bg>
     <p:spTree>
@@ -1532,13 +1789,6 @@
             <a:prstDash val="solid"/>
           </a:ln>
         </p:spPr>
-        <p:txBody>
-          <a:bodyPr/>
-          <a:lstStyle/>
-          <a:p>
-            <a:endParaRPr lang="en-US"/>
-          </a:p>
-        </p:txBody>
       </p:sp>
       <p:sp>
         <p:nvSpPr>
@@ -1564,13 +1814,6 @@
             <a:prstDash val="solid"/>
           </a:ln>
         </p:spPr>
-        <p:txBody>
-          <a:bodyPr/>
-          <a:lstStyle/>
-          <a:p>
-            <a:endParaRPr lang="en-US"/>
-          </a:p>
-        </p:txBody>
       </p:sp>
       <p:sp>
         <p:nvSpPr>
@@ -1593,7 +1836,7 @@
           <a:bodyPr wrap="square" rtlCol="0" anchor="ctr"/>
           <a:lstStyle/>
           <a:p>
-            <a:pPr marL="0" indent="0" algn="ctr">
+            <a:pPr algn="ctr" indent="0" marL="0">
               <a:buNone/>
             </a:pPr>
             <a:r>
@@ -1616,7 +1859,7 @@
         </p:nvSpPr>
         <p:spPr>
           <a:xfrm>
-            <a:off x="457200" y="1737360"/>
+            <a:off x="457200" y="1554480"/>
             <a:ext cx="8229600" cy="1005840"/>
           </a:xfrm>
           <a:prstGeom prst="rect">
@@ -1629,11 +1872,11 @@
           <a:bodyPr wrap="square" rtlCol="0" anchor="ctr"/>
           <a:lstStyle/>
           <a:p>
-            <a:pPr marL="0" indent="0" algn="ctr">
-              <a:buNone/>
-            </a:pPr>
-            <a:r>
-              <a:rPr lang="en-US" sz="6000" b="1" kern="0" spc="400" dirty="0">
+            <a:pPr algn="ctr" indent="0" marL="0">
+              <a:buNone/>
+            </a:pPr>
+            <a:r>
+              <a:rPr lang="en-US" sz="6000" b="1" spc="400" kern="0" dirty="0">
                 <a:solidFill>
                   <a:srgbClr val="FFFFFF"/>
                 </a:solidFill>
@@ -1655,7 +1898,7 @@
         </p:nvSpPr>
         <p:spPr>
           <a:xfrm>
-            <a:off x="457200" y="2743200"/>
+            <a:off x="457200" y="2560320"/>
             <a:ext cx="8229600" cy="502920"/>
           </a:xfrm>
           <a:prstGeom prst="rect">
@@ -1668,7 +1911,7 @@
           <a:bodyPr wrap="square" rtlCol="0" anchor="ctr"/>
           <a:lstStyle/>
           <a:p>
-            <a:pPr marL="0" indent="0" algn="ctr">
+            <a:pPr algn="ctr" indent="0" marL="0">
               <a:buNone/>
             </a:pPr>
             <a:r>
@@ -1694,7 +1937,7 @@
         </p:nvSpPr>
         <p:spPr>
           <a:xfrm>
-            <a:off x="2286000" y="3337560"/>
+            <a:off x="2286000" y="3154680"/>
             <a:ext cx="4572000" cy="0"/>
           </a:xfrm>
           <a:prstGeom prst="line">
@@ -1708,13 +1951,6 @@
             <a:prstDash val="solid"/>
           </a:ln>
         </p:spPr>
-        <p:txBody>
-          <a:bodyPr/>
-          <a:lstStyle/>
-          <a:p>
-            <a:endParaRPr lang="en-US"/>
-          </a:p>
-        </p:txBody>
       </p:sp>
       <p:sp>
         <p:nvSpPr>
@@ -1724,7 +1960,7 @@
         </p:nvSpPr>
         <p:spPr>
           <a:xfrm>
-            <a:off x="457200" y="3520440"/>
+            <a:off x="457200" y="3337560"/>
             <a:ext cx="8229600" cy="365760"/>
           </a:xfrm>
           <a:prstGeom prst="rect">
@@ -1737,7 +1973,7 @@
           <a:bodyPr wrap="square" rtlCol="0" anchor="ctr"/>
           <a:lstStyle/>
           <a:p>
-            <a:pPr marL="0" indent="0" algn="ctr">
+            <a:pPr algn="ctr" indent="0" marL="0">
               <a:buNone/>
             </a:pPr>
             <a:r>
@@ -1751,22 +1987,6 @@
               </a:rPr>
               <a:t>Service Oriented Architecture  ·  South East European University  ·  2025/2026</a:t>
             </a:r>
-          </a:p>
-          <a:p>
-            <a:pPr marL="0" indent="0" algn="ctr">
-              <a:buNone/>
-            </a:pPr>
-            <a:r>
-              <a:rPr lang="en-US" sz="1200" dirty="0">
-                <a:solidFill>
-                  <a:srgbClr val="7B8BAA"/>
-                </a:solidFill>
-                <a:latin typeface="Calibri" pitchFamily="34" charset="0"/>
-                <a:ea typeface="Calibri" pitchFamily="34" charset="-122"/>
-                <a:cs typeface="Calibri" pitchFamily="34" charset="-120"/>
-              </a:rPr>
-              <a:t>Student: Darko Koprivnjak, dk131023</a:t>
-            </a:r>
             <a:endParaRPr lang="en-US" sz="1200" dirty="0"/>
           </a:p>
         </p:txBody>
@@ -1779,8 +1999,8 @@
         </p:nvSpPr>
         <p:spPr>
           <a:xfrm>
-            <a:off x="3200400" y="4114800"/>
-            <a:ext cx="2743200" cy="457200"/>
+            <a:off x="1828800" y="3840480"/>
+            <a:ext cx="5486400" cy="457200"/>
           </a:xfrm>
           <a:prstGeom prst="rect">
             <a:avLst/>
@@ -1795,20 +2015,13 @@
             <a:prstDash val="solid"/>
           </a:ln>
           <a:effectLst>
-            <a:outerShdw blurRad="101600" dist="38100" dir="8100000" algn="bl" rotWithShape="0">
+            <a:outerShdw sx="100000" sy="100000" kx="0" ky="0" algn="bl" rotWithShape="0" blurRad="101600" dist="38100" dir="8100000">
               <a:srgbClr val="000000">
                 <a:alpha val="15000"/>
               </a:srgbClr>
             </a:outerShdw>
           </a:effectLst>
         </p:spPr>
-        <p:txBody>
-          <a:bodyPr/>
-          <a:lstStyle/>
-          <a:p>
-            <a:endParaRPr lang="en-US"/>
-          </a:p>
-        </p:txBody>
       </p:sp>
       <p:sp>
         <p:nvSpPr>
@@ -1818,24 +2031,24 @@
         </p:nvSpPr>
         <p:spPr>
           <a:xfrm>
-            <a:off x="3200400" y="4114800"/>
-            <a:ext cx="2743200" cy="457200"/>
-          </a:xfrm>
-          <a:prstGeom prst="rect">
-            <a:avLst/>
-          </a:prstGeom>
-          <a:noFill/>
-          <a:ln/>
-        </p:spPr>
-        <p:txBody>
-          <a:bodyPr wrap="square" rtlCol="0" anchor="ctr"/>
-          <a:lstStyle/>
-          <a:p>
-            <a:pPr marL="0" indent="0" algn="ctr">
-              <a:buNone/>
-            </a:pPr>
-            <a:r>
-              <a:rPr lang="en-US" sz="1100" dirty="0">
+            <a:off x="1828800" y="3840480"/>
+            <a:ext cx="5486400" cy="457200"/>
+          </a:xfrm>
+          <a:prstGeom prst="rect">
+            <a:avLst/>
+          </a:prstGeom>
+          <a:noFill/>
+          <a:ln/>
+        </p:spPr>
+        <p:txBody>
+          <a:bodyPr wrap="square" rtlCol="0" anchor="ctr"/>
+          <a:lstStyle/>
+          <a:p>
+            <a:pPr algn="ctr" indent="0" marL="0">
+              <a:buNone/>
+            </a:pPr>
+            <a:r>
+              <a:rPr lang="en-US" sz="1300" b="1" dirty="0">
                 <a:solidFill>
                   <a:srgbClr val="FFFFFF"/>
                 </a:solidFill>
@@ -1843,7 +2056,71 @@
                 <a:ea typeface="Calibri" pitchFamily="34" charset="-122"/>
                 <a:cs typeface="Calibri" pitchFamily="34" charset="-120"/>
               </a:rPr>
-              <a:t>github.com/shankure/blockchain</a:t>
+              <a:t>🌐 https://securetrace-ui.onrender.com</a:t>
+            </a:r>
+            <a:endParaRPr lang="en-US" sz="1300" dirty="0"/>
+          </a:p>
+        </p:txBody>
+      </p:sp>
+      <p:sp>
+        <p:nvSpPr>
+          <p:cNvPr id="11" name="Shape 9"/>
+          <p:cNvSpPr/>
+          <p:nvPr/>
+        </p:nvSpPr>
+        <p:spPr>
+          <a:xfrm>
+            <a:off x="1828800" y="4389120"/>
+            <a:ext cx="5486400" cy="457200"/>
+          </a:xfrm>
+          <a:prstGeom prst="rect">
+            <a:avLst/>
+          </a:prstGeom>
+          <a:solidFill>
+            <a:srgbClr val="16213E"/>
+          </a:solidFill>
+          <a:ln w="12700">
+            <a:solidFill>
+              <a:srgbClr val="028090"/>
+            </a:solidFill>
+            <a:prstDash val="solid"/>
+          </a:ln>
+        </p:spPr>
+      </p:sp>
+      <p:sp>
+        <p:nvSpPr>
+          <p:cNvPr id="12" name="Text 10"/>
+          <p:cNvSpPr/>
+          <p:nvPr/>
+        </p:nvSpPr>
+        <p:spPr>
+          <a:xfrm>
+            <a:off x="1828800" y="4389120"/>
+            <a:ext cx="5486400" cy="457200"/>
+          </a:xfrm>
+          <a:prstGeom prst="rect">
+            <a:avLst/>
+          </a:prstGeom>
+          <a:noFill/>
+          <a:ln/>
+        </p:spPr>
+        <p:txBody>
+          <a:bodyPr wrap="square" rtlCol="0" anchor="ctr"/>
+          <a:lstStyle/>
+          <a:p>
+            <a:pPr algn="ctr" indent="0" marL="0">
+              <a:buNone/>
+            </a:pPr>
+            <a:r>
+              <a:rPr lang="en-US" sz="1100" dirty="0">
+                <a:solidFill>
+                  <a:srgbClr val="7B8BAA"/>
+                </a:solidFill>
+                <a:latin typeface="Calibri" pitchFamily="34" charset="0"/>
+                <a:ea typeface="Calibri" pitchFamily="34" charset="-122"/>
+                <a:cs typeface="Calibri" pitchFamily="34" charset="-120"/>
+              </a:rPr>
+              <a:t>📦 github.com/shankure/blockchain</a:t>
             </a:r>
             <a:endParaRPr lang="en-US" sz="1100" dirty="0"/>
           </a:p>
@@ -1865,7 +2142,6 @@
         <a:solidFill>
           <a:srgbClr val="F0F4F8"/>
         </a:solidFill>
-        <a:effectLst/>
       </p:bgPr>
     </p:bg>
     <p:spTree>
@@ -1906,13 +2182,6 @@
             <a:prstDash val="solid"/>
           </a:ln>
         </p:spPr>
-        <p:txBody>
-          <a:bodyPr/>
-          <a:lstStyle/>
-          <a:p>
-            <a:endParaRPr lang="en-US"/>
-          </a:p>
-        </p:txBody>
       </p:sp>
       <p:sp>
         <p:nvSpPr>
@@ -1935,11 +2204,11 @@
           <a:bodyPr wrap="square" rtlCol="0" anchor="ctr"/>
           <a:lstStyle/>
           <a:p>
-            <a:pPr marL="0" indent="0">
-              <a:buNone/>
-            </a:pPr>
-            <a:r>
-              <a:rPr lang="en-US" sz="1300" b="1" kern="0" spc="400" dirty="0">
+            <a:pPr indent="0" marL="0">
+              <a:buNone/>
+            </a:pPr>
+            <a:r>
+              <a:rPr lang="en-US" sz="1300" b="1" spc="400" kern="0" dirty="0">
                 <a:solidFill>
                   <a:srgbClr val="028090"/>
                 </a:solidFill>
@@ -1971,7 +2240,7 @@
           <a:bodyPr wrap="square" rtlCol="0" anchor="ctr"/>
           <a:lstStyle/>
           <a:p>
-            <a:pPr marL="0" indent="0" algn="r">
+            <a:pPr algn="r" indent="0" marL="0">
               <a:buNone/>
             </a:pPr>
             <a:r>
@@ -2010,20 +2279,13 @@
             <a:prstDash val="solid"/>
           </a:ln>
           <a:effectLst>
-            <a:outerShdw blurRad="101600" dist="38100" dir="8100000" algn="bl" rotWithShape="0">
+            <a:outerShdw sx="100000" sy="100000" kx="0" ky="0" algn="bl" rotWithShape="0" blurRad="101600" dist="38100" dir="8100000">
               <a:srgbClr val="000000">
                 <a:alpha val="15000"/>
               </a:srgbClr>
             </a:outerShdw>
           </a:effectLst>
         </p:spPr>
-        <p:txBody>
-          <a:bodyPr/>
-          <a:lstStyle/>
-          <a:p>
-            <a:endParaRPr lang="en-US"/>
-          </a:p>
-        </p:txBody>
       </p:sp>
       <p:sp>
         <p:nvSpPr>
@@ -2049,13 +2311,6 @@
             <a:prstDash val="solid"/>
           </a:ln>
         </p:spPr>
-        <p:txBody>
-          <a:bodyPr/>
-          <a:lstStyle/>
-          <a:p>
-            <a:endParaRPr lang="en-US"/>
-          </a:p>
-        </p:txBody>
       </p:sp>
       <p:sp>
         <p:nvSpPr>
@@ -2078,7 +2333,7 @@
           <a:bodyPr wrap="square" rtlCol="0" anchor="ctr"/>
           <a:lstStyle/>
           <a:p>
-            <a:pPr marL="0" indent="0" algn="ctr">
+            <a:pPr algn="ctr" indent="0" marL="0">
               <a:buNone/>
             </a:pPr>
             <a:r>
@@ -2114,7 +2369,7 @@
           <a:bodyPr wrap="square" rtlCol="0" anchor="ctr"/>
           <a:lstStyle/>
           <a:p>
-            <a:pPr marL="0" indent="0">
+            <a:pPr indent="0" marL="0">
               <a:buNone/>
             </a:pPr>
             <a:r>
@@ -2126,7 +2381,7 @@
                 <a:ea typeface="Calibri" pitchFamily="34" charset="-122"/>
                 <a:cs typeface="Calibri" pitchFamily="34" charset="-120"/>
               </a:rPr>
-              <a:t>Register 3 Users</a:t>
+              <a:t>Login as Admin</a:t>
             </a:r>
             <a:endParaRPr lang="en-US" sz="1200" dirty="0"/>
           </a:p>
@@ -2153,7 +2408,7 @@
           <a:bodyPr wrap="square" rtlCol="0" anchor="t"/>
           <a:lstStyle/>
           <a:p>
-            <a:pPr marL="0" indent="0">
+            <a:pPr indent="0" marL="0">
               <a:buNone/>
             </a:pPr>
             <a:r>
@@ -2165,7 +2420,7 @@
                 <a:ea typeface="Calibri" pitchFamily="34" charset="-122"/>
                 <a:cs typeface="Calibri" pitchFamily="34" charset="-120"/>
               </a:rPr>
-              <a:t>Admin, Field Agent (User), and Legal Auditor — show different roles being created.</a:t>
+              <a:t>Open securetrace-ui.onrender.com. Stats Banner shows 3 cases, 10 evidence, 12 blocks, Chain Intact.</a:t>
             </a:r>
             <a:endParaRPr lang="en-US" sz="1000" dirty="0"/>
           </a:p>
@@ -2195,20 +2450,13 @@
             <a:prstDash val="solid"/>
           </a:ln>
           <a:effectLst>
-            <a:outerShdw blurRad="101600" dist="38100" dir="8100000" algn="bl" rotWithShape="0">
+            <a:outerShdw sx="100000" sy="100000" kx="0" ky="0" algn="bl" rotWithShape="0" blurRad="101600" dist="38100" dir="8100000">
               <a:srgbClr val="000000">
                 <a:alpha val="15000"/>
               </a:srgbClr>
             </a:outerShdw>
           </a:effectLst>
         </p:spPr>
-        <p:txBody>
-          <a:bodyPr/>
-          <a:lstStyle/>
-          <a:p>
-            <a:endParaRPr lang="en-US"/>
-          </a:p>
-        </p:txBody>
       </p:sp>
       <p:sp>
         <p:nvSpPr>
@@ -2234,13 +2482,6 @@
             <a:prstDash val="solid"/>
           </a:ln>
         </p:spPr>
-        <p:txBody>
-          <a:bodyPr/>
-          <a:lstStyle/>
-          <a:p>
-            <a:endParaRPr lang="en-US"/>
-          </a:p>
-        </p:txBody>
       </p:sp>
       <p:sp>
         <p:nvSpPr>
@@ -2263,7 +2504,7 @@
           <a:bodyPr wrap="square" rtlCol="0" anchor="ctr"/>
           <a:lstStyle/>
           <a:p>
-            <a:pPr marL="0" indent="0" algn="ctr">
+            <a:pPr algn="ctr" indent="0" marL="0">
               <a:buNone/>
             </a:pPr>
             <a:r>
@@ -2299,7 +2540,7 @@
           <a:bodyPr wrap="square" rtlCol="0" anchor="ctr"/>
           <a:lstStyle/>
           <a:p>
-            <a:pPr marL="0" indent="0">
+            <a:pPr indent="0" marL="0">
               <a:buNone/>
             </a:pPr>
             <a:r>
@@ -2311,7 +2552,7 @@
                 <a:ea typeface="Calibri" pitchFamily="34" charset="-122"/>
                 <a:cs typeface="Calibri" pitchFamily="34" charset="-120"/>
               </a:rPr>
-              <a:t>Admin Creates Cases</a:t>
+              <a:t>Browse Cases &amp; Evidence</a:t>
             </a:r>
             <a:endParaRPr lang="en-US" sz="1200" dirty="0"/>
           </a:p>
@@ -2338,7 +2579,7 @@
           <a:bodyPr wrap="square" rtlCol="0" anchor="t"/>
           <a:lstStyle/>
           <a:p>
-            <a:pPr marL="0" indent="0">
+            <a:pPr indent="0" marL="0">
               <a:buNone/>
             </a:pPr>
             <a:r>
@@ -2350,7 +2591,7 @@
                 <a:ea typeface="Calibri" pitchFamily="34" charset="-122"/>
                 <a:cs typeface="Calibri" pitchFamily="34" charset="-120"/>
               </a:rPr>
-              <a:t>Create 2-3 realistic forensic cases. Show 403 when Auditor tries the same.</a:t>
+              <a:t>Show 3 realistic cases. Click into Case 2 — show 3 evidence items with metadata.</a:t>
             </a:r>
             <a:endParaRPr lang="en-US" sz="1000" dirty="0"/>
           </a:p>
@@ -2380,20 +2621,13 @@
             <a:prstDash val="solid"/>
           </a:ln>
           <a:effectLst>
-            <a:outerShdw blurRad="101600" dist="38100" dir="8100000" algn="bl" rotWithShape="0">
+            <a:outerShdw sx="100000" sy="100000" kx="0" ky="0" algn="bl" rotWithShape="0" blurRad="101600" dist="38100" dir="8100000">
               <a:srgbClr val="000000">
                 <a:alpha val="15000"/>
               </a:srgbClr>
             </a:outerShdw>
           </a:effectLst>
         </p:spPr>
-        <p:txBody>
-          <a:bodyPr/>
-          <a:lstStyle/>
-          <a:p>
-            <a:endParaRPr lang="en-US"/>
-          </a:p>
-        </p:txBody>
       </p:sp>
       <p:sp>
         <p:nvSpPr>
@@ -2419,13 +2653,6 @@
             <a:prstDash val="solid"/>
           </a:ln>
         </p:spPr>
-        <p:txBody>
-          <a:bodyPr/>
-          <a:lstStyle/>
-          <a:p>
-            <a:endParaRPr lang="en-US"/>
-          </a:p>
-        </p:txBody>
       </p:sp>
       <p:sp>
         <p:nvSpPr>
@@ -2448,7 +2675,7 @@
           <a:bodyPr wrap="square" rtlCol="0" anchor="ctr"/>
           <a:lstStyle/>
           <a:p>
-            <a:pPr marL="0" indent="0" algn="ctr">
+            <a:pPr algn="ctr" indent="0" marL="0">
               <a:buNone/>
             </a:pPr>
             <a:r>
@@ -2484,7 +2711,7 @@
           <a:bodyPr wrap="square" rtlCol="0" anchor="ctr"/>
           <a:lstStyle/>
           <a:p>
-            <a:pPr marL="0" indent="0">
+            <a:pPr indent="0" marL="0">
               <a:buNone/>
             </a:pPr>
             <a:r>
@@ -2496,7 +2723,7 @@
                 <a:ea typeface="Calibri" pitchFamily="34" charset="-122"/>
                 <a:cs typeface="Calibri" pitchFamily="34" charset="-120"/>
               </a:rPr>
-              <a:t>Upload Evidence</a:t>
+              <a:t>Upload Evidence Live</a:t>
             </a:r>
             <a:endParaRPr lang="en-US" sz="1200" dirty="0"/>
           </a:p>
@@ -2523,7 +2750,7 @@
           <a:bodyPr wrap="square" rtlCol="0" anchor="t"/>
           <a:lstStyle/>
           <a:p>
-            <a:pPr marL="0" indent="0">
+            <a:pPr indent="0" marL="0">
               <a:buNone/>
             </a:pPr>
             <a:r>
@@ -2535,7 +2762,7 @@
                 <a:ea typeface="Calibri" pitchFamily="34" charset="-122"/>
                 <a:cs typeface="Calibri" pitchFamily="34" charset="-120"/>
               </a:rPr>
-              <a:t>Upload 3-4 evidence items per case. Each one creates a new block in MongoDB.</a:t>
+              <a:t>Click Upload Evidence — fill form — submit. New audit block created in MongoDB instantly.</a:t>
             </a:r>
             <a:endParaRPr lang="en-US" sz="1000" dirty="0"/>
           </a:p>
@@ -2565,20 +2792,13 @@
             <a:prstDash val="solid"/>
           </a:ln>
           <a:effectLst>
-            <a:outerShdw blurRad="101600" dist="38100" dir="8100000" algn="bl" rotWithShape="0">
+            <a:outerShdw sx="100000" sy="100000" kx="0" ky="0" algn="bl" rotWithShape="0" blurRad="101600" dist="38100" dir="8100000">
               <a:srgbClr val="000000">
                 <a:alpha val="15000"/>
               </a:srgbClr>
             </a:outerShdw>
           </a:effectLst>
         </p:spPr>
-        <p:txBody>
-          <a:bodyPr/>
-          <a:lstStyle/>
-          <a:p>
-            <a:endParaRPr lang="en-US"/>
-          </a:p>
-        </p:txBody>
       </p:sp>
       <p:sp>
         <p:nvSpPr>
@@ -2604,13 +2824,6 @@
             <a:prstDash val="solid"/>
           </a:ln>
         </p:spPr>
-        <p:txBody>
-          <a:bodyPr/>
-          <a:lstStyle/>
-          <a:p>
-            <a:endParaRPr lang="en-US"/>
-          </a:p>
-        </p:txBody>
       </p:sp>
       <p:sp>
         <p:nvSpPr>
@@ -2633,7 +2846,7 @@
           <a:bodyPr wrap="square" rtlCol="0" anchor="ctr"/>
           <a:lstStyle/>
           <a:p>
-            <a:pPr marL="0" indent="0" algn="ctr">
+            <a:pPr algn="ctr" indent="0" marL="0">
               <a:buNone/>
             </a:pPr>
             <a:r>
@@ -2669,7 +2882,7 @@
           <a:bodyPr wrap="square" rtlCol="0" anchor="ctr"/>
           <a:lstStyle/>
           <a:p>
-            <a:pPr marL="0" indent="0">
+            <a:pPr indent="0" marL="0">
               <a:buNone/>
             </a:pPr>
             <a:r>
@@ -2708,7 +2921,7 @@
           <a:bodyPr wrap="square" rtlCol="0" anchor="t"/>
           <a:lstStyle/>
           <a:p>
-            <a:pPr marL="0" indent="0">
+            <a:pPr indent="0" marL="0">
               <a:buNone/>
             </a:pPr>
             <a:r>
@@ -2720,7 +2933,7 @@
                 <a:ea typeface="Calibri" pitchFamily="34" charset="-122"/>
                 <a:cs typeface="Calibri" pitchFamily="34" charset="-120"/>
               </a:rPr>
-              <a:t>GET /api/audit/verify returns isValid: true. Show blocks in Audit Ledger UI.</a:t>
+              <a:t>Open Audit Ledger. All blocks green. Click Re-Verify Chain → isValid: true.</a:t>
             </a:r>
             <a:endParaRPr lang="en-US" sz="1000" dirty="0"/>
           </a:p>
@@ -2750,20 +2963,13 @@
             <a:prstDash val="solid"/>
           </a:ln>
           <a:effectLst>
-            <a:outerShdw blurRad="101600" dist="38100" dir="8100000" algn="bl" rotWithShape="0">
+            <a:outerShdw sx="100000" sy="100000" kx="0" ky="0" algn="bl" rotWithShape="0" blurRad="101600" dist="38100" dir="8100000">
               <a:srgbClr val="000000">
                 <a:alpha val="15000"/>
               </a:srgbClr>
             </a:outerShdw>
           </a:effectLst>
         </p:spPr>
-        <p:txBody>
-          <a:bodyPr/>
-          <a:lstStyle/>
-          <a:p>
-            <a:endParaRPr lang="en-US"/>
-          </a:p>
-        </p:txBody>
       </p:sp>
       <p:sp>
         <p:nvSpPr>
@@ -2789,13 +2995,6 @@
             <a:prstDash val="solid"/>
           </a:ln>
         </p:spPr>
-        <p:txBody>
-          <a:bodyPr/>
-          <a:lstStyle/>
-          <a:p>
-            <a:endParaRPr lang="en-US"/>
-          </a:p>
-        </p:txBody>
       </p:sp>
       <p:sp>
         <p:nvSpPr>
@@ -2818,7 +3017,7 @@
           <a:bodyPr wrap="square" rtlCol="0" anchor="ctr"/>
           <a:lstStyle/>
           <a:p>
-            <a:pPr marL="0" indent="0" algn="ctr">
+            <a:pPr algn="ctr" indent="0" marL="0">
               <a:buNone/>
             </a:pPr>
             <a:r>
@@ -2854,7 +3053,7 @@
           <a:bodyPr wrap="square" rtlCol="0" anchor="ctr"/>
           <a:lstStyle/>
           <a:p>
-            <a:pPr marL="0" indent="0">
+            <a:pPr indent="0" marL="0">
               <a:buNone/>
             </a:pPr>
             <a:r>
@@ -2866,7 +3065,7 @@
                 <a:ea typeface="Calibri" pitchFamily="34" charset="-122"/>
                 <a:cs typeface="Calibri" pitchFamily="34" charset="-120"/>
               </a:rPr>
-              <a:t>Tamper with MongoDB</a:t>
+              <a:t>Tamper in MongoDB Atlas</a:t>
             </a:r>
             <a:endParaRPr lang="en-US" sz="1200" dirty="0"/>
           </a:p>
@@ -2893,7 +3092,7 @@
           <a:bodyPr wrap="square" rtlCol="0" anchor="t"/>
           <a:lstStyle/>
           <a:p>
-            <a:pPr marL="0" indent="0">
+            <a:pPr indent="0" marL="0">
               <a:buNone/>
             </a:pPr>
             <a:r>
@@ -2905,7 +3104,7 @@
                 <a:ea typeface="Calibri" pitchFamily="34" charset="-122"/>
                 <a:cs typeface="Calibri" pitchFamily="34" charset="-120"/>
               </a:rPr>
-              <a:t>Edit a block's EvidenceSnapshot directly in Compass — change one character.</a:t>
+              <a:t>Open Atlas. Edit one block's EvidenceSnapshot. Change a single character. Save.</a:t>
             </a:r>
             <a:endParaRPr lang="en-US" sz="1000" dirty="0"/>
           </a:p>
@@ -2935,20 +3134,13 @@
             <a:prstDash val="solid"/>
           </a:ln>
           <a:effectLst>
-            <a:outerShdw blurRad="101600" dist="38100" dir="8100000" algn="bl" rotWithShape="0">
+            <a:outerShdw sx="100000" sy="100000" kx="0" ky="0" algn="bl" rotWithShape="0" blurRad="101600" dist="38100" dir="8100000">
               <a:srgbClr val="000000">
                 <a:alpha val="15000"/>
               </a:srgbClr>
             </a:outerShdw>
           </a:effectLst>
         </p:spPr>
-        <p:txBody>
-          <a:bodyPr/>
-          <a:lstStyle/>
-          <a:p>
-            <a:endParaRPr lang="en-US"/>
-          </a:p>
-        </p:txBody>
       </p:sp>
       <p:sp>
         <p:nvSpPr>
@@ -2974,13 +3166,6 @@
             <a:prstDash val="solid"/>
           </a:ln>
         </p:spPr>
-        <p:txBody>
-          <a:bodyPr/>
-          <a:lstStyle/>
-          <a:p>
-            <a:endParaRPr lang="en-US"/>
-          </a:p>
-        </p:txBody>
       </p:sp>
       <p:sp>
         <p:nvSpPr>
@@ -3003,7 +3188,7 @@
           <a:bodyPr wrap="square" rtlCol="0" anchor="ctr"/>
           <a:lstStyle/>
           <a:p>
-            <a:pPr marL="0" indent="0" algn="ctr">
+            <a:pPr algn="ctr" indent="0" marL="0">
               <a:buNone/>
             </a:pPr>
             <a:r>
@@ -3039,7 +3224,7 @@
           <a:bodyPr wrap="square" rtlCol="0" anchor="ctr"/>
           <a:lstStyle/>
           <a:p>
-            <a:pPr marL="0" indent="0">
+            <a:pPr indent="0" marL="0">
               <a:buNone/>
             </a:pPr>
             <a:r>
@@ -3078,7 +3263,7 @@
           <a:bodyPr wrap="square" rtlCol="0" anchor="t"/>
           <a:lstStyle/>
           <a:p>
-            <a:pPr marL="0" indent="0">
+            <a:pPr indent="0" marL="0">
               <a:buNone/>
             </a:pPr>
             <a:r>
@@ -3090,7 +3275,7 @@
                 <a:ea typeface="Calibri" pitchFamily="34" charset="-122"/>
                 <a:cs typeface="Calibri" pitchFamily="34" charset="-120"/>
               </a:rPr>
-              <a:t>Re-verify: isValid: false. UI shows red indicator on the exact tampered block.</a:t>
+              <a:t>Re-verify in UI. Tampered block flagged red with exact failure reason. Fix → green again.</a:t>
             </a:r>
             <a:endParaRPr lang="en-US" sz="1000" dirty="0"/>
           </a:p>
@@ -3112,7 +3297,6 @@
         <a:solidFill>
           <a:srgbClr val="1A1A2E"/>
         </a:solidFill>
-        <a:effectLst/>
       </p:bgPr>
     </p:bg>
     <p:spTree>
@@ -3153,13 +3337,6 @@
             <a:prstDash val="solid"/>
           </a:ln>
         </p:spPr>
-        <p:txBody>
-          <a:bodyPr/>
-          <a:lstStyle/>
-          <a:p>
-            <a:endParaRPr lang="en-US"/>
-          </a:p>
-        </p:txBody>
       </p:sp>
       <p:sp>
         <p:nvSpPr>
@@ -3185,13 +3362,6 @@
             <a:prstDash val="solid"/>
           </a:ln>
         </p:spPr>
-        <p:txBody>
-          <a:bodyPr/>
-          <a:lstStyle/>
-          <a:p>
-            <a:endParaRPr lang="en-US"/>
-          </a:p>
-        </p:txBody>
       </p:sp>
       <p:sp>
         <p:nvSpPr>
@@ -3201,7 +3371,7 @@
         </p:nvSpPr>
         <p:spPr>
           <a:xfrm>
-            <a:off x="457200" y="457200"/>
+            <a:off x="457200" y="365760"/>
             <a:ext cx="8229600" cy="640080"/>
           </a:xfrm>
           <a:prstGeom prst="rect">
@@ -3214,11 +3384,11 @@
           <a:bodyPr wrap="square" rtlCol="0" anchor="ctr"/>
           <a:lstStyle/>
           <a:p>
-            <a:pPr marL="0" indent="0">
-              <a:buNone/>
-            </a:pPr>
-            <a:r>
-              <a:rPr lang="en-US" sz="3600" b="1" dirty="0">
+            <a:pPr indent="0" marL="0">
+              <a:buNone/>
+            </a:pPr>
+            <a:r>
+              <a:rPr lang="en-US" sz="3400" b="1" dirty="0">
                 <a:solidFill>
                   <a:srgbClr val="FFFFFF"/>
                 </a:solidFill>
@@ -3228,7 +3398,7 @@
               </a:rPr>
               <a:t>What We Built</a:t>
             </a:r>
-            <a:endParaRPr lang="en-US" sz="3600" dirty="0"/>
+            <a:endParaRPr lang="en-US" sz="3400" dirty="0"/>
           </a:p>
         </p:txBody>
       </p:sp>
@@ -3240,31 +3410,31 @@
         </p:nvSpPr>
         <p:spPr>
           <a:xfrm>
-            <a:off x="457200" y="1280160"/>
-            <a:ext cx="548640" cy="548640"/>
-          </a:xfrm>
-          <a:prstGeom prst="rect">
-            <a:avLst/>
-          </a:prstGeom>
-          <a:noFill/>
-          <a:ln/>
-        </p:spPr>
-        <p:txBody>
-          <a:bodyPr wrap="square" rtlCol="0" anchor="ctr"/>
-          <a:lstStyle/>
-          <a:p>
-            <a:pPr marL="0" indent="0" algn="ctr">
-              <a:buNone/>
-            </a:pPr>
-            <a:r>
-              <a:rPr lang="en-US" sz="2000" dirty="0">
+            <a:off x="457200" y="1143000"/>
+            <a:ext cx="548640" cy="457200"/>
+          </a:xfrm>
+          <a:prstGeom prst="rect">
+            <a:avLst/>
+          </a:prstGeom>
+          <a:noFill/>
+          <a:ln/>
+        </p:spPr>
+        <p:txBody>
+          <a:bodyPr wrap="square" rtlCol="0" anchor="ctr"/>
+          <a:lstStyle/>
+          <a:p>
+            <a:pPr algn="ctr" indent="0" marL="0">
+              <a:buNone/>
+            </a:pPr>
+            <a:r>
+              <a:rPr lang="en-US" sz="1800" dirty="0">
                 <a:solidFill>
                   <a:srgbClr val="000000"/>
                 </a:solidFill>
               </a:rPr>
               <a:t>🔐</a:t>
             </a:r>
-            <a:endParaRPr lang="en-US" sz="2000" dirty="0"/>
+            <a:endParaRPr lang="en-US" sz="1800" dirty="0"/>
           </a:p>
         </p:txBody>
       </p:sp>
@@ -3276,24 +3446,24 @@
         </p:nvSpPr>
         <p:spPr>
           <a:xfrm>
-            <a:off x="1097280" y="1280160"/>
-            <a:ext cx="7772400" cy="548640"/>
-          </a:xfrm>
-          <a:prstGeom prst="rect">
-            <a:avLst/>
-          </a:prstGeom>
-          <a:noFill/>
-          <a:ln/>
-        </p:spPr>
-        <p:txBody>
-          <a:bodyPr wrap="square" rtlCol="0" anchor="ctr"/>
-          <a:lstStyle/>
-          <a:p>
-            <a:pPr marL="0" indent="0">
-              <a:buNone/>
-            </a:pPr>
-            <a:r>
-              <a:rPr lang="en-US" sz="1400" dirty="0">
+            <a:off x="1097280" y="1143000"/>
+            <a:ext cx="7772400" cy="457200"/>
+          </a:xfrm>
+          <a:prstGeom prst="rect">
+            <a:avLst/>
+          </a:prstGeom>
+          <a:noFill/>
+          <a:ln/>
+        </p:spPr>
+        <p:txBody>
+          <a:bodyPr wrap="square" rtlCol="0" anchor="ctr"/>
+          <a:lstStyle/>
+          <a:p>
+            <a:pPr indent="0" marL="0">
+              <a:buNone/>
+            </a:pPr>
+            <a:r>
+              <a:rPr lang="en-US" sz="1300" dirty="0">
                 <a:solidFill>
                   <a:srgbClr val="FFFFFF"/>
                 </a:solidFill>
@@ -3303,7 +3473,7 @@
               </a:rPr>
               <a:t>Full .NET 10 Web API with JWT auth and 3 enforced roles</a:t>
             </a:r>
-            <a:endParaRPr lang="en-US" sz="1400" dirty="0"/>
+            <a:endParaRPr lang="en-US" sz="1300" dirty="0"/>
           </a:p>
         </p:txBody>
       </p:sp>
@@ -3315,31 +3485,31 @@
         </p:nvSpPr>
         <p:spPr>
           <a:xfrm>
-            <a:off x="457200" y="1938528"/>
-            <a:ext cx="548640" cy="548640"/>
-          </a:xfrm>
-          <a:prstGeom prst="rect">
-            <a:avLst/>
-          </a:prstGeom>
-          <a:noFill/>
-          <a:ln/>
-        </p:spPr>
-        <p:txBody>
-          <a:bodyPr wrap="square" rtlCol="0" anchor="ctr"/>
-          <a:lstStyle/>
-          <a:p>
-            <a:pPr marL="0" indent="0" algn="ctr">
-              <a:buNone/>
-            </a:pPr>
-            <a:r>
-              <a:rPr lang="en-US" sz="2000" dirty="0">
+            <a:off x="457200" y="1691640"/>
+            <a:ext cx="548640" cy="457200"/>
+          </a:xfrm>
+          <a:prstGeom prst="rect">
+            <a:avLst/>
+          </a:prstGeom>
+          <a:noFill/>
+          <a:ln/>
+        </p:spPr>
+        <p:txBody>
+          <a:bodyPr wrap="square" rtlCol="0" anchor="ctr"/>
+          <a:lstStyle/>
+          <a:p>
+            <a:pPr algn="ctr" indent="0" marL="0">
+              <a:buNone/>
+            </a:pPr>
+            <a:r>
+              <a:rPr lang="en-US" sz="1800" dirty="0">
                 <a:solidFill>
                   <a:srgbClr val="000000"/>
                 </a:solidFill>
               </a:rPr>
               <a:t>🔗</a:t>
             </a:r>
-            <a:endParaRPr lang="en-US" sz="2000" dirty="0"/>
+            <a:endParaRPr lang="en-US" sz="1800" dirty="0"/>
           </a:p>
         </p:txBody>
       </p:sp>
@@ -3351,24 +3521,24 @@
         </p:nvSpPr>
         <p:spPr>
           <a:xfrm>
-            <a:off x="1097280" y="1938528"/>
-            <a:ext cx="7772400" cy="548640"/>
-          </a:xfrm>
-          <a:prstGeom prst="rect">
-            <a:avLst/>
-          </a:prstGeom>
-          <a:noFill/>
-          <a:ln/>
-        </p:spPr>
-        <p:txBody>
-          <a:bodyPr wrap="square" rtlCol="0" anchor="ctr"/>
-          <a:lstStyle/>
-          <a:p>
-            <a:pPr marL="0" indent="0">
-              <a:buNone/>
-            </a:pPr>
-            <a:r>
-              <a:rPr lang="en-US" sz="1400" dirty="0">
+            <a:off x="1097280" y="1691640"/>
+            <a:ext cx="7772400" cy="457200"/>
+          </a:xfrm>
+          <a:prstGeom prst="rect">
+            <a:avLst/>
+          </a:prstGeom>
+          <a:noFill/>
+          <a:ln/>
+        </p:spPr>
+        <p:txBody>
+          <a:bodyPr wrap="square" rtlCol="0" anchor="ctr"/>
+          <a:lstStyle/>
+          <a:p>
+            <a:pPr indent="0" marL="0">
+              <a:buNone/>
+            </a:pPr>
+            <a:r>
+              <a:rPr lang="en-US" sz="1300" dirty="0">
                 <a:solidFill>
                   <a:srgbClr val="FFFFFF"/>
                 </a:solidFill>
@@ -3378,7 +3548,7 @@
               </a:rPr>
               <a:t>SHA-256 cryptographic chain — tamper detection proven live</a:t>
             </a:r>
-            <a:endParaRPr lang="en-US" sz="1400" dirty="0"/>
+            <a:endParaRPr lang="en-US" sz="1300" dirty="0"/>
           </a:p>
         </p:txBody>
       </p:sp>
@@ -3390,31 +3560,31 @@
         </p:nvSpPr>
         <p:spPr>
           <a:xfrm>
-            <a:off x="457200" y="2596896"/>
-            <a:ext cx="548640" cy="548640"/>
-          </a:xfrm>
-          <a:prstGeom prst="rect">
-            <a:avLst/>
-          </a:prstGeom>
-          <a:noFill/>
-          <a:ln/>
-        </p:spPr>
-        <p:txBody>
-          <a:bodyPr wrap="square" rtlCol="0" anchor="ctr"/>
-          <a:lstStyle/>
-          <a:p>
-            <a:pPr marL="0" indent="0" algn="ctr">
-              <a:buNone/>
-            </a:pPr>
-            <a:r>
-              <a:rPr lang="en-US" sz="2000" dirty="0">
+            <a:off x="457200" y="2240280"/>
+            <a:ext cx="548640" cy="457200"/>
+          </a:xfrm>
+          <a:prstGeom prst="rect">
+            <a:avLst/>
+          </a:prstGeom>
+          <a:noFill/>
+          <a:ln/>
+        </p:spPr>
+        <p:txBody>
+          <a:bodyPr wrap="square" rtlCol="0" anchor="ctr"/>
+          <a:lstStyle/>
+          <a:p>
+            <a:pPr algn="ctr" indent="0" marL="0">
+              <a:buNone/>
+            </a:pPr>
+            <a:r>
+              <a:rPr lang="en-US" sz="1800" dirty="0">
                 <a:solidFill>
                   <a:srgbClr val="000000"/>
                 </a:solidFill>
               </a:rPr>
               <a:t>🧪</a:t>
             </a:r>
-            <a:endParaRPr lang="en-US" sz="2000" dirty="0"/>
+            <a:endParaRPr lang="en-US" sz="1800" dirty="0"/>
           </a:p>
         </p:txBody>
       </p:sp>
@@ -3426,24 +3596,24 @@
         </p:nvSpPr>
         <p:spPr>
           <a:xfrm>
-            <a:off x="1097280" y="2596896"/>
-            <a:ext cx="7772400" cy="548640"/>
-          </a:xfrm>
-          <a:prstGeom prst="rect">
-            <a:avLst/>
-          </a:prstGeom>
-          <a:noFill/>
-          <a:ln/>
-        </p:spPr>
-        <p:txBody>
-          <a:bodyPr wrap="square" rtlCol="0" anchor="ctr"/>
-          <a:lstStyle/>
-          <a:p>
-            <a:pPr marL="0" indent="0">
-              <a:buNone/>
-            </a:pPr>
-            <a:r>
-              <a:rPr lang="en-US" sz="1400" dirty="0">
+            <a:off x="1097280" y="2240280"/>
+            <a:ext cx="7772400" cy="457200"/>
+          </a:xfrm>
+          <a:prstGeom prst="rect">
+            <a:avLst/>
+          </a:prstGeom>
+          <a:noFill/>
+          <a:ln/>
+        </p:spPr>
+        <p:txBody>
+          <a:bodyPr wrap="square" rtlCol="0" anchor="ctr"/>
+          <a:lstStyle/>
+          <a:p>
+            <a:pPr indent="0" marL="0">
+              <a:buNone/>
+            </a:pPr>
+            <a:r>
+              <a:rPr lang="en-US" sz="1300" dirty="0">
                 <a:solidFill>
                   <a:srgbClr val="FFFFFF"/>
                 </a:solidFill>
@@ -3453,7 +3623,7 @@
               </a:rPr>
               <a:t>30 unit tests across controllers, services, and repositories</a:t>
             </a:r>
-            <a:endParaRPr lang="en-US" sz="1400" dirty="0"/>
+            <a:endParaRPr lang="en-US" sz="1300" dirty="0"/>
           </a:p>
         </p:txBody>
       </p:sp>
@@ -3465,31 +3635,31 @@
         </p:nvSpPr>
         <p:spPr>
           <a:xfrm>
-            <a:off x="457200" y="3255264"/>
-            <a:ext cx="548640" cy="548640"/>
-          </a:xfrm>
-          <a:prstGeom prst="rect">
-            <a:avLst/>
-          </a:prstGeom>
-          <a:noFill/>
-          <a:ln/>
-        </p:spPr>
-        <p:txBody>
-          <a:bodyPr wrap="square" rtlCol="0" anchor="ctr"/>
-          <a:lstStyle/>
-          <a:p>
-            <a:pPr marL="0" indent="0" algn="ctr">
-              <a:buNone/>
-            </a:pPr>
-            <a:r>
-              <a:rPr lang="en-US" sz="2000" dirty="0">
+            <a:off x="457200" y="2788920"/>
+            <a:ext cx="548640" cy="457200"/>
+          </a:xfrm>
+          <a:prstGeom prst="rect">
+            <a:avLst/>
+          </a:prstGeom>
+          <a:noFill/>
+          <a:ln/>
+        </p:spPr>
+        <p:txBody>
+          <a:bodyPr wrap="square" rtlCol="0" anchor="ctr"/>
+          <a:lstStyle/>
+          <a:p>
+            <a:pPr algn="ctr" indent="0" marL="0">
+              <a:buNone/>
+            </a:pPr>
+            <a:r>
+              <a:rPr lang="en-US" sz="1800" dirty="0">
                 <a:solidFill>
                   <a:srgbClr val="000000"/>
                 </a:solidFill>
               </a:rPr>
               <a:t>⚛️</a:t>
             </a:r>
-            <a:endParaRPr lang="en-US" sz="2000" dirty="0"/>
+            <a:endParaRPr lang="en-US" sz="1800" dirty="0"/>
           </a:p>
         </p:txBody>
       </p:sp>
@@ -3501,24 +3671,24 @@
         </p:nvSpPr>
         <p:spPr>
           <a:xfrm>
-            <a:off x="1097280" y="3255264"/>
-            <a:ext cx="7772400" cy="548640"/>
-          </a:xfrm>
-          <a:prstGeom prst="rect">
-            <a:avLst/>
-          </a:prstGeom>
-          <a:noFill/>
-          <a:ln/>
-        </p:spPr>
-        <p:txBody>
-          <a:bodyPr wrap="square" rtlCol="0" anchor="ctr"/>
-          <a:lstStyle/>
-          <a:p>
-            <a:pPr marL="0" indent="0">
-              <a:buNone/>
-            </a:pPr>
-            <a:r>
-              <a:rPr lang="en-US" sz="1400" dirty="0">
+            <a:off x="1097280" y="2788920"/>
+            <a:ext cx="7772400" cy="457200"/>
+          </a:xfrm>
+          <a:prstGeom prst="rect">
+            <a:avLst/>
+          </a:prstGeom>
+          <a:noFill/>
+          <a:ln/>
+        </p:spPr>
+        <p:txBody>
+          <a:bodyPr wrap="square" rtlCol="0" anchor="ctr"/>
+          <a:lstStyle/>
+          <a:p>
+            <a:pPr indent="0" marL="0">
+              <a:buNone/>
+            </a:pPr>
+            <a:r>
+              <a:rPr lang="en-US" sz="1300" dirty="0">
                 <a:solidFill>
                   <a:srgbClr val="FFFFFF"/>
                 </a:solidFill>
@@ -3526,9 +3696,9 @@
                 <a:ea typeface="Calibri" pitchFamily="34" charset="-122"/>
                 <a:cs typeface="Calibri" pitchFamily="34" charset="-120"/>
               </a:rPr>
-              <a:t>React frontend with real-time ledger visualization</a:t>
-            </a:r>
-            <a:endParaRPr lang="en-US" sz="1400" dirty="0"/>
+              <a:t>React 19 frontend with real-time ledger visualization + CRUD modals</a:t>
+            </a:r>
+            <a:endParaRPr lang="en-US" sz="1300" dirty="0"/>
           </a:p>
         </p:txBody>
       </p:sp>
@@ -3540,31 +3710,31 @@
         </p:nvSpPr>
         <p:spPr>
           <a:xfrm>
-            <a:off x="457200" y="3913632"/>
-            <a:ext cx="548640" cy="548640"/>
-          </a:xfrm>
-          <a:prstGeom prst="rect">
-            <a:avLst/>
-          </a:prstGeom>
-          <a:noFill/>
-          <a:ln/>
-        </p:spPr>
-        <p:txBody>
-          <a:bodyPr wrap="square" rtlCol="0" anchor="ctr"/>
-          <a:lstStyle/>
-          <a:p>
-            <a:pPr marL="0" indent="0" algn="ctr">
-              <a:buNone/>
-            </a:pPr>
-            <a:r>
-              <a:rPr lang="en-US" sz="2000" dirty="0">
+            <a:off x="457200" y="3337560"/>
+            <a:ext cx="548640" cy="457200"/>
+          </a:xfrm>
+          <a:prstGeom prst="rect">
+            <a:avLst/>
+          </a:prstGeom>
+          <a:noFill/>
+          <a:ln/>
+        </p:spPr>
+        <p:txBody>
+          <a:bodyPr wrap="square" rtlCol="0" anchor="ctr"/>
+          <a:lstStyle/>
+          <a:p>
+            <a:pPr algn="ctr" indent="0" marL="0">
+              <a:buNone/>
+            </a:pPr>
+            <a:r>
+              <a:rPr lang="en-US" sz="1800" dirty="0">
                 <a:solidFill>
                   <a:srgbClr val="000000"/>
                 </a:solidFill>
               </a:rPr>
               <a:t>🚀</a:t>
             </a:r>
-            <a:endParaRPr lang="en-US" sz="2000" dirty="0"/>
+            <a:endParaRPr lang="en-US" sz="1800" dirty="0"/>
           </a:p>
         </p:txBody>
       </p:sp>
@@ -3576,24 +3746,24 @@
         </p:nvSpPr>
         <p:spPr>
           <a:xfrm>
-            <a:off x="1097280" y="3913632"/>
-            <a:ext cx="7772400" cy="548640"/>
-          </a:xfrm>
-          <a:prstGeom prst="rect">
-            <a:avLst/>
-          </a:prstGeom>
-          <a:noFill/>
-          <a:ln/>
-        </p:spPr>
-        <p:txBody>
-          <a:bodyPr wrap="square" rtlCol="0" anchor="ctr"/>
-          <a:lstStyle/>
-          <a:p>
-            <a:pPr marL="0" indent="0">
-              <a:buNone/>
-            </a:pPr>
-            <a:r>
-              <a:rPr lang="en-US" sz="1400" dirty="0">
+            <a:off x="1097280" y="3337560"/>
+            <a:ext cx="7772400" cy="457200"/>
+          </a:xfrm>
+          <a:prstGeom prst="rect">
+            <a:avLst/>
+          </a:prstGeom>
+          <a:noFill/>
+          <a:ln/>
+        </p:spPr>
+        <p:txBody>
+          <a:bodyPr wrap="square" rtlCol="0" anchor="ctr"/>
+          <a:lstStyle/>
+          <a:p>
+            <a:pPr indent="0" marL="0">
+              <a:buNone/>
+            </a:pPr>
+            <a:r>
+              <a:rPr lang="en-US" sz="1300" dirty="0">
                 <a:solidFill>
                   <a:srgbClr val="FFFFFF"/>
                 </a:solidFill>
@@ -3601,21 +3771,96 @@
                 <a:ea typeface="Calibri" pitchFamily="34" charset="-122"/>
                 <a:cs typeface="Calibri" pitchFamily="34" charset="-120"/>
               </a:rPr>
-              <a:t>GitHub Actions CI/CD pipeline — green on every push</a:t>
-            </a:r>
-            <a:endParaRPr lang="en-US" sz="1400" dirty="0"/>
-          </a:p>
-        </p:txBody>
-      </p:sp>
-      <p:sp>
-        <p:nvSpPr>
-          <p:cNvPr id="15" name="Shape 13"/>
-          <p:cNvSpPr/>
-          <p:nvPr/>
-        </p:nvSpPr>
-        <p:spPr>
-          <a:xfrm>
-            <a:off x="457200" y="4617720"/>
+              <a:t>GitHub Actions CI/CD + auto-deployed to Render cloud</a:t>
+            </a:r>
+            <a:endParaRPr lang="en-US" sz="1300" dirty="0"/>
+          </a:p>
+        </p:txBody>
+      </p:sp>
+      <p:sp>
+        <p:nvSpPr>
+          <p:cNvPr id="15" name="Text 13"/>
+          <p:cNvSpPr/>
+          <p:nvPr/>
+        </p:nvSpPr>
+        <p:spPr>
+          <a:xfrm>
+            <a:off x="457200" y="3886200"/>
+            <a:ext cx="548640" cy="457200"/>
+          </a:xfrm>
+          <a:prstGeom prst="rect">
+            <a:avLst/>
+          </a:prstGeom>
+          <a:noFill/>
+          <a:ln/>
+        </p:spPr>
+        <p:txBody>
+          <a:bodyPr wrap="square" rtlCol="0" anchor="ctr"/>
+          <a:lstStyle/>
+          <a:p>
+            <a:pPr algn="ctr" indent="0" marL="0">
+              <a:buNone/>
+            </a:pPr>
+            <a:r>
+              <a:rPr lang="en-US" sz="1800" dirty="0">
+                <a:solidFill>
+                  <a:srgbClr val="000000"/>
+                </a:solidFill>
+              </a:rPr>
+              <a:t>🌐</a:t>
+            </a:r>
+            <a:endParaRPr lang="en-US" sz="1800" dirty="0"/>
+          </a:p>
+        </p:txBody>
+      </p:sp>
+      <p:sp>
+        <p:nvSpPr>
+          <p:cNvPr id="16" name="Text 14"/>
+          <p:cNvSpPr/>
+          <p:nvPr/>
+        </p:nvSpPr>
+        <p:spPr>
+          <a:xfrm>
+            <a:off x="1097280" y="3886200"/>
+            <a:ext cx="7772400" cy="457200"/>
+          </a:xfrm>
+          <a:prstGeom prst="rect">
+            <a:avLst/>
+          </a:prstGeom>
+          <a:noFill/>
+          <a:ln/>
+        </p:spPr>
+        <p:txBody>
+          <a:bodyPr wrap="square" rtlCol="0" anchor="ctr"/>
+          <a:lstStyle/>
+          <a:p>
+            <a:pPr indent="0" marL="0">
+              <a:buNone/>
+            </a:pPr>
+            <a:r>
+              <a:rPr lang="en-US" sz="1300" dirty="0">
+                <a:solidFill>
+                  <a:srgbClr val="FFFFFF"/>
+                </a:solidFill>
+                <a:latin typeface="Calibri" pitchFamily="34" charset="0"/>
+                <a:ea typeface="Calibri" pitchFamily="34" charset="-122"/>
+                <a:cs typeface="Calibri" pitchFamily="34" charset="-120"/>
+              </a:rPr>
+              <a:t>Live: securetrace-ui.onrender.com  ·  API: securetrace-api.onrender.com</a:t>
+            </a:r>
+            <a:endParaRPr lang="en-US" sz="1300" dirty="0"/>
+          </a:p>
+        </p:txBody>
+      </p:sp>
+      <p:sp>
+        <p:nvSpPr>
+          <p:cNvPr id="17" name="Shape 15"/>
+          <p:cNvSpPr/>
+          <p:nvPr/>
+        </p:nvSpPr>
+        <p:spPr>
+          <a:xfrm>
+            <a:off x="457200" y="4526280"/>
             <a:ext cx="8229600" cy="0"/>
           </a:xfrm>
           <a:prstGeom prst="line">
@@ -3629,23 +3874,16 @@
             <a:prstDash val="solid"/>
           </a:ln>
         </p:spPr>
-        <p:txBody>
-          <a:bodyPr/>
-          <a:lstStyle/>
-          <a:p>
-            <a:endParaRPr lang="en-US"/>
-          </a:p>
-        </p:txBody>
-      </p:sp>
-      <p:sp>
-        <p:nvSpPr>
-          <p:cNvPr id="16" name="Text 14"/>
-          <p:cNvSpPr/>
-          <p:nvPr/>
-        </p:nvSpPr>
-        <p:spPr>
-          <a:xfrm>
-            <a:off x="457200" y="4663440"/>
+      </p:sp>
+      <p:sp>
+        <p:nvSpPr>
+          <p:cNvPr id="18" name="Text 16"/>
+          <p:cNvSpPr/>
+          <p:nvPr/>
+        </p:nvSpPr>
+        <p:spPr>
+          <a:xfrm>
+            <a:off x="457200" y="4617720"/>
             <a:ext cx="8229600" cy="365760"/>
           </a:xfrm>
           <a:prstGeom prst="rect">
@@ -3658,18 +3896,18 @@
           <a:bodyPr wrap="square" rtlCol="0" anchor="ctr"/>
           <a:lstStyle/>
           <a:p>
-            <a:pPr marL="0" indent="0" algn="ctr">
-              <a:buNone/>
-            </a:pPr>
-            <a:r>
-              <a:rPr lang="en-US" sz="1300" i="1" dirty="0">
+            <a:pPr algn="ctr" indent="0" marL="0">
+              <a:buNone/>
+            </a:pPr>
+            <a:r>
+              <a:rPr lang="en-US" sz="1400" i="1" dirty="0">
                 <a:solidFill>
                   <a:srgbClr val="028090"/>
                 </a:solidFill>
               </a:rPr>
               <a:t>Thank you  ·  Questions?</a:t>
             </a:r>
-            <a:endParaRPr lang="en-US" sz="1300" dirty="0"/>
+            <a:endParaRPr lang="en-US" sz="1400" dirty="0"/>
           </a:p>
         </p:txBody>
       </p:sp>
@@ -3689,7 +3927,6 @@
         <a:solidFill>
           <a:srgbClr val="F0F4F8"/>
         </a:solidFill>
-        <a:effectLst/>
       </p:bgPr>
     </p:bg>
     <p:spTree>
@@ -3730,13 +3967,6 @@
             <a:prstDash val="solid"/>
           </a:ln>
         </p:spPr>
-        <p:txBody>
-          <a:bodyPr/>
-          <a:lstStyle/>
-          <a:p>
-            <a:endParaRPr lang="en-US"/>
-          </a:p>
-        </p:txBody>
       </p:sp>
       <p:sp>
         <p:nvSpPr>
@@ -3759,11 +3989,11 @@
           <a:bodyPr wrap="square" rtlCol="0" anchor="ctr"/>
           <a:lstStyle/>
           <a:p>
-            <a:pPr marL="0" indent="0">
-              <a:buNone/>
-            </a:pPr>
-            <a:r>
-              <a:rPr lang="en-US" sz="1300" b="1" kern="0" spc="400" dirty="0">
+            <a:pPr indent="0" marL="0">
+              <a:buNone/>
+            </a:pPr>
+            <a:r>
+              <a:rPr lang="en-US" sz="1300" b="1" spc="400" kern="0" dirty="0">
                 <a:solidFill>
                   <a:srgbClr val="028090"/>
                 </a:solidFill>
@@ -3795,7 +4025,7 @@
           <a:bodyPr wrap="square" rtlCol="0" anchor="ctr"/>
           <a:lstStyle/>
           <a:p>
-            <a:pPr marL="0" indent="0" algn="r">
+            <a:pPr algn="r" indent="0" marL="0">
               <a:buNone/>
             </a:pPr>
             <a:r>
@@ -3834,20 +4064,13 @@
             <a:prstDash val="solid"/>
           </a:ln>
           <a:effectLst>
-            <a:outerShdw blurRad="101600" dist="38100" dir="8100000" algn="bl" rotWithShape="0">
+            <a:outerShdw sx="100000" sy="100000" kx="0" ky="0" algn="bl" rotWithShape="0" blurRad="101600" dist="38100" dir="8100000">
               <a:srgbClr val="000000">
                 <a:alpha val="15000"/>
               </a:srgbClr>
             </a:outerShdw>
           </a:effectLst>
         </p:spPr>
-        <p:txBody>
-          <a:bodyPr/>
-          <a:lstStyle/>
-          <a:p>
-            <a:endParaRPr lang="en-US"/>
-          </a:p>
-        </p:txBody>
       </p:sp>
       <p:sp>
         <p:nvSpPr>
@@ -3873,13 +4096,6 @@
             <a:prstDash val="solid"/>
           </a:ln>
         </p:spPr>
-        <p:txBody>
-          <a:bodyPr/>
-          <a:lstStyle/>
-          <a:p>
-            <a:endParaRPr lang="en-US"/>
-          </a:p>
-        </p:txBody>
       </p:sp>
       <p:sp>
         <p:nvSpPr>
@@ -3902,7 +4118,7 @@
           <a:bodyPr wrap="square" rtlCol="0" anchor="ctr"/>
           <a:lstStyle/>
           <a:p>
-            <a:pPr marL="0" indent="0" algn="ctr">
+            <a:pPr algn="ctr" indent="0" marL="0">
               <a:buNone/>
             </a:pPr>
             <a:r>
@@ -3938,7 +4154,7 @@
           <a:bodyPr wrap="square" rtlCol="0" anchor="ctr"/>
           <a:lstStyle/>
           <a:p>
-            <a:pPr marL="0" indent="0" algn="ctr">
+            <a:pPr algn="ctr" indent="0" marL="0">
               <a:buNone/>
             </a:pPr>
             <a:r>
@@ -3977,7 +4193,7 @@
           <a:bodyPr wrap="square" rtlCol="0" anchor="ctr"/>
           <a:lstStyle/>
           <a:p>
-            <a:pPr marL="0" indent="0" algn="ctr">
+            <a:pPr algn="ctr" indent="0" marL="0">
               <a:buNone/>
             </a:pPr>
             <a:r>
@@ -4019,20 +4235,13 @@
             <a:prstDash val="solid"/>
           </a:ln>
           <a:effectLst>
-            <a:outerShdw blurRad="101600" dist="38100" dir="8100000" algn="bl" rotWithShape="0">
+            <a:outerShdw sx="100000" sy="100000" kx="0" ky="0" algn="bl" rotWithShape="0" blurRad="101600" dist="38100" dir="8100000">
               <a:srgbClr val="000000">
                 <a:alpha val="15000"/>
               </a:srgbClr>
             </a:outerShdw>
           </a:effectLst>
         </p:spPr>
-        <p:txBody>
-          <a:bodyPr/>
-          <a:lstStyle/>
-          <a:p>
-            <a:endParaRPr lang="en-US"/>
-          </a:p>
-        </p:txBody>
       </p:sp>
       <p:sp>
         <p:nvSpPr>
@@ -4058,13 +4267,6 @@
             <a:prstDash val="solid"/>
           </a:ln>
         </p:spPr>
-        <p:txBody>
-          <a:bodyPr/>
-          <a:lstStyle/>
-          <a:p>
-            <a:endParaRPr lang="en-US"/>
-          </a:p>
-        </p:txBody>
       </p:sp>
       <p:sp>
         <p:nvSpPr>
@@ -4087,7 +4289,7 @@
           <a:bodyPr wrap="square" rtlCol="0" anchor="ctr"/>
           <a:lstStyle/>
           <a:p>
-            <a:pPr marL="0" indent="0" algn="ctr">
+            <a:pPr algn="ctr" indent="0" marL="0">
               <a:buNone/>
             </a:pPr>
             <a:r>
@@ -4123,7 +4325,7 @@
           <a:bodyPr wrap="square" rtlCol="0" anchor="ctr"/>
           <a:lstStyle/>
           <a:p>
-            <a:pPr marL="0" indent="0" algn="ctr">
+            <a:pPr algn="ctr" indent="0" marL="0">
               <a:buNone/>
             </a:pPr>
             <a:r>
@@ -4162,7 +4364,7 @@
           <a:bodyPr wrap="square" rtlCol="0" anchor="ctr"/>
           <a:lstStyle/>
           <a:p>
-            <a:pPr marL="0" indent="0" algn="ctr">
+            <a:pPr algn="ctr" indent="0" marL="0">
               <a:buNone/>
             </a:pPr>
             <a:r>
@@ -4174,7 +4376,7 @@
                 <a:ea typeface="Calibri" pitchFamily="34" charset="-122"/>
                 <a:cs typeface="Calibri" pitchFamily="34" charset="-120"/>
               </a:rPr>
-              <a:t>Courts require proof that evidence hasn't changed since collection. Standard systems cannot provide this.</a:t>
+              <a:t>Courts require proof evidence hasn't changed since collection. Standard systems cannot provide this.</a:t>
             </a:r>
             <a:endParaRPr lang="en-US" sz="1200" dirty="0"/>
           </a:p>
@@ -4204,20 +4406,13 @@
             <a:prstDash val="solid"/>
           </a:ln>
           <a:effectLst>
-            <a:outerShdw blurRad="101600" dist="38100" dir="8100000" algn="bl" rotWithShape="0">
+            <a:outerShdw sx="100000" sy="100000" kx="0" ky="0" algn="bl" rotWithShape="0" blurRad="101600" dist="38100" dir="8100000">
               <a:srgbClr val="000000">
                 <a:alpha val="15000"/>
               </a:srgbClr>
             </a:outerShdw>
           </a:effectLst>
         </p:spPr>
-        <p:txBody>
-          <a:bodyPr/>
-          <a:lstStyle/>
-          <a:p>
-            <a:endParaRPr lang="en-US"/>
-          </a:p>
-        </p:txBody>
       </p:sp>
       <p:sp>
         <p:nvSpPr>
@@ -4243,13 +4438,6 @@
             <a:prstDash val="solid"/>
           </a:ln>
         </p:spPr>
-        <p:txBody>
-          <a:bodyPr/>
-          <a:lstStyle/>
-          <a:p>
-            <a:endParaRPr lang="en-US"/>
-          </a:p>
-        </p:txBody>
       </p:sp>
       <p:sp>
         <p:nvSpPr>
@@ -4272,7 +4460,7 @@
           <a:bodyPr wrap="square" rtlCol="0" anchor="ctr"/>
           <a:lstStyle/>
           <a:p>
-            <a:pPr marL="0" indent="0" algn="ctr">
+            <a:pPr algn="ctr" indent="0" marL="0">
               <a:buNone/>
             </a:pPr>
             <a:r>
@@ -4308,7 +4496,7 @@
           <a:bodyPr wrap="square" rtlCol="0" anchor="ctr"/>
           <a:lstStyle/>
           <a:p>
-            <a:pPr marL="0" indent="0" algn="ctr">
+            <a:pPr algn="ctr" indent="0" marL="0">
               <a:buNone/>
             </a:pPr>
             <a:r>
@@ -4347,7 +4535,7 @@
           <a:bodyPr wrap="square" rtlCol="0" anchor="ctr"/>
           <a:lstStyle/>
           <a:p>
-            <a:pPr marL="0" indent="0" algn="ctr">
+            <a:pPr algn="ctr" indent="0" marL="0">
               <a:buNone/>
             </a:pPr>
             <a:r>
@@ -4381,7 +4569,6 @@
         <a:solidFill>
           <a:srgbClr val="1A1A2E"/>
         </a:solidFill>
-        <a:effectLst/>
       </p:bgPr>
     </p:bg>
     <p:spTree>
@@ -4422,13 +4609,6 @@
             <a:prstDash val="solid"/>
           </a:ln>
         </p:spPr>
-        <p:txBody>
-          <a:bodyPr/>
-          <a:lstStyle/>
-          <a:p>
-            <a:endParaRPr lang="en-US"/>
-          </a:p>
-        </p:txBody>
       </p:sp>
       <p:sp>
         <p:nvSpPr>
@@ -4451,11 +4631,11 @@
           <a:bodyPr wrap="square" rtlCol="0" anchor="ctr"/>
           <a:lstStyle/>
           <a:p>
-            <a:pPr marL="0" indent="0">
-              <a:buNone/>
-            </a:pPr>
-            <a:r>
-              <a:rPr lang="en-US" sz="1300" b="1" kern="0" spc="400" dirty="0">
+            <a:pPr indent="0" marL="0">
+              <a:buNone/>
+            </a:pPr>
+            <a:r>
+              <a:rPr lang="en-US" sz="1300" b="1" spc="400" kern="0" dirty="0">
                 <a:solidFill>
                   <a:srgbClr val="028090"/>
                 </a:solidFill>
@@ -4487,7 +4667,7 @@
           <a:bodyPr wrap="square" rtlCol="0" anchor="ctr"/>
           <a:lstStyle/>
           <a:p>
-            <a:pPr marL="0" indent="0" algn="r">
+            <a:pPr algn="r" indent="0" marL="0">
               <a:buNone/>
             </a:pPr>
             <a:r>
@@ -4523,7 +4703,7 @@
           <a:bodyPr wrap="square" rtlCol="0" anchor="ctr"/>
           <a:lstStyle/>
           <a:p>
-            <a:pPr marL="0" indent="0">
+            <a:pPr indent="0" marL="0">
               <a:buNone/>
             </a:pPr>
             <a:r>
@@ -4565,20 +4745,13 @@
             <a:prstDash val="solid"/>
           </a:ln>
           <a:effectLst>
-            <a:outerShdw blurRad="101600" dist="38100" dir="8100000" algn="bl" rotWithShape="0">
+            <a:outerShdw sx="100000" sy="100000" kx="0" ky="0" algn="bl" rotWithShape="0" blurRad="101600" dist="38100" dir="8100000">
               <a:srgbClr val="000000">
                 <a:alpha val="15000"/>
               </a:srgbClr>
             </a:outerShdw>
           </a:effectLst>
         </p:spPr>
-        <p:txBody>
-          <a:bodyPr/>
-          <a:lstStyle/>
-          <a:p>
-            <a:endParaRPr lang="en-US"/>
-          </a:p>
-        </p:txBody>
       </p:sp>
       <p:sp>
         <p:nvSpPr>
@@ -4604,13 +4777,6 @@
             <a:prstDash val="solid"/>
           </a:ln>
         </p:spPr>
-        <p:txBody>
-          <a:bodyPr/>
-          <a:lstStyle/>
-          <a:p>
-            <a:endParaRPr lang="en-US"/>
-          </a:p>
-        </p:txBody>
       </p:sp>
       <p:sp>
         <p:nvSpPr>
@@ -4633,7 +4799,7 @@
           <a:bodyPr wrap="square" rtlCol="0" anchor="ctr"/>
           <a:lstStyle/>
           <a:p>
-            <a:pPr marL="0" indent="0" algn="ctr">
+            <a:pPr algn="ctr" indent="0" marL="0">
               <a:buNone/>
             </a:pPr>
             <a:r>
@@ -4669,7 +4835,7 @@
           <a:bodyPr wrap="square" rtlCol="0" anchor="ctr"/>
           <a:lstStyle/>
           <a:p>
-            <a:pPr marL="0" indent="0">
+            <a:pPr indent="0" marL="0">
               <a:buNone/>
             </a:pPr>
             <a:r>
@@ -4708,7 +4874,7 @@
           <a:bodyPr wrap="square" rtlCol="0" anchor="t"/>
           <a:lstStyle/>
           <a:p>
-            <a:pPr marL="0" indent="0">
+            <a:pPr indent="0" marL="0">
               <a:buNone/>
             </a:pPr>
             <a:r>
@@ -4750,20 +4916,13 @@
             <a:prstDash val="solid"/>
           </a:ln>
           <a:effectLst>
-            <a:outerShdw blurRad="101600" dist="38100" dir="8100000" algn="bl" rotWithShape="0">
+            <a:outerShdw sx="100000" sy="100000" kx="0" ky="0" algn="bl" rotWithShape="0" blurRad="101600" dist="38100" dir="8100000">
               <a:srgbClr val="000000">
                 <a:alpha val="15000"/>
               </a:srgbClr>
             </a:outerShdw>
           </a:effectLst>
         </p:spPr>
-        <p:txBody>
-          <a:bodyPr/>
-          <a:lstStyle/>
-          <a:p>
-            <a:endParaRPr lang="en-US"/>
-          </a:p>
-        </p:txBody>
       </p:sp>
       <p:sp>
         <p:nvSpPr>
@@ -4789,13 +4948,6 @@
             <a:prstDash val="solid"/>
           </a:ln>
         </p:spPr>
-        <p:txBody>
-          <a:bodyPr/>
-          <a:lstStyle/>
-          <a:p>
-            <a:endParaRPr lang="en-US"/>
-          </a:p>
-        </p:txBody>
       </p:sp>
       <p:sp>
         <p:nvSpPr>
@@ -4818,7 +4970,7 @@
           <a:bodyPr wrap="square" rtlCol="0" anchor="ctr"/>
           <a:lstStyle/>
           <a:p>
-            <a:pPr marL="0" indent="0" algn="ctr">
+            <a:pPr algn="ctr" indent="0" marL="0">
               <a:buNone/>
             </a:pPr>
             <a:r>
@@ -4854,7 +5006,7 @@
           <a:bodyPr wrap="square" rtlCol="0" anchor="ctr"/>
           <a:lstStyle/>
           <a:p>
-            <a:pPr marL="0" indent="0">
+            <a:pPr indent="0" marL="0">
               <a:buNone/>
             </a:pPr>
             <a:r>
@@ -4893,7 +5045,7 @@
           <a:bodyPr wrap="square" rtlCol="0" anchor="t"/>
           <a:lstStyle/>
           <a:p>
-            <a:pPr marL="0" indent="0">
+            <a:pPr indent="0" marL="0">
               <a:buNone/>
             </a:pPr>
             <a:r>
@@ -4935,20 +5087,13 @@
             <a:prstDash val="solid"/>
           </a:ln>
           <a:effectLst>
-            <a:outerShdw blurRad="101600" dist="38100" dir="8100000" algn="bl" rotWithShape="0">
+            <a:outerShdw sx="100000" sy="100000" kx="0" ky="0" algn="bl" rotWithShape="0" blurRad="101600" dist="38100" dir="8100000">
               <a:srgbClr val="000000">
                 <a:alpha val="15000"/>
               </a:srgbClr>
             </a:outerShdw>
           </a:effectLst>
         </p:spPr>
-        <p:txBody>
-          <a:bodyPr/>
-          <a:lstStyle/>
-          <a:p>
-            <a:endParaRPr lang="en-US"/>
-          </a:p>
-        </p:txBody>
       </p:sp>
       <p:sp>
         <p:nvSpPr>
@@ -4974,13 +5119,6 @@
             <a:prstDash val="solid"/>
           </a:ln>
         </p:spPr>
-        <p:txBody>
-          <a:bodyPr/>
-          <a:lstStyle/>
-          <a:p>
-            <a:endParaRPr lang="en-US"/>
-          </a:p>
-        </p:txBody>
       </p:sp>
       <p:sp>
         <p:nvSpPr>
@@ -5003,7 +5141,7 @@
           <a:bodyPr wrap="square" rtlCol="0" anchor="ctr"/>
           <a:lstStyle/>
           <a:p>
-            <a:pPr marL="0" indent="0" algn="ctr">
+            <a:pPr algn="ctr" indent="0" marL="0">
               <a:buNone/>
             </a:pPr>
             <a:r>
@@ -5039,7 +5177,7 @@
           <a:bodyPr wrap="square" rtlCol="0" anchor="ctr"/>
           <a:lstStyle/>
           <a:p>
-            <a:pPr marL="0" indent="0">
+            <a:pPr indent="0" marL="0">
               <a:buNone/>
             </a:pPr>
             <a:r>
@@ -5078,7 +5216,7 @@
           <a:bodyPr wrap="square" rtlCol="0" anchor="t"/>
           <a:lstStyle/>
           <a:p>
-            <a:pPr marL="0" indent="0">
+            <a:pPr indent="0" marL="0">
               <a:buNone/>
             </a:pPr>
             <a:r>
@@ -5112,7 +5250,6 @@
         <a:solidFill>
           <a:srgbClr val="F0F4F8"/>
         </a:solidFill>
-        <a:effectLst/>
       </p:bgPr>
     </p:bg>
     <p:spTree>
@@ -5153,13 +5290,6 @@
             <a:prstDash val="solid"/>
           </a:ln>
         </p:spPr>
-        <p:txBody>
-          <a:bodyPr/>
-          <a:lstStyle/>
-          <a:p>
-            <a:endParaRPr lang="en-US"/>
-          </a:p>
-        </p:txBody>
       </p:sp>
       <p:sp>
         <p:nvSpPr>
@@ -5182,11 +5312,11 @@
           <a:bodyPr wrap="square" rtlCol="0" anchor="ctr"/>
           <a:lstStyle/>
           <a:p>
-            <a:pPr marL="0" indent="0">
-              <a:buNone/>
-            </a:pPr>
-            <a:r>
-              <a:rPr lang="en-US" sz="1300" b="1" kern="0" spc="400" dirty="0">
+            <a:pPr indent="0" marL="0">
+              <a:buNone/>
+            </a:pPr>
+            <a:r>
+              <a:rPr lang="en-US" sz="1300" b="1" spc="400" kern="0" dirty="0">
                 <a:solidFill>
                   <a:srgbClr val="028090"/>
                 </a:solidFill>
@@ -5218,7 +5348,7 @@
           <a:bodyPr wrap="square" rtlCol="0" anchor="ctr"/>
           <a:lstStyle/>
           <a:p>
-            <a:pPr marL="0" indent="0" algn="r">
+            <a:pPr algn="r" indent="0" marL="0">
               <a:buNone/>
             </a:pPr>
             <a:r>
@@ -5241,8 +5371,8 @@
         </p:nvSpPr>
         <p:spPr>
           <a:xfrm>
-            <a:off x="1371600" y="1097280"/>
-            <a:ext cx="6400800" cy="658368"/>
+            <a:off x="1188720" y="1097280"/>
+            <a:ext cx="6766560" cy="658368"/>
           </a:xfrm>
           <a:prstGeom prst="rect">
             <a:avLst/>
@@ -5257,20 +5387,13 @@
             <a:prstDash val="solid"/>
           </a:ln>
           <a:effectLst>
-            <a:outerShdw blurRad="101600" dist="38100" dir="8100000" algn="bl" rotWithShape="0">
+            <a:outerShdw sx="100000" sy="100000" kx="0" ky="0" algn="bl" rotWithShape="0" blurRad="101600" dist="38100" dir="8100000">
               <a:srgbClr val="000000">
                 <a:alpha val="15000"/>
               </a:srgbClr>
             </a:outerShdw>
           </a:effectLst>
         </p:spPr>
-        <p:txBody>
-          <a:bodyPr/>
-          <a:lstStyle/>
-          <a:p>
-            <a:endParaRPr lang="en-US"/>
-          </a:p>
-        </p:txBody>
       </p:sp>
       <p:sp>
         <p:nvSpPr>
@@ -5280,24 +5403,24 @@
         </p:nvSpPr>
         <p:spPr>
           <a:xfrm>
-            <a:off x="1463040" y="1133856"/>
-            <a:ext cx="6217920" cy="329184"/>
-          </a:xfrm>
-          <a:prstGeom prst="rect">
-            <a:avLst/>
-          </a:prstGeom>
-          <a:noFill/>
-          <a:ln/>
-        </p:spPr>
-        <p:txBody>
-          <a:bodyPr wrap="square" rtlCol="0" anchor="ctr"/>
-          <a:lstStyle/>
-          <a:p>
-            <a:pPr marL="0" indent="0">
-              <a:buNone/>
-            </a:pPr>
-            <a:r>
-              <a:rPr lang="en-US" sz="1400" b="1" dirty="0">
+            <a:off x="1280160" y="1133856"/>
+            <a:ext cx="6583680" cy="329184"/>
+          </a:xfrm>
+          <a:prstGeom prst="rect">
+            <a:avLst/>
+          </a:prstGeom>
+          <a:noFill/>
+          <a:ln/>
+        </p:spPr>
+        <p:txBody>
+          <a:bodyPr wrap="square" rtlCol="0" anchor="ctr"/>
+          <a:lstStyle/>
+          <a:p>
+            <a:pPr indent="0" marL="0">
+              <a:buNone/>
+            </a:pPr>
+            <a:r>
+              <a:rPr lang="en-US" sz="1300" b="1" dirty="0">
                 <a:solidFill>
                   <a:srgbClr val="FFFFFF"/>
                 </a:solidFill>
@@ -5305,9 +5428,9 @@
                 <a:ea typeface="Calibri" pitchFamily="34" charset="-122"/>
                 <a:cs typeface="Calibri" pitchFamily="34" charset="-120"/>
               </a:rPr>
-              <a:t>React Frontend</a:t>
-            </a:r>
-            <a:endParaRPr lang="en-US" sz="1400" dirty="0"/>
+              <a:t>React Frontend (Render Static Site)</a:t>
+            </a:r>
+            <a:endParaRPr lang="en-US" sz="1300" dirty="0"/>
           </a:p>
         </p:txBody>
       </p:sp>
@@ -5319,8 +5442,8 @@
         </p:nvSpPr>
         <p:spPr>
           <a:xfrm>
-            <a:off x="1463040" y="1444752"/>
-            <a:ext cx="6217920" cy="256032"/>
+            <a:off x="1280160" y="1444752"/>
+            <a:ext cx="6583680" cy="256032"/>
           </a:xfrm>
           <a:prstGeom prst="rect">
             <a:avLst/>
@@ -5332,7 +5455,7 @@
           <a:bodyPr wrap="square" rtlCol="0" anchor="t"/>
           <a:lstStyle/>
           <a:p>
-            <a:pPr marL="0" indent="0">
+            <a:pPr indent="0" marL="0">
               <a:buNone/>
             </a:pPr>
             <a:r>
@@ -5371,7 +5494,7 @@
           <a:bodyPr wrap="square" rtlCol="0" anchor="ctr"/>
           <a:lstStyle/>
           <a:p>
-            <a:pPr marL="0" indent="0" algn="ctr">
+            <a:pPr algn="ctr" indent="0" marL="0">
               <a:buNone/>
             </a:pPr>
             <a:r>
@@ -5394,8 +5517,8 @@
         </p:nvSpPr>
         <p:spPr>
           <a:xfrm>
-            <a:off x="1371600" y="2057400"/>
-            <a:ext cx="6400800" cy="658368"/>
+            <a:off x="1188720" y="2057400"/>
+            <a:ext cx="6766560" cy="658368"/>
           </a:xfrm>
           <a:prstGeom prst="rect">
             <a:avLst/>
@@ -5410,20 +5533,13 @@
             <a:prstDash val="solid"/>
           </a:ln>
           <a:effectLst>
-            <a:outerShdw blurRad="101600" dist="38100" dir="8100000" algn="bl" rotWithShape="0">
+            <a:outerShdw sx="100000" sy="100000" kx="0" ky="0" algn="bl" rotWithShape="0" blurRad="101600" dist="38100" dir="8100000">
               <a:srgbClr val="000000">
                 <a:alpha val="15000"/>
               </a:srgbClr>
             </a:outerShdw>
           </a:effectLst>
         </p:spPr>
-        <p:txBody>
-          <a:bodyPr/>
-          <a:lstStyle/>
-          <a:p>
-            <a:endParaRPr lang="en-US"/>
-          </a:p>
-        </p:txBody>
       </p:sp>
       <p:sp>
         <p:nvSpPr>
@@ -5433,24 +5549,24 @@
         </p:nvSpPr>
         <p:spPr>
           <a:xfrm>
-            <a:off x="1463040" y="2093976"/>
-            <a:ext cx="6217920" cy="329184"/>
-          </a:xfrm>
-          <a:prstGeom prst="rect">
-            <a:avLst/>
-          </a:prstGeom>
-          <a:noFill/>
-          <a:ln/>
-        </p:spPr>
-        <p:txBody>
-          <a:bodyPr wrap="square" rtlCol="0" anchor="ctr"/>
-          <a:lstStyle/>
-          <a:p>
-            <a:pPr marL="0" indent="0">
-              <a:buNone/>
-            </a:pPr>
-            <a:r>
-              <a:rPr lang="en-US" sz="1400" b="1" dirty="0">
+            <a:off x="1280160" y="2093976"/>
+            <a:ext cx="6583680" cy="329184"/>
+          </a:xfrm>
+          <a:prstGeom prst="rect">
+            <a:avLst/>
+          </a:prstGeom>
+          <a:noFill/>
+          <a:ln/>
+        </p:spPr>
+        <p:txBody>
+          <a:bodyPr wrap="square" rtlCol="0" anchor="ctr"/>
+          <a:lstStyle/>
+          <a:p>
+            <a:pPr indent="0" marL="0">
+              <a:buNone/>
+            </a:pPr>
+            <a:r>
+              <a:rPr lang="en-US" sz="1300" b="1" dirty="0">
                 <a:solidFill>
                   <a:srgbClr val="FFFFFF"/>
                 </a:solidFill>
@@ -5458,9 +5574,9 @@
                 <a:ea typeface="Calibri" pitchFamily="34" charset="-122"/>
                 <a:cs typeface="Calibri" pitchFamily="34" charset="-120"/>
               </a:rPr>
-              <a:t>ASP.NET Core Web API</a:t>
-            </a:r>
-            <a:endParaRPr lang="en-US" sz="1400" dirty="0"/>
+              <a:t>ASP.NET Core Web API (.NET 10 — Render Docker)</a:t>
+            </a:r>
+            <a:endParaRPr lang="en-US" sz="1300" dirty="0"/>
           </a:p>
         </p:txBody>
       </p:sp>
@@ -5472,8 +5588,8 @@
         </p:nvSpPr>
         <p:spPr>
           <a:xfrm>
-            <a:off x="1463040" y="2404872"/>
-            <a:ext cx="6217920" cy="256032"/>
+            <a:off x="1280160" y="2404872"/>
+            <a:ext cx="6583680" cy="256032"/>
           </a:xfrm>
           <a:prstGeom prst="rect">
             <a:avLst/>
@@ -5485,7 +5601,7 @@
           <a:bodyPr wrap="square" rtlCol="0" anchor="t"/>
           <a:lstStyle/>
           <a:p>
-            <a:pPr marL="0" indent="0">
+            <a:pPr indent="0" marL="0">
               <a:buNone/>
             </a:pPr>
             <a:r>
@@ -5524,7 +5640,7 @@
           <a:bodyPr wrap="square" rtlCol="0" anchor="ctr"/>
           <a:lstStyle/>
           <a:p>
-            <a:pPr marL="0" indent="0" algn="ctr">
+            <a:pPr algn="ctr" indent="0" marL="0">
               <a:buNone/>
             </a:pPr>
             <a:r>
@@ -5547,8 +5663,8 @@
         </p:nvSpPr>
         <p:spPr>
           <a:xfrm>
-            <a:off x="1371600" y="3017520"/>
-            <a:ext cx="6400800" cy="658368"/>
+            <a:off x="1188720" y="3017520"/>
+            <a:ext cx="6766560" cy="658368"/>
           </a:xfrm>
           <a:prstGeom prst="rect">
             <a:avLst/>
@@ -5563,20 +5679,13 @@
             <a:prstDash val="solid"/>
           </a:ln>
           <a:effectLst>
-            <a:outerShdw blurRad="101600" dist="38100" dir="8100000" algn="bl" rotWithShape="0">
+            <a:outerShdw sx="100000" sy="100000" kx="0" ky="0" algn="bl" rotWithShape="0" blurRad="101600" dist="38100" dir="8100000">
               <a:srgbClr val="000000">
                 <a:alpha val="15000"/>
               </a:srgbClr>
             </a:outerShdw>
           </a:effectLst>
         </p:spPr>
-        <p:txBody>
-          <a:bodyPr/>
-          <a:lstStyle/>
-          <a:p>
-            <a:endParaRPr lang="en-US"/>
-          </a:p>
-        </p:txBody>
       </p:sp>
       <p:sp>
         <p:nvSpPr>
@@ -5586,24 +5695,24 @@
         </p:nvSpPr>
         <p:spPr>
           <a:xfrm>
-            <a:off x="1463040" y="3054096"/>
-            <a:ext cx="6217920" cy="329184"/>
-          </a:xfrm>
-          <a:prstGeom prst="rect">
-            <a:avLst/>
-          </a:prstGeom>
-          <a:noFill/>
-          <a:ln/>
-        </p:spPr>
-        <p:txBody>
-          <a:bodyPr wrap="square" rtlCol="0" anchor="ctr"/>
-          <a:lstStyle/>
-          <a:p>
-            <a:pPr marL="0" indent="0">
-              <a:buNone/>
-            </a:pPr>
-            <a:r>
-              <a:rPr lang="en-US" sz="1400" b="1" dirty="0">
+            <a:off x="1280160" y="3054096"/>
+            <a:ext cx="6583680" cy="329184"/>
+          </a:xfrm>
+          <a:prstGeom prst="rect">
+            <a:avLst/>
+          </a:prstGeom>
+          <a:noFill/>
+          <a:ln/>
+        </p:spPr>
+        <p:txBody>
+          <a:bodyPr wrap="square" rtlCol="0" anchor="ctr"/>
+          <a:lstStyle/>
+          <a:p>
+            <a:pPr indent="0" marL="0">
+              <a:buNone/>
+            </a:pPr>
+            <a:r>
+              <a:rPr lang="en-US" sz="1300" b="1" dirty="0">
                 <a:solidFill>
                   <a:srgbClr val="FFFFFF"/>
                 </a:solidFill>
@@ -5611,9 +5720,9 @@
                 <a:ea typeface="Calibri" pitchFamily="34" charset="-122"/>
                 <a:cs typeface="Calibri" pitchFamily="34" charset="-120"/>
               </a:rPr>
-              <a:t>PostgreSQL (EF Core)</a:t>
-            </a:r>
-            <a:endParaRPr lang="en-US" sz="1400" dirty="0"/>
+              <a:t>PostgreSQL (Render Managed)</a:t>
+            </a:r>
+            <a:endParaRPr lang="en-US" sz="1300" dirty="0"/>
           </a:p>
         </p:txBody>
       </p:sp>
@@ -5625,8 +5734,8 @@
         </p:nvSpPr>
         <p:spPr>
           <a:xfrm>
-            <a:off x="1463040" y="3364992"/>
-            <a:ext cx="6217920" cy="256032"/>
+            <a:off x="1280160" y="3364992"/>
+            <a:ext cx="6583680" cy="256032"/>
           </a:xfrm>
           <a:prstGeom prst="rect">
             <a:avLst/>
@@ -5638,7 +5747,7 @@
           <a:bodyPr wrap="square" rtlCol="0" anchor="t"/>
           <a:lstStyle/>
           <a:p>
-            <a:pPr marL="0" indent="0">
+            <a:pPr indent="0" marL="0">
               <a:buNone/>
             </a:pPr>
             <a:r>
@@ -5650,7 +5759,7 @@
                 <a:ea typeface="Calibri" pitchFamily="34" charset="-122"/>
                 <a:cs typeface="Calibri" pitchFamily="34" charset="-120"/>
               </a:rPr>
-              <a:t>Users · Cases · Evidences</a:t>
+              <a:t>Users · Cases · Evidences (via EF Core)</a:t>
             </a:r>
             <a:endParaRPr lang="en-US" sz="1000" dirty="0"/>
           </a:p>
@@ -5677,7 +5786,7 @@
           <a:bodyPr wrap="square" rtlCol="0" anchor="ctr"/>
           <a:lstStyle/>
           <a:p>
-            <a:pPr marL="0" indent="0" algn="ctr">
+            <a:pPr algn="ctr" indent="0" marL="0">
               <a:buNone/>
             </a:pPr>
             <a:r>
@@ -5700,8 +5809,8 @@
         </p:nvSpPr>
         <p:spPr>
           <a:xfrm>
-            <a:off x="1371600" y="3749040"/>
-            <a:ext cx="6400800" cy="658368"/>
+            <a:off x="1188720" y="3749040"/>
+            <a:ext cx="6766560" cy="658368"/>
           </a:xfrm>
           <a:prstGeom prst="rect">
             <a:avLst/>
@@ -5716,20 +5825,13 @@
             <a:prstDash val="solid"/>
           </a:ln>
           <a:effectLst>
-            <a:outerShdw blurRad="101600" dist="38100" dir="8100000" algn="bl" rotWithShape="0">
+            <a:outerShdw sx="100000" sy="100000" kx="0" ky="0" algn="bl" rotWithShape="0" blurRad="101600" dist="38100" dir="8100000">
               <a:srgbClr val="000000">
                 <a:alpha val="15000"/>
               </a:srgbClr>
             </a:outerShdw>
           </a:effectLst>
         </p:spPr>
-        <p:txBody>
-          <a:bodyPr/>
-          <a:lstStyle/>
-          <a:p>
-            <a:endParaRPr lang="en-US"/>
-          </a:p>
-        </p:txBody>
       </p:sp>
       <p:sp>
         <p:nvSpPr>
@@ -5739,24 +5841,24 @@
         </p:nvSpPr>
         <p:spPr>
           <a:xfrm>
-            <a:off x="1463040" y="3785616"/>
-            <a:ext cx="6217920" cy="329184"/>
-          </a:xfrm>
-          <a:prstGeom prst="rect">
-            <a:avLst/>
-          </a:prstGeom>
-          <a:noFill/>
-          <a:ln/>
-        </p:spPr>
-        <p:txBody>
-          <a:bodyPr wrap="square" rtlCol="0" anchor="ctr"/>
-          <a:lstStyle/>
-          <a:p>
-            <a:pPr marL="0" indent="0">
-              <a:buNone/>
-            </a:pPr>
-            <a:r>
-              <a:rPr lang="en-US" sz="1400" b="1" dirty="0">
+            <a:off x="1280160" y="3785616"/>
+            <a:ext cx="6583680" cy="329184"/>
+          </a:xfrm>
+          <a:prstGeom prst="rect">
+            <a:avLst/>
+          </a:prstGeom>
+          <a:noFill/>
+          <a:ln/>
+        </p:spPr>
+        <p:txBody>
+          <a:bodyPr wrap="square" rtlCol="0" anchor="ctr"/>
+          <a:lstStyle/>
+          <a:p>
+            <a:pPr indent="0" marL="0">
+              <a:buNone/>
+            </a:pPr>
+            <a:r>
+              <a:rPr lang="en-US" sz="1300" b="1" dirty="0">
                 <a:solidFill>
                   <a:srgbClr val="FFFFFF"/>
                 </a:solidFill>
@@ -5764,9 +5866,9 @@
                 <a:ea typeface="Calibri" pitchFamily="34" charset="-122"/>
                 <a:cs typeface="Calibri" pitchFamily="34" charset="-120"/>
               </a:rPr>
-              <a:t>MongoDB (Audit Ledger)</a:t>
-            </a:r>
-            <a:endParaRPr lang="en-US" sz="1400" dirty="0"/>
+              <a:t>MongoDB Atlas (Audit Ledger)</a:t>
+            </a:r>
+            <a:endParaRPr lang="en-US" sz="1300" dirty="0"/>
           </a:p>
         </p:txBody>
       </p:sp>
@@ -5778,8 +5880,8 @@
         </p:nvSpPr>
         <p:spPr>
           <a:xfrm>
-            <a:off x="1463040" y="4096512"/>
-            <a:ext cx="6217920" cy="256032"/>
+            <a:off x="1280160" y="4096512"/>
+            <a:ext cx="6583680" cy="256032"/>
           </a:xfrm>
           <a:prstGeom prst="rect">
             <a:avLst/>
@@ -5791,7 +5893,7 @@
           <a:bodyPr wrap="square" rtlCol="0" anchor="t"/>
           <a:lstStyle/>
           <a:p>
-            <a:pPr marL="0" indent="0">
+            <a:pPr indent="0" marL="0">
               <a:buNone/>
             </a:pPr>
             <a:r>
@@ -5817,20 +5919,20 @@
         </p:nvSpPr>
         <p:spPr>
           <a:xfrm>
-            <a:off x="7863840" y="1371600"/>
-            <a:ext cx="1234440" cy="822960"/>
-          </a:xfrm>
-          <a:prstGeom prst="rect">
-            <a:avLst/>
-          </a:prstGeom>
-          <a:noFill/>
-          <a:ln/>
-        </p:spPr>
-        <p:txBody>
-          <a:bodyPr wrap="square" rtlCol="0" anchor="ctr"/>
-          <a:lstStyle/>
-          <a:p>
-            <a:pPr marL="0" indent="0" algn="ctr">
+            <a:off x="8092440" y="1371600"/>
+            <a:ext cx="1005840" cy="822960"/>
+          </a:xfrm>
+          <a:prstGeom prst="rect">
+            <a:avLst/>
+          </a:prstGeom>
+          <a:noFill/>
+          <a:ln/>
+        </p:spPr>
+        <p:txBody>
+          <a:bodyPr wrap="square" rtlCol="0" anchor="ctr"/>
+          <a:lstStyle/>
+          <a:p>
+            <a:pPr algn="ctr" indent="0" marL="0">
               <a:buNone/>
             </a:pPr>
             <a:r>
@@ -5842,36 +5944,6 @@
               <a:t>JWT Bearer Tokens</a:t>
             </a:r>
             <a:endParaRPr lang="en-US" sz="900" dirty="0"/>
-          </a:p>
-        </p:txBody>
-      </p:sp>
-      <p:sp>
-        <p:nvSpPr>
-          <p:cNvPr id="21" name="Shape 19"/>
-          <p:cNvSpPr/>
-          <p:nvPr/>
-        </p:nvSpPr>
-        <p:spPr>
-          <a:xfrm>
-            <a:off x="7772400" y="1426464"/>
-            <a:ext cx="0" cy="1051560"/>
-          </a:xfrm>
-          <a:prstGeom prst="line">
-            <a:avLst/>
-          </a:prstGeom>
-          <a:noFill/>
-          <a:ln w="12700">
-            <a:solidFill>
-              <a:srgbClr val="CCCCCC"/>
-            </a:solidFill>
-            <a:prstDash val="dash"/>
-          </a:ln>
-        </p:spPr>
-        <p:txBody>
-          <a:bodyPr/>
-          <a:lstStyle/>
-          <a:p>
-            <a:endParaRPr lang="en-US"/>
           </a:p>
         </p:txBody>
       </p:sp>
@@ -5891,7 +5963,6 @@
         <a:solidFill>
           <a:srgbClr val="1A1A2E"/>
         </a:solidFill>
-        <a:effectLst/>
       </p:bgPr>
     </p:bg>
     <p:spTree>
@@ -5932,13 +6003,6 @@
             <a:prstDash val="solid"/>
           </a:ln>
         </p:spPr>
-        <p:txBody>
-          <a:bodyPr/>
-          <a:lstStyle/>
-          <a:p>
-            <a:endParaRPr lang="en-US"/>
-          </a:p>
-        </p:txBody>
       </p:sp>
       <p:sp>
         <p:nvSpPr>
@@ -5961,11 +6025,11 @@
           <a:bodyPr wrap="square" rtlCol="0" anchor="ctr"/>
           <a:lstStyle/>
           <a:p>
-            <a:pPr marL="0" indent="0">
-              <a:buNone/>
-            </a:pPr>
-            <a:r>
-              <a:rPr lang="en-US" sz="1300" b="1" kern="0" spc="400" dirty="0">
+            <a:pPr indent="0" marL="0">
+              <a:buNone/>
+            </a:pPr>
+            <a:r>
+              <a:rPr lang="en-US" sz="1300" b="1" spc="400" kern="0" dirty="0">
                 <a:solidFill>
                   <a:srgbClr val="028090"/>
                 </a:solidFill>
@@ -5997,7 +6061,7 @@
           <a:bodyPr wrap="square" rtlCol="0" anchor="ctr"/>
           <a:lstStyle/>
           <a:p>
-            <a:pPr marL="0" indent="0" algn="r">
+            <a:pPr algn="r" indent="0" marL="0">
               <a:buNone/>
             </a:pPr>
             <a:r>
@@ -6036,20 +6100,13 @@
             <a:prstDash val="solid"/>
           </a:ln>
           <a:effectLst>
-            <a:outerShdw blurRad="101600" dist="38100" dir="8100000" algn="bl" rotWithShape="0">
+            <a:outerShdw sx="100000" sy="100000" kx="0" ky="0" algn="bl" rotWithShape="0" blurRad="101600" dist="38100" dir="8100000">
               <a:srgbClr val="000000">
                 <a:alpha val="15000"/>
               </a:srgbClr>
             </a:outerShdw>
           </a:effectLst>
         </p:spPr>
-        <p:txBody>
-          <a:bodyPr/>
-          <a:lstStyle/>
-          <a:p>
-            <a:endParaRPr lang="en-US"/>
-          </a:p>
-        </p:txBody>
       </p:sp>
       <p:sp>
         <p:nvSpPr>
@@ -6075,13 +6132,6 @@
             <a:prstDash val="solid"/>
           </a:ln>
         </p:spPr>
-        <p:txBody>
-          <a:bodyPr/>
-          <a:lstStyle/>
-          <a:p>
-            <a:endParaRPr lang="en-US"/>
-          </a:p>
-        </p:txBody>
       </p:sp>
       <p:sp>
         <p:nvSpPr>
@@ -6104,7 +6154,7 @@
           <a:bodyPr wrap="square" rtlCol="0" anchor="ctr"/>
           <a:lstStyle/>
           <a:p>
-            <a:pPr marL="0" indent="0" algn="ctr">
+            <a:pPr algn="ctr" indent="0" marL="0">
               <a:buNone/>
             </a:pPr>
             <a:r>
@@ -6140,7 +6190,7 @@
           <a:bodyPr wrap="square" rtlCol="0" anchor="ctr"/>
           <a:lstStyle/>
           <a:p>
-            <a:pPr marL="0" indent="0">
+            <a:pPr indent="0" marL="0">
               <a:buNone/>
             </a:pPr>
             <a:r>
@@ -6179,7 +6229,7 @@
           <a:bodyPr wrap="square" rtlCol="0" anchor="ctr"/>
           <a:lstStyle/>
           <a:p>
-            <a:pPr marL="0" indent="0">
+            <a:pPr indent="0" marL="0">
               <a:buNone/>
             </a:pPr>
             <a:r>
@@ -6218,7 +6268,7 @@
           <a:bodyPr wrap="square" rtlCol="0" anchor="ctr"/>
           <a:lstStyle/>
           <a:p>
-            <a:pPr marL="0" indent="0">
+            <a:pPr indent="0" marL="0">
               <a:buNone/>
             </a:pPr>
             <a:r>
@@ -6260,13 +6310,6 @@
             <a:prstDash val="solid"/>
           </a:ln>
         </p:spPr>
-        <p:txBody>
-          <a:bodyPr/>
-          <a:lstStyle/>
-          <a:p>
-            <a:endParaRPr lang="en-US"/>
-          </a:p>
-        </p:txBody>
       </p:sp>
       <p:sp>
         <p:nvSpPr>
@@ -6289,7 +6332,7 @@
           <a:bodyPr wrap="square" rtlCol="0" anchor="ctr"/>
           <a:lstStyle/>
           <a:p>
-            <a:pPr marL="0" indent="0" algn="ctr">
+            <a:pPr algn="ctr" indent="0" marL="0">
               <a:buNone/>
             </a:pPr>
             <a:r>
@@ -6325,7 +6368,7 @@
           <a:bodyPr wrap="square" rtlCol="0" anchor="ctr"/>
           <a:lstStyle/>
           <a:p>
-            <a:pPr marL="0" indent="0">
+            <a:pPr indent="0" marL="0">
               <a:buNone/>
             </a:pPr>
             <a:r>
@@ -6364,7 +6407,7 @@
           <a:bodyPr wrap="square" rtlCol="0" anchor="ctr"/>
           <a:lstStyle/>
           <a:p>
-            <a:pPr marL="0" indent="0">
+            <a:pPr indent="0" marL="0">
               <a:buNone/>
             </a:pPr>
             <a:r>
@@ -6403,7 +6446,7 @@
           <a:bodyPr wrap="square" rtlCol="0" anchor="ctr"/>
           <a:lstStyle/>
           <a:p>
-            <a:pPr marL="0" indent="0">
+            <a:pPr indent="0" marL="0">
               <a:buNone/>
             </a:pPr>
             <a:r>
@@ -6442,7 +6485,7 @@
           <a:bodyPr wrap="square" rtlCol="0" anchor="ctr"/>
           <a:lstStyle/>
           <a:p>
-            <a:pPr marL="0" indent="0">
+            <a:pPr indent="0" marL="0">
               <a:buNone/>
             </a:pPr>
             <a:r>
@@ -6462,37 +6505,7 @@
       </p:sp>
       <p:sp>
         <p:nvSpPr>
-          <p:cNvPr id="17" name="Shape 15"/>
-          <p:cNvSpPr/>
-          <p:nvPr/>
-        </p:nvSpPr>
-        <p:spPr>
-          <a:xfrm>
-            <a:off x="3017520" y="2743200"/>
-            <a:ext cx="502920" cy="0"/>
-          </a:xfrm>
-          <a:prstGeom prst="line">
-            <a:avLst/>
-          </a:prstGeom>
-          <a:noFill/>
-          <a:ln w="25400">
-            <a:solidFill>
-              <a:srgbClr val="028090"/>
-            </a:solidFill>
-            <a:prstDash val="solid"/>
-          </a:ln>
-        </p:spPr>
-        <p:txBody>
-          <a:bodyPr/>
-          <a:lstStyle/>
-          <a:p>
-            <a:endParaRPr lang="en-US"/>
-          </a:p>
-        </p:txBody>
-      </p:sp>
-      <p:sp>
-        <p:nvSpPr>
-          <p:cNvPr id="18" name="Text 16"/>
+          <p:cNvPr id="17" name="Text 15"/>
           <p:cNvSpPr/>
           <p:nvPr/>
         </p:nvSpPr>
@@ -6511,7 +6524,7 @@
           <a:bodyPr wrap="square" rtlCol="0" anchor="ctr"/>
           <a:lstStyle/>
           <a:p>
-            <a:pPr marL="0" indent="0" algn="ctr">
+            <a:pPr algn="ctr" indent="0" marL="0">
               <a:buNone/>
             </a:pPr>
             <a:r>
@@ -6528,7 +6541,7 @@
       </p:sp>
       <p:sp>
         <p:nvSpPr>
-          <p:cNvPr id="19" name="Shape 17"/>
+          <p:cNvPr id="18" name="Shape 16"/>
           <p:cNvSpPr/>
           <p:nvPr/>
         </p:nvSpPr>
@@ -6550,24 +6563,17 @@
             <a:prstDash val="solid"/>
           </a:ln>
           <a:effectLst>
-            <a:outerShdw blurRad="101600" dist="38100" dir="8100000" algn="bl" rotWithShape="0">
+            <a:outerShdw sx="100000" sy="100000" kx="0" ky="0" algn="bl" rotWithShape="0" blurRad="101600" dist="38100" dir="8100000">
               <a:srgbClr val="000000">
                 <a:alpha val="15000"/>
               </a:srgbClr>
             </a:outerShdw>
           </a:effectLst>
         </p:spPr>
-        <p:txBody>
-          <a:bodyPr/>
-          <a:lstStyle/>
-          <a:p>
-            <a:endParaRPr lang="en-US"/>
-          </a:p>
-        </p:txBody>
-      </p:sp>
-      <p:sp>
-        <p:nvSpPr>
-          <p:cNvPr id="20" name="Shape 18"/>
+      </p:sp>
+      <p:sp>
+        <p:nvSpPr>
+          <p:cNvPr id="19" name="Shape 17"/>
           <p:cNvSpPr/>
           <p:nvPr/>
         </p:nvSpPr>
@@ -6589,17 +6595,10 @@
             <a:prstDash val="solid"/>
           </a:ln>
         </p:spPr>
-        <p:txBody>
-          <a:bodyPr/>
-          <a:lstStyle/>
-          <a:p>
-            <a:endParaRPr lang="en-US"/>
-          </a:p>
-        </p:txBody>
-      </p:sp>
-      <p:sp>
-        <p:nvSpPr>
-          <p:cNvPr id="21" name="Text 19"/>
+      </p:sp>
+      <p:sp>
+        <p:nvSpPr>
+          <p:cNvPr id="20" name="Text 18"/>
           <p:cNvSpPr/>
           <p:nvPr/>
         </p:nvSpPr>
@@ -6618,7 +6617,7 @@
           <a:bodyPr wrap="square" rtlCol="0" anchor="ctr"/>
           <a:lstStyle/>
           <a:p>
-            <a:pPr marL="0" indent="0" algn="ctr">
+            <a:pPr algn="ctr" indent="0" marL="0">
               <a:buNone/>
             </a:pPr>
             <a:r>
@@ -6635,7 +6634,7 @@
       </p:sp>
       <p:sp>
         <p:nvSpPr>
-          <p:cNvPr id="22" name="Text 20"/>
+          <p:cNvPr id="21" name="Text 19"/>
           <p:cNvSpPr/>
           <p:nvPr/>
         </p:nvSpPr>
@@ -6654,7 +6653,7 @@
           <a:bodyPr wrap="square" rtlCol="0" anchor="ctr"/>
           <a:lstStyle/>
           <a:p>
-            <a:pPr marL="0" indent="0">
+            <a:pPr indent="0" marL="0">
               <a:buNone/>
             </a:pPr>
             <a:r>
@@ -6674,7 +6673,7 @@
       </p:sp>
       <p:sp>
         <p:nvSpPr>
-          <p:cNvPr id="23" name="Text 21"/>
+          <p:cNvPr id="22" name="Text 20"/>
           <p:cNvSpPr/>
           <p:nvPr/>
         </p:nvSpPr>
@@ -6693,7 +6692,7 @@
           <a:bodyPr wrap="square" rtlCol="0" anchor="ctr"/>
           <a:lstStyle/>
           <a:p>
-            <a:pPr marL="0" indent="0">
+            <a:pPr indent="0" marL="0">
               <a:buNone/>
             </a:pPr>
             <a:r>
@@ -6713,7 +6712,7 @@
       </p:sp>
       <p:sp>
         <p:nvSpPr>
-          <p:cNvPr id="24" name="Text 22"/>
+          <p:cNvPr id="23" name="Text 21"/>
           <p:cNvSpPr/>
           <p:nvPr/>
         </p:nvSpPr>
@@ -6732,7 +6731,7 @@
           <a:bodyPr wrap="square" rtlCol="0" anchor="ctr"/>
           <a:lstStyle/>
           <a:p>
-            <a:pPr marL="0" indent="0">
+            <a:pPr indent="0" marL="0">
               <a:buNone/>
             </a:pPr>
             <a:r>
@@ -6752,7 +6751,7 @@
       </p:sp>
       <p:sp>
         <p:nvSpPr>
-          <p:cNvPr id="25" name="Shape 23"/>
+          <p:cNvPr id="24" name="Shape 22"/>
           <p:cNvSpPr/>
           <p:nvPr/>
         </p:nvSpPr>
@@ -6774,17 +6773,10 @@
             <a:prstDash val="solid"/>
           </a:ln>
         </p:spPr>
-        <p:txBody>
-          <a:bodyPr/>
-          <a:lstStyle/>
-          <a:p>
-            <a:endParaRPr lang="en-US"/>
-          </a:p>
-        </p:txBody>
-      </p:sp>
-      <p:sp>
-        <p:nvSpPr>
-          <p:cNvPr id="26" name="Text 24"/>
+      </p:sp>
+      <p:sp>
+        <p:nvSpPr>
+          <p:cNvPr id="25" name="Text 23"/>
           <p:cNvSpPr/>
           <p:nvPr/>
         </p:nvSpPr>
@@ -6803,7 +6795,7 @@
           <a:bodyPr wrap="square" rtlCol="0" anchor="ctr"/>
           <a:lstStyle/>
           <a:p>
-            <a:pPr marL="0" indent="0" algn="ctr">
+            <a:pPr algn="ctr" indent="0" marL="0">
               <a:buNone/>
             </a:pPr>
             <a:r>
@@ -6820,7 +6812,7 @@
       </p:sp>
       <p:sp>
         <p:nvSpPr>
-          <p:cNvPr id="27" name="Text 25"/>
+          <p:cNvPr id="26" name="Text 24"/>
           <p:cNvSpPr/>
           <p:nvPr/>
         </p:nvSpPr>
@@ -6839,7 +6831,7 @@
           <a:bodyPr wrap="square" rtlCol="0" anchor="ctr"/>
           <a:lstStyle/>
           <a:p>
-            <a:pPr marL="0" indent="0">
+            <a:pPr indent="0" marL="0">
               <a:buNone/>
             </a:pPr>
             <a:r>
@@ -6859,7 +6851,7 @@
       </p:sp>
       <p:sp>
         <p:nvSpPr>
-          <p:cNvPr id="28" name="Text 26"/>
+          <p:cNvPr id="27" name="Text 25"/>
           <p:cNvSpPr/>
           <p:nvPr/>
         </p:nvSpPr>
@@ -6878,7 +6870,7 @@
           <a:bodyPr wrap="square" rtlCol="0" anchor="ctr"/>
           <a:lstStyle/>
           <a:p>
-            <a:pPr marL="0" indent="0">
+            <a:pPr indent="0" marL="0">
               <a:buNone/>
             </a:pPr>
             <a:r>
@@ -6898,7 +6890,7 @@
       </p:sp>
       <p:sp>
         <p:nvSpPr>
-          <p:cNvPr id="29" name="Text 27"/>
+          <p:cNvPr id="28" name="Text 26"/>
           <p:cNvSpPr/>
           <p:nvPr/>
         </p:nvSpPr>
@@ -6917,7 +6909,7 @@
           <a:bodyPr wrap="square" rtlCol="0" anchor="ctr"/>
           <a:lstStyle/>
           <a:p>
-            <a:pPr marL="0" indent="0">
+            <a:pPr indent="0" marL="0">
               <a:buNone/>
             </a:pPr>
             <a:r>
@@ -6937,7 +6929,7 @@
       </p:sp>
       <p:sp>
         <p:nvSpPr>
-          <p:cNvPr id="30" name="Text 28"/>
+          <p:cNvPr id="29" name="Text 27"/>
           <p:cNvSpPr/>
           <p:nvPr/>
         </p:nvSpPr>
@@ -6956,7 +6948,7 @@
           <a:bodyPr wrap="square" rtlCol="0" anchor="ctr"/>
           <a:lstStyle/>
           <a:p>
-            <a:pPr marL="0" indent="0">
+            <a:pPr indent="0" marL="0">
               <a:buNone/>
             </a:pPr>
             <a:r>
@@ -6976,37 +6968,7 @@
       </p:sp>
       <p:sp>
         <p:nvSpPr>
-          <p:cNvPr id="31" name="Shape 29"/>
-          <p:cNvSpPr/>
-          <p:nvPr/>
-        </p:nvSpPr>
-        <p:spPr>
-          <a:xfrm>
-            <a:off x="5989320" y="2743200"/>
-            <a:ext cx="502920" cy="0"/>
-          </a:xfrm>
-          <a:prstGeom prst="line">
-            <a:avLst/>
-          </a:prstGeom>
-          <a:noFill/>
-          <a:ln w="25400">
-            <a:solidFill>
-              <a:srgbClr val="028090"/>
-            </a:solidFill>
-            <a:prstDash val="solid"/>
-          </a:ln>
-        </p:spPr>
-        <p:txBody>
-          <a:bodyPr/>
-          <a:lstStyle/>
-          <a:p>
-            <a:endParaRPr lang="en-US"/>
-          </a:p>
-        </p:txBody>
-      </p:sp>
-      <p:sp>
-        <p:nvSpPr>
-          <p:cNvPr id="32" name="Text 30"/>
+          <p:cNvPr id="30" name="Text 28"/>
           <p:cNvSpPr/>
           <p:nvPr/>
         </p:nvSpPr>
@@ -7025,7 +6987,7 @@
           <a:bodyPr wrap="square" rtlCol="0" anchor="ctr"/>
           <a:lstStyle/>
           <a:p>
-            <a:pPr marL="0" indent="0" algn="ctr">
+            <a:pPr algn="ctr" indent="0" marL="0">
               <a:buNone/>
             </a:pPr>
             <a:r>
@@ -7042,7 +7004,7 @@
       </p:sp>
       <p:sp>
         <p:nvSpPr>
-          <p:cNvPr id="33" name="Shape 31"/>
+          <p:cNvPr id="31" name="Shape 29"/>
           <p:cNvSpPr/>
           <p:nvPr/>
         </p:nvSpPr>
@@ -7064,24 +7026,17 @@
             <a:prstDash val="solid"/>
           </a:ln>
           <a:effectLst>
-            <a:outerShdw blurRad="101600" dist="38100" dir="8100000" algn="bl" rotWithShape="0">
+            <a:outerShdw sx="100000" sy="100000" kx="0" ky="0" algn="bl" rotWithShape="0" blurRad="101600" dist="38100" dir="8100000">
               <a:srgbClr val="000000">
                 <a:alpha val="15000"/>
               </a:srgbClr>
             </a:outerShdw>
           </a:effectLst>
         </p:spPr>
-        <p:txBody>
-          <a:bodyPr/>
-          <a:lstStyle/>
-          <a:p>
-            <a:endParaRPr lang="en-US"/>
-          </a:p>
-        </p:txBody>
-      </p:sp>
-      <p:sp>
-        <p:nvSpPr>
-          <p:cNvPr id="34" name="Shape 32"/>
+      </p:sp>
+      <p:sp>
+        <p:nvSpPr>
+          <p:cNvPr id="32" name="Shape 30"/>
           <p:cNvSpPr/>
           <p:nvPr/>
         </p:nvSpPr>
@@ -7103,17 +7058,10 @@
             <a:prstDash val="solid"/>
           </a:ln>
         </p:spPr>
-        <p:txBody>
-          <a:bodyPr/>
-          <a:lstStyle/>
-          <a:p>
-            <a:endParaRPr lang="en-US"/>
-          </a:p>
-        </p:txBody>
-      </p:sp>
-      <p:sp>
-        <p:nvSpPr>
-          <p:cNvPr id="35" name="Text 33"/>
+      </p:sp>
+      <p:sp>
+        <p:nvSpPr>
+          <p:cNvPr id="33" name="Text 31"/>
           <p:cNvSpPr/>
           <p:nvPr/>
         </p:nvSpPr>
@@ -7132,7 +7080,7 @@
           <a:bodyPr wrap="square" rtlCol="0" anchor="ctr"/>
           <a:lstStyle/>
           <a:p>
-            <a:pPr marL="0" indent="0" algn="ctr">
+            <a:pPr algn="ctr" indent="0" marL="0">
               <a:buNone/>
             </a:pPr>
             <a:r>
@@ -7149,7 +7097,7 @@
       </p:sp>
       <p:sp>
         <p:nvSpPr>
-          <p:cNvPr id="36" name="Text 34"/>
+          <p:cNvPr id="34" name="Text 32"/>
           <p:cNvSpPr/>
           <p:nvPr/>
         </p:nvSpPr>
@@ -7168,7 +7116,7 @@
           <a:bodyPr wrap="square" rtlCol="0" anchor="ctr"/>
           <a:lstStyle/>
           <a:p>
-            <a:pPr marL="0" indent="0">
+            <a:pPr indent="0" marL="0">
               <a:buNone/>
             </a:pPr>
             <a:r>
@@ -7188,7 +7136,7 @@
       </p:sp>
       <p:sp>
         <p:nvSpPr>
-          <p:cNvPr id="37" name="Text 35"/>
+          <p:cNvPr id="35" name="Text 33"/>
           <p:cNvSpPr/>
           <p:nvPr/>
         </p:nvSpPr>
@@ -7207,7 +7155,7 @@
           <a:bodyPr wrap="square" rtlCol="0" anchor="ctr"/>
           <a:lstStyle/>
           <a:p>
-            <a:pPr marL="0" indent="0">
+            <a:pPr indent="0" marL="0">
               <a:buNone/>
             </a:pPr>
             <a:r>
@@ -7227,7 +7175,7 @@
       </p:sp>
       <p:sp>
         <p:nvSpPr>
-          <p:cNvPr id="38" name="Text 36"/>
+          <p:cNvPr id="36" name="Text 34"/>
           <p:cNvSpPr/>
           <p:nvPr/>
         </p:nvSpPr>
@@ -7246,7 +7194,7 @@
           <a:bodyPr wrap="square" rtlCol="0" anchor="ctr"/>
           <a:lstStyle/>
           <a:p>
-            <a:pPr marL="0" indent="0">
+            <a:pPr indent="0" marL="0">
               <a:buNone/>
             </a:pPr>
             <a:r>
@@ -7266,7 +7214,7 @@
       </p:sp>
       <p:sp>
         <p:nvSpPr>
-          <p:cNvPr id="39" name="Shape 37"/>
+          <p:cNvPr id="37" name="Shape 35"/>
           <p:cNvSpPr/>
           <p:nvPr/>
         </p:nvSpPr>
@@ -7288,17 +7236,10 @@
             <a:prstDash val="solid"/>
           </a:ln>
         </p:spPr>
-        <p:txBody>
-          <a:bodyPr/>
-          <a:lstStyle/>
-          <a:p>
-            <a:endParaRPr lang="en-US"/>
-          </a:p>
-        </p:txBody>
-      </p:sp>
-      <p:sp>
-        <p:nvSpPr>
-          <p:cNvPr id="40" name="Text 38"/>
+      </p:sp>
+      <p:sp>
+        <p:nvSpPr>
+          <p:cNvPr id="38" name="Text 36"/>
           <p:cNvSpPr/>
           <p:nvPr/>
         </p:nvSpPr>
@@ -7317,7 +7258,7 @@
           <a:bodyPr wrap="square" rtlCol="0" anchor="ctr"/>
           <a:lstStyle/>
           <a:p>
-            <a:pPr marL="0" indent="0" algn="ctr">
+            <a:pPr algn="ctr" indent="0" marL="0">
               <a:buNone/>
             </a:pPr>
             <a:r>
@@ -7334,7 +7275,7 @@
       </p:sp>
       <p:sp>
         <p:nvSpPr>
-          <p:cNvPr id="41" name="Text 39"/>
+          <p:cNvPr id="39" name="Text 37"/>
           <p:cNvSpPr/>
           <p:nvPr/>
         </p:nvSpPr>
@@ -7353,7 +7294,7 @@
           <a:bodyPr wrap="square" rtlCol="0" anchor="ctr"/>
           <a:lstStyle/>
           <a:p>
-            <a:pPr marL="0" indent="0">
+            <a:pPr indent="0" marL="0">
               <a:buNone/>
             </a:pPr>
             <a:r>
@@ -7373,7 +7314,7 @@
       </p:sp>
       <p:sp>
         <p:nvSpPr>
-          <p:cNvPr id="42" name="Text 40"/>
+          <p:cNvPr id="40" name="Text 38"/>
           <p:cNvSpPr/>
           <p:nvPr/>
         </p:nvSpPr>
@@ -7392,7 +7333,7 @@
           <a:bodyPr wrap="square" rtlCol="0" anchor="ctr"/>
           <a:lstStyle/>
           <a:p>
-            <a:pPr marL="0" indent="0">
+            <a:pPr indent="0" marL="0">
               <a:buNone/>
             </a:pPr>
             <a:r>
@@ -7412,7 +7353,7 @@
       </p:sp>
       <p:sp>
         <p:nvSpPr>
-          <p:cNvPr id="43" name="Text 41"/>
+          <p:cNvPr id="41" name="Text 39"/>
           <p:cNvSpPr/>
           <p:nvPr/>
         </p:nvSpPr>
@@ -7431,7 +7372,7 @@
           <a:bodyPr wrap="square" rtlCol="0" anchor="ctr"/>
           <a:lstStyle/>
           <a:p>
-            <a:pPr marL="0" indent="0">
+            <a:pPr indent="0" marL="0">
               <a:buNone/>
             </a:pPr>
             <a:r>
@@ -7451,7 +7392,7 @@
       </p:sp>
       <p:sp>
         <p:nvSpPr>
-          <p:cNvPr id="44" name="Text 42"/>
+          <p:cNvPr id="42" name="Text 40"/>
           <p:cNvSpPr/>
           <p:nvPr/>
         </p:nvSpPr>
@@ -7470,7 +7411,7 @@
           <a:bodyPr wrap="square" rtlCol="0" anchor="ctr"/>
           <a:lstStyle/>
           <a:p>
-            <a:pPr marL="0" indent="0">
+            <a:pPr indent="0" marL="0">
               <a:buNone/>
             </a:pPr>
             <a:r>
@@ -7504,7 +7445,6 @@
         <a:solidFill>
           <a:srgbClr val="F0F4F8"/>
         </a:solidFill>
-        <a:effectLst/>
       </p:bgPr>
     </p:bg>
     <p:spTree>
@@ -7545,13 +7485,6 @@
             <a:prstDash val="solid"/>
           </a:ln>
         </p:spPr>
-        <p:txBody>
-          <a:bodyPr/>
-          <a:lstStyle/>
-          <a:p>
-            <a:endParaRPr lang="en-US"/>
-          </a:p>
-        </p:txBody>
       </p:sp>
       <p:sp>
         <p:nvSpPr>
@@ -7574,11 +7507,11 @@
           <a:bodyPr wrap="square" rtlCol="0" anchor="ctr"/>
           <a:lstStyle/>
           <a:p>
-            <a:pPr marL="0" indent="0">
-              <a:buNone/>
-            </a:pPr>
-            <a:r>
-              <a:rPr lang="en-US" sz="1300" b="1" kern="0" spc="400" dirty="0">
+            <a:pPr indent="0" marL="0">
+              <a:buNone/>
+            </a:pPr>
+            <a:r>
+              <a:rPr lang="en-US" sz="1300" b="1" spc="400" kern="0" dirty="0">
                 <a:solidFill>
                   <a:srgbClr val="028090"/>
                 </a:solidFill>
@@ -7610,7 +7543,7 @@
           <a:bodyPr wrap="square" rtlCol="0" anchor="ctr"/>
           <a:lstStyle/>
           <a:p>
-            <a:pPr marL="0" indent="0" algn="r">
+            <a:pPr algn="r" indent="0" marL="0">
               <a:buNone/>
             </a:pPr>
             <a:r>
@@ -7649,20 +7582,13 @@
             <a:prstDash val="solid"/>
           </a:ln>
           <a:effectLst>
-            <a:outerShdw blurRad="101600" dist="38100" dir="8100000" algn="bl" rotWithShape="0">
+            <a:outerShdw sx="100000" sy="100000" kx="0" ky="0" algn="bl" rotWithShape="0" blurRad="101600" dist="38100" dir="8100000">
               <a:srgbClr val="000000">
                 <a:alpha val="15000"/>
               </a:srgbClr>
             </a:outerShdw>
           </a:effectLst>
         </p:spPr>
-        <p:txBody>
-          <a:bodyPr/>
-          <a:lstStyle/>
-          <a:p>
-            <a:endParaRPr lang="en-US"/>
-          </a:p>
-        </p:txBody>
       </p:sp>
       <p:sp>
         <p:nvSpPr>
@@ -7688,13 +7614,6 @@
             <a:prstDash val="solid"/>
           </a:ln>
         </p:spPr>
-        <p:txBody>
-          <a:bodyPr/>
-          <a:lstStyle/>
-          <a:p>
-            <a:endParaRPr lang="en-US"/>
-          </a:p>
-        </p:txBody>
       </p:sp>
       <p:sp>
         <p:nvSpPr>
@@ -7717,7 +7636,7 @@
           <a:bodyPr wrap="square" rtlCol="0" anchor="ctr"/>
           <a:lstStyle/>
           <a:p>
-            <a:pPr marL="0" indent="0" algn="ctr">
+            <a:pPr algn="ctr" indent="0" marL="0">
               <a:buNone/>
             </a:pPr>
             <a:r>
@@ -7753,7 +7672,7 @@
           <a:bodyPr wrap="square" rtlCol="0" anchor="ctr"/>
           <a:lstStyle/>
           <a:p>
-            <a:pPr marL="0" indent="0" algn="ctr">
+            <a:pPr algn="ctr" indent="0" marL="0">
               <a:buNone/>
             </a:pPr>
             <a:r>
@@ -7792,7 +7711,7 @@
           <a:bodyPr wrap="square" rtlCol="0" anchor="ctr"/>
           <a:lstStyle/>
           <a:p>
-            <a:pPr marL="0" indent="0" algn="ctr">
+            <a:pPr algn="ctr" indent="0" marL="0">
               <a:buNone/>
             </a:pPr>
             <a:r>
@@ -7832,13 +7751,6 @@
             <a:prstDash val="solid"/>
           </a:ln>
         </p:spPr>
-        <p:txBody>
-          <a:bodyPr/>
-          <a:lstStyle/>
-          <a:p>
-            <a:endParaRPr lang="en-US"/>
-          </a:p>
-        </p:txBody>
       </p:sp>
       <p:sp>
         <p:nvSpPr>
@@ -8024,20 +7936,13 @@
             <a:prstDash val="solid"/>
           </a:ln>
           <a:effectLst>
-            <a:outerShdw blurRad="101600" dist="38100" dir="8100000" algn="bl" rotWithShape="0">
+            <a:outerShdw sx="100000" sy="100000" kx="0" ky="0" algn="bl" rotWithShape="0" blurRad="101600" dist="38100" dir="8100000">
               <a:srgbClr val="000000">
                 <a:alpha val="15000"/>
               </a:srgbClr>
             </a:outerShdw>
           </a:effectLst>
         </p:spPr>
-        <p:txBody>
-          <a:bodyPr/>
-          <a:lstStyle/>
-          <a:p>
-            <a:endParaRPr lang="en-US"/>
-          </a:p>
-        </p:txBody>
       </p:sp>
       <p:sp>
         <p:nvSpPr>
@@ -8063,13 +7968,6 @@
             <a:prstDash val="solid"/>
           </a:ln>
         </p:spPr>
-        <p:txBody>
-          <a:bodyPr/>
-          <a:lstStyle/>
-          <a:p>
-            <a:endParaRPr lang="en-US"/>
-          </a:p>
-        </p:txBody>
       </p:sp>
       <p:sp>
         <p:nvSpPr>
@@ -8092,7 +7990,7 @@
           <a:bodyPr wrap="square" rtlCol="0" anchor="ctr"/>
           <a:lstStyle/>
           <a:p>
-            <a:pPr marL="0" indent="0" algn="ctr">
+            <a:pPr algn="ctr" indent="0" marL="0">
               <a:buNone/>
             </a:pPr>
             <a:r>
@@ -8128,7 +8026,7 @@
           <a:bodyPr wrap="square" rtlCol="0" anchor="ctr"/>
           <a:lstStyle/>
           <a:p>
-            <a:pPr marL="0" indent="0" algn="ctr">
+            <a:pPr algn="ctr" indent="0" marL="0">
               <a:buNone/>
             </a:pPr>
             <a:r>
@@ -8167,7 +8065,7 @@
           <a:bodyPr wrap="square" rtlCol="0" anchor="ctr"/>
           <a:lstStyle/>
           <a:p>
-            <a:pPr marL="0" indent="0" algn="ctr">
+            <a:pPr algn="ctr" indent="0" marL="0">
               <a:buNone/>
             </a:pPr>
             <a:r>
@@ -8207,13 +8105,6 @@
             <a:prstDash val="solid"/>
           </a:ln>
         </p:spPr>
-        <p:txBody>
-          <a:bodyPr/>
-          <a:lstStyle/>
-          <a:p>
-            <a:endParaRPr lang="en-US"/>
-          </a:p>
-        </p:txBody>
       </p:sp>
       <p:sp>
         <p:nvSpPr>
@@ -8356,7 +8247,7 @@
           <a:bodyPr wrap="square" rtlCol="0" anchor="ctr"/>
           <a:lstStyle/>
           <a:p>
-            <a:pPr marL="0" indent="0">
+            <a:pPr indent="0" marL="0">
               <a:buNone/>
             </a:pPr>
             <a:r>
@@ -8398,20 +8289,13 @@
             <a:prstDash val="solid"/>
           </a:ln>
           <a:effectLst>
-            <a:outerShdw blurRad="101600" dist="38100" dir="8100000" algn="bl" rotWithShape="0">
+            <a:outerShdw sx="100000" sy="100000" kx="0" ky="0" algn="bl" rotWithShape="0" blurRad="101600" dist="38100" dir="8100000">
               <a:srgbClr val="000000">
                 <a:alpha val="15000"/>
               </a:srgbClr>
             </a:outerShdw>
           </a:effectLst>
         </p:spPr>
-        <p:txBody>
-          <a:bodyPr/>
-          <a:lstStyle/>
-          <a:p>
-            <a:endParaRPr lang="en-US"/>
-          </a:p>
-        </p:txBody>
       </p:sp>
       <p:sp>
         <p:nvSpPr>
@@ -8437,13 +8321,6 @@
             <a:prstDash val="solid"/>
           </a:ln>
         </p:spPr>
-        <p:txBody>
-          <a:bodyPr/>
-          <a:lstStyle/>
-          <a:p>
-            <a:endParaRPr lang="en-US"/>
-          </a:p>
-        </p:txBody>
       </p:sp>
       <p:sp>
         <p:nvSpPr>
@@ -8466,7 +8343,7 @@
           <a:bodyPr wrap="square" rtlCol="0" anchor="ctr"/>
           <a:lstStyle/>
           <a:p>
-            <a:pPr marL="0" indent="0" algn="ctr">
+            <a:pPr algn="ctr" indent="0" marL="0">
               <a:buNone/>
             </a:pPr>
             <a:r>
@@ -8502,7 +8379,7 @@
           <a:bodyPr wrap="square" rtlCol="0" anchor="ctr"/>
           <a:lstStyle/>
           <a:p>
-            <a:pPr marL="0" indent="0" algn="ctr">
+            <a:pPr algn="ctr" indent="0" marL="0">
               <a:buNone/>
             </a:pPr>
             <a:r>
@@ -8541,7 +8418,7 @@
           <a:bodyPr wrap="square" rtlCol="0" anchor="ctr"/>
           <a:lstStyle/>
           <a:p>
-            <a:pPr marL="0" indent="0" algn="ctr">
+            <a:pPr algn="ctr" indent="0" marL="0">
               <a:buNone/>
             </a:pPr>
             <a:r>
@@ -8581,13 +8458,6 @@
             <a:prstDash val="solid"/>
           </a:ln>
         </p:spPr>
-        <p:txBody>
-          <a:bodyPr/>
-          <a:lstStyle/>
-          <a:p>
-            <a:endParaRPr lang="en-US"/>
-          </a:p>
-        </p:txBody>
       </p:sp>
       <p:sp>
         <p:nvSpPr>
@@ -8730,7 +8600,7 @@
           <a:bodyPr wrap="square" rtlCol="0" anchor="ctr"/>
           <a:lstStyle/>
           <a:p>
-            <a:pPr marL="0" indent="0">
+            <a:pPr indent="0" marL="0">
               <a:buNone/>
             </a:pPr>
             <a:r>
@@ -8764,7 +8634,6 @@
         <a:solidFill>
           <a:srgbClr val="1A1A2E"/>
         </a:solidFill>
-        <a:effectLst/>
       </p:bgPr>
     </p:bg>
     <p:spTree>
@@ -8805,13 +8674,6 @@
             <a:prstDash val="solid"/>
           </a:ln>
         </p:spPr>
-        <p:txBody>
-          <a:bodyPr/>
-          <a:lstStyle/>
-          <a:p>
-            <a:endParaRPr lang="en-US"/>
-          </a:p>
-        </p:txBody>
       </p:sp>
       <p:sp>
         <p:nvSpPr>
@@ -8834,11 +8696,11 @@
           <a:bodyPr wrap="square" rtlCol="0" anchor="ctr"/>
           <a:lstStyle/>
           <a:p>
-            <a:pPr marL="0" indent="0">
-              <a:buNone/>
-            </a:pPr>
-            <a:r>
-              <a:rPr lang="en-US" sz="1300" b="1" kern="0" spc="400" dirty="0">
+            <a:pPr indent="0" marL="0">
+              <a:buNone/>
+            </a:pPr>
+            <a:r>
+              <a:rPr lang="en-US" sz="1300" b="1" spc="400" kern="0" dirty="0">
                 <a:solidFill>
                   <a:srgbClr val="028090"/>
                 </a:solidFill>
@@ -8870,7 +8732,7 @@
           <a:bodyPr wrap="square" rtlCol="0" anchor="ctr"/>
           <a:lstStyle/>
           <a:p>
-            <a:pPr marL="0" indent="0" algn="r">
+            <a:pPr algn="r" indent="0" marL="0">
               <a:buNone/>
             </a:pPr>
             <a:r>
@@ -8909,20 +8771,13 @@
             <a:prstDash val="solid"/>
           </a:ln>
           <a:effectLst>
-            <a:outerShdw blurRad="101600" dist="38100" dir="8100000" algn="bl" rotWithShape="0">
+            <a:outerShdw sx="100000" sy="100000" kx="0" ky="0" algn="bl" rotWithShape="0" blurRad="101600" dist="38100" dir="8100000">
               <a:srgbClr val="000000">
                 <a:alpha val="15000"/>
               </a:srgbClr>
             </a:outerShdw>
           </a:effectLst>
         </p:spPr>
-        <p:txBody>
-          <a:bodyPr/>
-          <a:lstStyle/>
-          <a:p>
-            <a:endParaRPr lang="en-US"/>
-          </a:p>
-        </p:txBody>
       </p:sp>
       <p:sp>
         <p:nvSpPr>
@@ -8948,13 +8803,6 @@
             <a:prstDash val="solid"/>
           </a:ln>
         </p:spPr>
-        <p:txBody>
-          <a:bodyPr/>
-          <a:lstStyle/>
-          <a:p>
-            <a:endParaRPr lang="en-US"/>
-          </a:p>
-        </p:txBody>
       </p:sp>
       <p:sp>
         <p:nvSpPr>
@@ -8965,19 +8813,19 @@
         <p:spPr>
           <a:xfrm>
             <a:off x="438912" y="1143000"/>
-            <a:ext cx="1188720" cy="320040"/>
-          </a:xfrm>
-          <a:prstGeom prst="rect">
-            <a:avLst/>
-          </a:prstGeom>
-          <a:noFill/>
-          <a:ln/>
-        </p:spPr>
-        <p:txBody>
-          <a:bodyPr wrap="square" rtlCol="0" anchor="ctr"/>
-          <a:lstStyle/>
-          <a:p>
-            <a:pPr marL="0" indent="0">
+            <a:ext cx="1371600" cy="320040"/>
+          </a:xfrm>
+          <a:prstGeom prst="rect">
+            <a:avLst/>
+          </a:prstGeom>
+          <a:noFill/>
+          <a:ln/>
+        </p:spPr>
+        <p:txBody>
+          <a:bodyPr wrap="square" rtlCol="0" anchor="ctr"/>
+          <a:lstStyle/>
+          <a:p>
+            <a:pPr indent="0" marL="0">
               <a:buNone/>
             </a:pPr>
             <a:r>
@@ -9016,7 +8864,7 @@
           <a:bodyPr wrap="square" rtlCol="0" anchor="t"/>
           <a:lstStyle/>
           <a:p>
-            <a:pPr marL="0" indent="0">
+            <a:pPr indent="0" marL="0">
               <a:buNone/>
             </a:pPr>
             <a:r>
@@ -9058,20 +8906,13 @@
             <a:prstDash val="solid"/>
           </a:ln>
           <a:effectLst>
-            <a:outerShdw blurRad="101600" dist="38100" dir="8100000" algn="bl" rotWithShape="0">
+            <a:outerShdw sx="100000" sy="100000" kx="0" ky="0" algn="bl" rotWithShape="0" blurRad="101600" dist="38100" dir="8100000">
               <a:srgbClr val="000000">
                 <a:alpha val="15000"/>
               </a:srgbClr>
             </a:outerShdw>
           </a:effectLst>
         </p:spPr>
-        <p:txBody>
-          <a:bodyPr/>
-          <a:lstStyle/>
-          <a:p>
-            <a:endParaRPr lang="en-US"/>
-          </a:p>
-        </p:txBody>
       </p:sp>
       <p:sp>
         <p:nvSpPr>
@@ -9097,13 +8938,6 @@
             <a:prstDash val="solid"/>
           </a:ln>
         </p:spPr>
-        <p:txBody>
-          <a:bodyPr/>
-          <a:lstStyle/>
-          <a:p>
-            <a:endParaRPr lang="en-US"/>
-          </a:p>
-        </p:txBody>
       </p:sp>
       <p:sp>
         <p:nvSpPr>
@@ -9114,19 +8948,19 @@
         <p:spPr>
           <a:xfrm>
             <a:off x="438912" y="2075688"/>
-            <a:ext cx="1188720" cy="320040"/>
-          </a:xfrm>
-          <a:prstGeom prst="rect">
-            <a:avLst/>
-          </a:prstGeom>
-          <a:noFill/>
-          <a:ln/>
-        </p:spPr>
-        <p:txBody>
-          <a:bodyPr wrap="square" rtlCol="0" anchor="ctr"/>
-          <a:lstStyle/>
-          <a:p>
-            <a:pPr marL="0" indent="0">
+            <a:ext cx="1371600" cy="320040"/>
+          </a:xfrm>
+          <a:prstGeom prst="rect">
+            <a:avLst/>
+          </a:prstGeom>
+          <a:noFill/>
+          <a:ln/>
+        </p:spPr>
+        <p:txBody>
+          <a:bodyPr wrap="square" rtlCol="0" anchor="ctr"/>
+          <a:lstStyle/>
+          <a:p>
+            <a:pPr indent="0" marL="0">
               <a:buNone/>
             </a:pPr>
             <a:r>
@@ -9165,7 +8999,7 @@
           <a:bodyPr wrap="square" rtlCol="0" anchor="t"/>
           <a:lstStyle/>
           <a:p>
-            <a:pPr marL="0" indent="0">
+            <a:pPr indent="0" marL="0">
               <a:buNone/>
             </a:pPr>
             <a:r>
@@ -9207,20 +9041,13 @@
             <a:prstDash val="solid"/>
           </a:ln>
           <a:effectLst>
-            <a:outerShdw blurRad="101600" dist="38100" dir="8100000" algn="bl" rotWithShape="0">
+            <a:outerShdw sx="100000" sy="100000" kx="0" ky="0" algn="bl" rotWithShape="0" blurRad="101600" dist="38100" dir="8100000">
               <a:srgbClr val="000000">
                 <a:alpha val="15000"/>
               </a:srgbClr>
             </a:outerShdw>
           </a:effectLst>
         </p:spPr>
-        <p:txBody>
-          <a:bodyPr/>
-          <a:lstStyle/>
-          <a:p>
-            <a:endParaRPr lang="en-US"/>
-          </a:p>
-        </p:txBody>
       </p:sp>
       <p:sp>
         <p:nvSpPr>
@@ -9246,13 +9073,6 @@
             <a:prstDash val="solid"/>
           </a:ln>
         </p:spPr>
-        <p:txBody>
-          <a:bodyPr/>
-          <a:lstStyle/>
-          <a:p>
-            <a:endParaRPr lang="en-US"/>
-          </a:p>
-        </p:txBody>
       </p:sp>
       <p:sp>
         <p:nvSpPr>
@@ -9263,19 +9083,19 @@
         <p:spPr>
           <a:xfrm>
             <a:off x="438912" y="3008376"/>
-            <a:ext cx="1188720" cy="320040"/>
-          </a:xfrm>
-          <a:prstGeom prst="rect">
-            <a:avLst/>
-          </a:prstGeom>
-          <a:noFill/>
-          <a:ln/>
-        </p:spPr>
-        <p:txBody>
-          <a:bodyPr wrap="square" rtlCol="0" anchor="ctr"/>
-          <a:lstStyle/>
-          <a:p>
-            <a:pPr marL="0" indent="0">
+            <a:ext cx="1371600" cy="320040"/>
+          </a:xfrm>
+          <a:prstGeom prst="rect">
+            <a:avLst/>
+          </a:prstGeom>
+          <a:noFill/>
+          <a:ln/>
+        </p:spPr>
+        <p:txBody>
+          <a:bodyPr wrap="square" rtlCol="0" anchor="ctr"/>
+          <a:lstStyle/>
+          <a:p>
+            <a:pPr indent="0" marL="0">
               <a:buNone/>
             </a:pPr>
             <a:r>
@@ -9314,7 +9134,7 @@
           <a:bodyPr wrap="square" rtlCol="0" anchor="t"/>
           <a:lstStyle/>
           <a:p>
-            <a:pPr marL="0" indent="0">
+            <a:pPr indent="0" marL="0">
               <a:buNone/>
             </a:pPr>
             <a:r>
@@ -9326,7 +9146,7 @@
                 <a:ea typeface="Calibri" pitchFamily="34" charset="-122"/>
                 <a:cs typeface="Calibri" pitchFamily="34" charset="-120"/>
               </a:rPr>
-              <a:t>MongoDB (append-only collection)</a:t>
+              <a:t>MongoDB Atlas (append-only)</a:t>
             </a:r>
             <a:endParaRPr lang="en-US" sz="1100" dirty="0"/>
           </a:p>
@@ -9356,20 +9176,13 @@
             <a:prstDash val="solid"/>
           </a:ln>
           <a:effectLst>
-            <a:outerShdw blurRad="101600" dist="38100" dir="8100000" algn="bl" rotWithShape="0">
+            <a:outerShdw sx="100000" sy="100000" kx="0" ky="0" algn="bl" rotWithShape="0" blurRad="101600" dist="38100" dir="8100000">
               <a:srgbClr val="000000">
                 <a:alpha val="15000"/>
               </a:srgbClr>
             </a:outerShdw>
           </a:effectLst>
         </p:spPr>
-        <p:txBody>
-          <a:bodyPr/>
-          <a:lstStyle/>
-          <a:p>
-            <a:endParaRPr lang="en-US"/>
-          </a:p>
-        </p:txBody>
       </p:sp>
       <p:sp>
         <p:nvSpPr>
@@ -9395,13 +9208,6 @@
             <a:prstDash val="solid"/>
           </a:ln>
         </p:spPr>
-        <p:txBody>
-          <a:bodyPr/>
-          <a:lstStyle/>
-          <a:p>
-            <a:endParaRPr lang="en-US"/>
-          </a:p>
-        </p:txBody>
       </p:sp>
       <p:sp>
         <p:nvSpPr>
@@ -9412,19 +9218,19 @@
         <p:spPr>
           <a:xfrm>
             <a:off x="438912" y="3941064"/>
-            <a:ext cx="1188720" cy="320040"/>
-          </a:xfrm>
-          <a:prstGeom prst="rect">
-            <a:avLst/>
-          </a:prstGeom>
-          <a:noFill/>
-          <a:ln/>
-        </p:spPr>
-        <p:txBody>
-          <a:bodyPr wrap="square" rtlCol="0" anchor="ctr"/>
-          <a:lstStyle/>
-          <a:p>
-            <a:pPr marL="0" indent="0">
+            <a:ext cx="1371600" cy="320040"/>
+          </a:xfrm>
+          <a:prstGeom prst="rect">
+            <a:avLst/>
+          </a:prstGeom>
+          <a:noFill/>
+          <a:ln/>
+        </p:spPr>
+        <p:txBody>
+          <a:bodyPr wrap="square" rtlCol="0" anchor="ctr"/>
+          <a:lstStyle/>
+          <a:p>
+            <a:pPr indent="0" marL="0">
               <a:buNone/>
             </a:pPr>
             <a:r>
@@ -9463,7 +9269,7 @@
           <a:bodyPr wrap="square" rtlCol="0" anchor="t"/>
           <a:lstStyle/>
           <a:p>
-            <a:pPr marL="0" indent="0">
+            <a:pPr indent="0" marL="0">
               <a:buNone/>
             </a:pPr>
             <a:r>
@@ -9505,20 +9311,13 @@
             <a:prstDash val="solid"/>
           </a:ln>
           <a:effectLst>
-            <a:outerShdw blurRad="101600" dist="38100" dir="8100000" algn="bl" rotWithShape="0">
+            <a:outerShdw sx="100000" sy="100000" kx="0" ky="0" algn="bl" rotWithShape="0" blurRad="101600" dist="38100" dir="8100000">
               <a:srgbClr val="000000">
                 <a:alpha val="15000"/>
               </a:srgbClr>
             </a:outerShdw>
           </a:effectLst>
         </p:spPr>
-        <p:txBody>
-          <a:bodyPr/>
-          <a:lstStyle/>
-          <a:p>
-            <a:endParaRPr lang="en-US"/>
-          </a:p>
-        </p:txBody>
       </p:sp>
       <p:sp>
         <p:nvSpPr>
@@ -9544,13 +9343,6 @@
             <a:prstDash val="solid"/>
           </a:ln>
         </p:spPr>
-        <p:txBody>
-          <a:bodyPr/>
-          <a:lstStyle/>
-          <a:p>
-            <a:endParaRPr lang="en-US"/>
-          </a:p>
-        </p:txBody>
       </p:sp>
       <p:sp>
         <p:nvSpPr>
@@ -9561,19 +9353,19 @@
         <p:spPr>
           <a:xfrm>
             <a:off x="4873752" y="1143000"/>
-            <a:ext cx="1188720" cy="320040"/>
-          </a:xfrm>
-          <a:prstGeom prst="rect">
-            <a:avLst/>
-          </a:prstGeom>
-          <a:noFill/>
-          <a:ln/>
-        </p:spPr>
-        <p:txBody>
-          <a:bodyPr wrap="square" rtlCol="0" anchor="ctr"/>
-          <a:lstStyle/>
-          <a:p>
-            <a:pPr marL="0" indent="0">
+            <a:ext cx="1371600" cy="320040"/>
+          </a:xfrm>
+          <a:prstGeom prst="rect">
+            <a:avLst/>
+          </a:prstGeom>
+          <a:noFill/>
+          <a:ln/>
+        </p:spPr>
+        <p:txBody>
+          <a:bodyPr wrap="square" rtlCol="0" anchor="ctr"/>
+          <a:lstStyle/>
+          <a:p>
+            <a:pPr indent="0" marL="0">
               <a:buNone/>
             </a:pPr>
             <a:r>
@@ -9612,7 +9404,7 @@
           <a:bodyPr wrap="square" rtlCol="0" anchor="t"/>
           <a:lstStyle/>
           <a:p>
-            <a:pPr marL="0" indent="0">
+            <a:pPr indent="0" marL="0">
               <a:buNone/>
             </a:pPr>
             <a:r>
@@ -9654,20 +9446,13 @@
             <a:prstDash val="solid"/>
           </a:ln>
           <a:effectLst>
-            <a:outerShdw blurRad="101600" dist="38100" dir="8100000" algn="bl" rotWithShape="0">
+            <a:outerShdw sx="100000" sy="100000" kx="0" ky="0" algn="bl" rotWithShape="0" blurRad="101600" dist="38100" dir="8100000">
               <a:srgbClr val="000000">
                 <a:alpha val="15000"/>
               </a:srgbClr>
             </a:outerShdw>
           </a:effectLst>
         </p:spPr>
-        <p:txBody>
-          <a:bodyPr/>
-          <a:lstStyle/>
-          <a:p>
-            <a:endParaRPr lang="en-US"/>
-          </a:p>
-        </p:txBody>
       </p:sp>
       <p:sp>
         <p:nvSpPr>
@@ -9693,13 +9478,6 @@
             <a:prstDash val="solid"/>
           </a:ln>
         </p:spPr>
-        <p:txBody>
-          <a:bodyPr/>
-          <a:lstStyle/>
-          <a:p>
-            <a:endParaRPr lang="en-US"/>
-          </a:p>
-        </p:txBody>
       </p:sp>
       <p:sp>
         <p:nvSpPr>
@@ -9710,19 +9488,19 @@
         <p:spPr>
           <a:xfrm>
             <a:off x="4873752" y="2075688"/>
-            <a:ext cx="1188720" cy="320040"/>
-          </a:xfrm>
-          <a:prstGeom prst="rect">
-            <a:avLst/>
-          </a:prstGeom>
-          <a:noFill/>
-          <a:ln/>
-        </p:spPr>
-        <p:txBody>
-          <a:bodyPr wrap="square" rtlCol="0" anchor="ctr"/>
-          <a:lstStyle/>
-          <a:p>
-            <a:pPr marL="0" indent="0">
+            <a:ext cx="1371600" cy="320040"/>
+          </a:xfrm>
+          <a:prstGeom prst="rect">
+            <a:avLst/>
+          </a:prstGeom>
+          <a:noFill/>
+          <a:ln/>
+        </p:spPr>
+        <p:txBody>
+          <a:bodyPr wrap="square" rtlCol="0" anchor="ctr"/>
+          <a:lstStyle/>
+          <a:p>
+            <a:pPr indent="0" marL="0">
               <a:buNone/>
             </a:pPr>
             <a:r>
@@ -9761,7 +9539,7 @@
           <a:bodyPr wrap="square" rtlCol="0" anchor="t"/>
           <a:lstStyle/>
           <a:p>
-            <a:pPr marL="0" indent="0">
+            <a:pPr indent="0" marL="0">
               <a:buNone/>
             </a:pPr>
             <a:r>
@@ -9803,20 +9581,13 @@
             <a:prstDash val="solid"/>
           </a:ln>
           <a:effectLst>
-            <a:outerShdw blurRad="101600" dist="38100" dir="8100000" algn="bl" rotWithShape="0">
+            <a:outerShdw sx="100000" sy="100000" kx="0" ky="0" algn="bl" rotWithShape="0" blurRad="101600" dist="38100" dir="8100000">
               <a:srgbClr val="000000">
                 <a:alpha val="15000"/>
               </a:srgbClr>
             </a:outerShdw>
           </a:effectLst>
         </p:spPr>
-        <p:txBody>
-          <a:bodyPr/>
-          <a:lstStyle/>
-          <a:p>
-            <a:endParaRPr lang="en-US"/>
-          </a:p>
-        </p:txBody>
       </p:sp>
       <p:sp>
         <p:nvSpPr>
@@ -9842,13 +9613,6 @@
             <a:prstDash val="solid"/>
           </a:ln>
         </p:spPr>
-        <p:txBody>
-          <a:bodyPr/>
-          <a:lstStyle/>
-          <a:p>
-            <a:endParaRPr lang="en-US"/>
-          </a:p>
-        </p:txBody>
       </p:sp>
       <p:sp>
         <p:nvSpPr>
@@ -9859,19 +9623,19 @@
         <p:spPr>
           <a:xfrm>
             <a:off x="4873752" y="3008376"/>
-            <a:ext cx="1188720" cy="320040"/>
-          </a:xfrm>
-          <a:prstGeom prst="rect">
-            <a:avLst/>
-          </a:prstGeom>
-          <a:noFill/>
-          <a:ln/>
-        </p:spPr>
-        <p:txBody>
-          <a:bodyPr wrap="square" rtlCol="0" anchor="ctr"/>
-          <a:lstStyle/>
-          <a:p>
-            <a:pPr marL="0" indent="0">
+            <a:ext cx="1371600" cy="320040"/>
+          </a:xfrm>
+          <a:prstGeom prst="rect">
+            <a:avLst/>
+          </a:prstGeom>
+          <a:noFill/>
+          <a:ln/>
+        </p:spPr>
+        <p:txBody>
+          <a:bodyPr wrap="square" rtlCol="0" anchor="ctr"/>
+          <a:lstStyle/>
+          <a:p>
+            <a:pPr indent="0" marL="0">
               <a:buNone/>
             </a:pPr>
             <a:r>
@@ -9910,7 +9674,7 @@
           <a:bodyPr wrap="square" rtlCol="0" anchor="t"/>
           <a:lstStyle/>
           <a:p>
-            <a:pPr marL="0" indent="0">
+            <a:pPr indent="0" marL="0">
               <a:buNone/>
             </a:pPr>
             <a:r>
@@ -9947,25 +9711,18 @@
           </a:solidFill>
           <a:ln w="12700">
             <a:solidFill>
-              <a:srgbClr val="2088FF"/>
+              <a:srgbClr val="8B5CF6"/>
             </a:solidFill>
             <a:prstDash val="solid"/>
           </a:ln>
           <a:effectLst>
-            <a:outerShdw blurRad="101600" dist="38100" dir="8100000" algn="bl" rotWithShape="0">
+            <a:outerShdw sx="100000" sy="100000" kx="0" ky="0" algn="bl" rotWithShape="0" blurRad="101600" dist="38100" dir="8100000">
               <a:srgbClr val="000000">
                 <a:alpha val="15000"/>
               </a:srgbClr>
             </a:outerShdw>
           </a:effectLst>
         </p:spPr>
-        <p:txBody>
-          <a:bodyPr/>
-          <a:lstStyle/>
-          <a:p>
-            <a:endParaRPr lang="en-US"/>
-          </a:p>
-        </p:txBody>
       </p:sp>
       <p:sp>
         <p:nvSpPr>
@@ -9982,22 +9739,15 @@
             <a:avLst/>
           </a:prstGeom>
           <a:solidFill>
-            <a:srgbClr val="2088FF"/>
+            <a:srgbClr val="8B5CF6"/>
           </a:solidFill>
           <a:ln w="12700">
             <a:solidFill>
-              <a:srgbClr val="2088FF"/>
+              <a:srgbClr val="8B5CF6"/>
             </a:solidFill>
             <a:prstDash val="solid"/>
           </a:ln>
         </p:spPr>
-        <p:txBody>
-          <a:bodyPr/>
-          <a:lstStyle/>
-          <a:p>
-            <a:endParaRPr lang="en-US"/>
-          </a:p>
-        </p:txBody>
       </p:sp>
       <p:sp>
         <p:nvSpPr>
@@ -10008,31 +9758,31 @@
         <p:spPr>
           <a:xfrm>
             <a:off x="4873752" y="3941064"/>
-            <a:ext cx="1188720" cy="320040"/>
-          </a:xfrm>
-          <a:prstGeom prst="rect">
-            <a:avLst/>
-          </a:prstGeom>
-          <a:noFill/>
-          <a:ln/>
-        </p:spPr>
-        <p:txBody>
-          <a:bodyPr wrap="square" rtlCol="0" anchor="ctr"/>
-          <a:lstStyle/>
-          <a:p>
-            <a:pPr marL="0" indent="0">
+            <a:ext cx="1371600" cy="320040"/>
+          </a:xfrm>
+          <a:prstGeom prst="rect">
+            <a:avLst/>
+          </a:prstGeom>
+          <a:noFill/>
+          <a:ln/>
+        </p:spPr>
+        <p:txBody>
+          <a:bodyPr wrap="square" rtlCol="0" anchor="ctr"/>
+          <a:lstStyle/>
+          <a:p>
+            <a:pPr indent="0" marL="0">
               <a:buNone/>
             </a:pPr>
             <a:r>
               <a:rPr lang="en-US" sz="1000" b="1" dirty="0">
                 <a:solidFill>
-                  <a:srgbClr val="2088FF"/>
+                  <a:srgbClr val="8B5CF6"/>
                 </a:solidFill>
                 <a:latin typeface="Calibri" pitchFamily="34" charset="0"/>
                 <a:ea typeface="Calibri" pitchFamily="34" charset="-122"/>
                 <a:cs typeface="Calibri" pitchFamily="34" charset="-120"/>
               </a:rPr>
-              <a:t>CI/CD</a:t>
+              <a:t>CI/CD + Deploy</a:t>
             </a:r>
             <a:endParaRPr lang="en-US" sz="1000" dirty="0"/>
           </a:p>
@@ -10059,7 +9809,7 @@
           <a:bodyPr wrap="square" rtlCol="0" anchor="t"/>
           <a:lstStyle/>
           <a:p>
-            <a:pPr marL="0" indent="0">
+            <a:pPr indent="0" marL="0">
               <a:buNone/>
             </a:pPr>
             <a:r>
@@ -10071,7 +9821,7 @@
                 <a:ea typeface="Calibri" pitchFamily="34" charset="-122"/>
                 <a:cs typeface="Calibri" pitchFamily="34" charset="-120"/>
               </a:rPr>
-              <a:t>GitHub Actions → Azure App Service</a:t>
+              <a:t>GitHub Actions → Render Cloud</a:t>
             </a:r>
             <a:endParaRPr lang="en-US" sz="1100" dirty="0"/>
           </a:p>
@@ -10093,7 +9843,6 @@
         <a:solidFill>
           <a:srgbClr val="F0F4F8"/>
         </a:solidFill>
-        <a:effectLst/>
       </p:bgPr>
     </p:bg>
     <p:spTree>
@@ -10134,13 +9883,6 @@
             <a:prstDash val="solid"/>
           </a:ln>
         </p:spPr>
-        <p:txBody>
-          <a:bodyPr/>
-          <a:lstStyle/>
-          <a:p>
-            <a:endParaRPr lang="en-US"/>
-          </a:p>
-        </p:txBody>
       </p:sp>
       <p:sp>
         <p:nvSpPr>
@@ -10163,11 +9905,11 @@
           <a:bodyPr wrap="square" rtlCol="0" anchor="ctr"/>
           <a:lstStyle/>
           <a:p>
-            <a:pPr marL="0" indent="0">
-              <a:buNone/>
-            </a:pPr>
-            <a:r>
-              <a:rPr lang="en-US" sz="1300" b="1" kern="0" spc="400" dirty="0">
+            <a:pPr indent="0" marL="0">
+              <a:buNone/>
+            </a:pPr>
+            <a:r>
+              <a:rPr lang="en-US" sz="1300" b="1" spc="400" kern="0" dirty="0">
                 <a:solidFill>
                   <a:srgbClr val="028090"/>
                 </a:solidFill>
@@ -10199,7 +9941,7 @@
           <a:bodyPr wrap="square" rtlCol="0" anchor="ctr"/>
           <a:lstStyle/>
           <a:p>
-            <a:pPr marL="0" indent="0" algn="r">
+            <a:pPr algn="r" indent="0" marL="0">
               <a:buNone/>
             </a:pPr>
             <a:r>
@@ -10238,13 +9980,6 @@
             <a:prstDash val="solid"/>
           </a:ln>
         </p:spPr>
-        <p:txBody>
-          <a:bodyPr/>
-          <a:lstStyle/>
-          <a:p>
-            <a:endParaRPr lang="en-US"/>
-          </a:p>
-        </p:txBody>
       </p:sp>
       <p:sp>
         <p:nvSpPr>
@@ -10267,7 +10002,7 @@
           <a:bodyPr wrap="square" rtlCol="0" anchor="ctr"/>
           <a:lstStyle/>
           <a:p>
-            <a:pPr marL="0" indent="0" algn="ctr">
+            <a:pPr algn="ctr" indent="0" marL="0">
               <a:buNone/>
             </a:pPr>
             <a:r>
@@ -10303,11 +10038,11 @@
           <a:bodyPr wrap="square" rtlCol="0" anchor="ctr"/>
           <a:lstStyle/>
           <a:p>
-            <a:pPr marL="0" indent="0" algn="ctr">
-              <a:buNone/>
-            </a:pPr>
-            <a:r>
-              <a:rPr lang="en-US" sz="1100" b="1" kern="0" spc="300" dirty="0">
+            <a:pPr algn="ctr" indent="0" marL="0">
+              <a:buNone/>
+            </a:pPr>
+            <a:r>
+              <a:rPr lang="en-US" sz="1100" b="1" spc="300" kern="0" dirty="0">
                 <a:solidFill>
                   <a:srgbClr val="FFFFFF"/>
                 </a:solidFill>
@@ -10342,13 +10077,6 @@
             <a:prstDash val="solid"/>
           </a:ln>
         </p:spPr>
-        <p:txBody>
-          <a:bodyPr/>
-          <a:lstStyle/>
-          <a:p>
-            <a:endParaRPr lang="en-US"/>
-          </a:p>
-        </p:txBody>
       </p:sp>
       <p:sp>
         <p:nvSpPr>
@@ -10371,7 +10099,7 @@
           <a:bodyPr wrap="square" rtlCol="0" anchor="ctr"/>
           <a:lstStyle/>
           <a:p>
-            <a:pPr marL="0" indent="0" algn="ctr">
+            <a:pPr algn="ctr" indent="0" marL="0">
               <a:buNone/>
             </a:pPr>
             <a:r>
@@ -10410,20 +10138,13 @@
             <a:prstDash val="solid"/>
           </a:ln>
           <a:effectLst>
-            <a:outerShdw blurRad="101600" dist="38100" dir="8100000" algn="bl" rotWithShape="0">
+            <a:outerShdw sx="100000" sy="100000" kx="0" ky="0" algn="bl" rotWithShape="0" blurRad="101600" dist="38100" dir="8100000">
               <a:srgbClr val="000000">
                 <a:alpha val="15000"/>
               </a:srgbClr>
             </a:outerShdw>
           </a:effectLst>
         </p:spPr>
-        <p:txBody>
-          <a:bodyPr/>
-          <a:lstStyle/>
-          <a:p>
-            <a:endParaRPr lang="en-US"/>
-          </a:p>
-        </p:txBody>
       </p:sp>
       <p:sp>
         <p:nvSpPr>
@@ -10449,13 +10170,6 @@
             <a:prstDash val="solid"/>
           </a:ln>
         </p:spPr>
-        <p:txBody>
-          <a:bodyPr/>
-          <a:lstStyle/>
-          <a:p>
-            <a:endParaRPr lang="en-US"/>
-          </a:p>
-        </p:txBody>
       </p:sp>
       <p:sp>
         <p:nvSpPr>
@@ -10478,7 +10192,7 @@
           <a:bodyPr wrap="square" rtlCol="0" anchor="ctr"/>
           <a:lstStyle/>
           <a:p>
-            <a:pPr marL="0" indent="0" algn="ctr">
+            <a:pPr algn="ctr" indent="0" marL="0">
               <a:buNone/>
             </a:pPr>
             <a:r>
@@ -10514,7 +10228,7 @@
           <a:bodyPr wrap="square" rtlCol="0" anchor="ctr"/>
           <a:lstStyle/>
           <a:p>
-            <a:pPr marL="0" indent="0">
+            <a:pPr indent="0" marL="0">
               <a:buNone/>
             </a:pPr>
             <a:r>
@@ -10553,7 +10267,7 @@
           <a:bodyPr wrap="square" rtlCol="0" anchor="ctr"/>
           <a:lstStyle/>
           <a:p>
-            <a:pPr marL="0" indent="0">
+            <a:pPr indent="0" marL="0">
               <a:buNone/>
             </a:pPr>
             <a:r>
@@ -10595,20 +10309,13 @@
             <a:prstDash val="solid"/>
           </a:ln>
           <a:effectLst>
-            <a:outerShdw blurRad="101600" dist="38100" dir="8100000" algn="bl" rotWithShape="0">
+            <a:outerShdw sx="100000" sy="100000" kx="0" ky="0" algn="bl" rotWithShape="0" blurRad="101600" dist="38100" dir="8100000">
               <a:srgbClr val="000000">
                 <a:alpha val="15000"/>
               </a:srgbClr>
             </a:outerShdw>
           </a:effectLst>
         </p:spPr>
-        <p:txBody>
-          <a:bodyPr/>
-          <a:lstStyle/>
-          <a:p>
-            <a:endParaRPr lang="en-US"/>
-          </a:p>
-        </p:txBody>
       </p:sp>
       <p:sp>
         <p:nvSpPr>
@@ -10634,13 +10341,6 @@
             <a:prstDash val="solid"/>
           </a:ln>
         </p:spPr>
-        <p:txBody>
-          <a:bodyPr/>
-          <a:lstStyle/>
-          <a:p>
-            <a:endParaRPr lang="en-US"/>
-          </a:p>
-        </p:txBody>
       </p:sp>
       <p:sp>
         <p:nvSpPr>
@@ -10663,7 +10363,7 @@
           <a:bodyPr wrap="square" rtlCol="0" anchor="ctr"/>
           <a:lstStyle/>
           <a:p>
-            <a:pPr marL="0" indent="0" algn="ctr">
+            <a:pPr algn="ctr" indent="0" marL="0">
               <a:buNone/>
             </a:pPr>
             <a:r>
@@ -10699,7 +10399,7 @@
           <a:bodyPr wrap="square" rtlCol="0" anchor="ctr"/>
           <a:lstStyle/>
           <a:p>
-            <a:pPr marL="0" indent="0">
+            <a:pPr indent="0" marL="0">
               <a:buNone/>
             </a:pPr>
             <a:r>
@@ -10738,7 +10438,7 @@
           <a:bodyPr wrap="square" rtlCol="0" anchor="ctr"/>
           <a:lstStyle/>
           <a:p>
-            <a:pPr marL="0" indent="0">
+            <a:pPr indent="0" marL="0">
               <a:buNone/>
             </a:pPr>
             <a:r>
@@ -10780,20 +10480,13 @@
             <a:prstDash val="solid"/>
           </a:ln>
           <a:effectLst>
-            <a:outerShdw blurRad="101600" dist="38100" dir="8100000" algn="bl" rotWithShape="0">
+            <a:outerShdw sx="100000" sy="100000" kx="0" ky="0" algn="bl" rotWithShape="0" blurRad="101600" dist="38100" dir="8100000">
               <a:srgbClr val="000000">
                 <a:alpha val="15000"/>
               </a:srgbClr>
             </a:outerShdw>
           </a:effectLst>
         </p:spPr>
-        <p:txBody>
-          <a:bodyPr/>
-          <a:lstStyle/>
-          <a:p>
-            <a:endParaRPr lang="en-US"/>
-          </a:p>
-        </p:txBody>
       </p:sp>
       <p:sp>
         <p:nvSpPr>
@@ -10819,13 +10512,6 @@
             <a:prstDash val="solid"/>
           </a:ln>
         </p:spPr>
-        <p:txBody>
-          <a:bodyPr/>
-          <a:lstStyle/>
-          <a:p>
-            <a:endParaRPr lang="en-US"/>
-          </a:p>
-        </p:txBody>
       </p:sp>
       <p:sp>
         <p:nvSpPr>
@@ -10848,7 +10534,7 @@
           <a:bodyPr wrap="square" rtlCol="0" anchor="ctr"/>
           <a:lstStyle/>
           <a:p>
-            <a:pPr marL="0" indent="0" algn="ctr">
+            <a:pPr algn="ctr" indent="0" marL="0">
               <a:buNone/>
             </a:pPr>
             <a:r>
@@ -10884,7 +10570,7 @@
           <a:bodyPr wrap="square" rtlCol="0" anchor="ctr"/>
           <a:lstStyle/>
           <a:p>
-            <a:pPr marL="0" indent="0">
+            <a:pPr indent="0" marL="0">
               <a:buNone/>
             </a:pPr>
             <a:r>
@@ -10923,7 +10609,7 @@
           <a:bodyPr wrap="square" rtlCol="0" anchor="ctr"/>
           <a:lstStyle/>
           <a:p>
-            <a:pPr marL="0" indent="0">
+            <a:pPr indent="0" marL="0">
               <a:buNone/>
             </a:pPr>
             <a:r>
@@ -10965,20 +10651,13 @@
             <a:prstDash val="solid"/>
           </a:ln>
           <a:effectLst>
-            <a:outerShdw blurRad="101600" dist="38100" dir="8100000" algn="bl" rotWithShape="0">
+            <a:outerShdw sx="100000" sy="100000" kx="0" ky="0" algn="bl" rotWithShape="0" blurRad="101600" dist="38100" dir="8100000">
               <a:srgbClr val="000000">
                 <a:alpha val="15000"/>
               </a:srgbClr>
             </a:outerShdw>
           </a:effectLst>
         </p:spPr>
-        <p:txBody>
-          <a:bodyPr/>
-          <a:lstStyle/>
-          <a:p>
-            <a:endParaRPr lang="en-US"/>
-          </a:p>
-        </p:txBody>
       </p:sp>
       <p:sp>
         <p:nvSpPr>
@@ -11004,13 +10683,6 @@
             <a:prstDash val="solid"/>
           </a:ln>
         </p:spPr>
-        <p:txBody>
-          <a:bodyPr/>
-          <a:lstStyle/>
-          <a:p>
-            <a:endParaRPr lang="en-US"/>
-          </a:p>
-        </p:txBody>
       </p:sp>
       <p:sp>
         <p:nvSpPr>
@@ -11033,7 +10705,7 @@
           <a:bodyPr wrap="square" rtlCol="0" anchor="ctr"/>
           <a:lstStyle/>
           <a:p>
-            <a:pPr marL="0" indent="0" algn="ctr">
+            <a:pPr algn="ctr" indent="0" marL="0">
               <a:buNone/>
             </a:pPr>
             <a:r>
@@ -11069,7 +10741,7 @@
           <a:bodyPr wrap="square" rtlCol="0" anchor="ctr"/>
           <a:lstStyle/>
           <a:p>
-            <a:pPr marL="0" indent="0">
+            <a:pPr indent="0" marL="0">
               <a:buNone/>
             </a:pPr>
             <a:r>
@@ -11108,7 +10780,7 @@
           <a:bodyPr wrap="square" rtlCol="0" anchor="ctr"/>
           <a:lstStyle/>
           <a:p>
-            <a:pPr marL="0" indent="0">
+            <a:pPr indent="0" marL="0">
               <a:buNone/>
             </a:pPr>
             <a:r>
@@ -11150,20 +10822,13 @@
             <a:prstDash val="solid"/>
           </a:ln>
           <a:effectLst>
-            <a:outerShdw blurRad="101600" dist="38100" dir="8100000" algn="bl" rotWithShape="0">
+            <a:outerShdw sx="100000" sy="100000" kx="0" ky="0" algn="bl" rotWithShape="0" blurRad="101600" dist="38100" dir="8100000">
               <a:srgbClr val="000000">
                 <a:alpha val="15000"/>
               </a:srgbClr>
             </a:outerShdw>
           </a:effectLst>
         </p:spPr>
-        <p:txBody>
-          <a:bodyPr/>
-          <a:lstStyle/>
-          <a:p>
-            <a:endParaRPr lang="en-US"/>
-          </a:p>
-        </p:txBody>
       </p:sp>
       <p:sp>
         <p:nvSpPr>
@@ -11189,13 +10854,6 @@
             <a:prstDash val="solid"/>
           </a:ln>
         </p:spPr>
-        <p:txBody>
-          <a:bodyPr/>
-          <a:lstStyle/>
-          <a:p>
-            <a:endParaRPr lang="en-US"/>
-          </a:p>
-        </p:txBody>
       </p:sp>
       <p:sp>
         <p:nvSpPr>
@@ -11218,7 +10876,7 @@
           <a:bodyPr wrap="square" rtlCol="0" anchor="ctr"/>
           <a:lstStyle/>
           <a:p>
-            <a:pPr marL="0" indent="0" algn="ctr">
+            <a:pPr algn="ctr" indent="0" marL="0">
               <a:buNone/>
             </a:pPr>
             <a:r>
@@ -11254,7 +10912,7 @@
           <a:bodyPr wrap="square" rtlCol="0" anchor="ctr"/>
           <a:lstStyle/>
           <a:p>
-            <a:pPr marL="0" indent="0">
+            <a:pPr indent="0" marL="0">
               <a:buNone/>
             </a:pPr>
             <a:r>
@@ -11293,7 +10951,7 @@
           <a:bodyPr wrap="square" rtlCol="0" anchor="ctr"/>
           <a:lstStyle/>
           <a:p>
-            <a:pPr marL="0" indent="0">
+            <a:pPr indent="0" marL="0">
               <a:buNone/>
             </a:pPr>
             <a:r>
@@ -11327,7 +10985,6 @@
         <a:solidFill>
           <a:srgbClr val="1A1A2E"/>
         </a:solidFill>
-        <a:effectLst/>
       </p:bgPr>
     </p:bg>
     <p:spTree>
@@ -11368,13 +11025,6 @@
             <a:prstDash val="solid"/>
           </a:ln>
         </p:spPr>
-        <p:txBody>
-          <a:bodyPr/>
-          <a:lstStyle/>
-          <a:p>
-            <a:endParaRPr lang="en-US"/>
-          </a:p>
-        </p:txBody>
       </p:sp>
       <p:sp>
         <p:nvSpPr>
@@ -11397,11 +11047,11 @@
           <a:bodyPr wrap="square" rtlCol="0" anchor="ctr"/>
           <a:lstStyle/>
           <a:p>
-            <a:pPr marL="0" indent="0">
-              <a:buNone/>
-            </a:pPr>
-            <a:r>
-              <a:rPr lang="en-US" sz="1300" b="1" kern="0" spc="400" dirty="0">
+            <a:pPr indent="0" marL="0">
+              <a:buNone/>
+            </a:pPr>
+            <a:r>
+              <a:rPr lang="en-US" sz="1300" b="1" spc="400" kern="0" dirty="0">
                 <a:solidFill>
                   <a:srgbClr val="028090"/>
                 </a:solidFill>
@@ -11433,7 +11083,7 @@
           <a:bodyPr wrap="square" rtlCol="0" anchor="ctr"/>
           <a:lstStyle/>
           <a:p>
-            <a:pPr marL="0" indent="0" algn="r">
+            <a:pPr algn="r" indent="0" marL="0">
               <a:buNone/>
             </a:pPr>
             <a:r>
@@ -11442,7 +11092,7 @@
                   <a:srgbClr val="FFFFFF"/>
                 </a:solidFill>
               </a:rPr>
-              <a:t>CI/CD Pipeline &amp; Azure Deployment</a:t>
+              <a:t>CI/CD Pipeline &amp; Render Deployment</a:t>
             </a:r>
             <a:endParaRPr lang="en-US" sz="2600" dirty="0"/>
           </a:p>
@@ -11472,20 +11122,13 @@
             <a:prstDash val="solid"/>
           </a:ln>
           <a:effectLst>
-            <a:outerShdw blurRad="101600" dist="38100" dir="8100000" algn="bl" rotWithShape="0">
+            <a:outerShdw sx="100000" sy="100000" kx="0" ky="0" algn="bl" rotWithShape="0" blurRad="101600" dist="38100" dir="8100000">
               <a:srgbClr val="000000">
                 <a:alpha val="15000"/>
               </a:srgbClr>
             </a:outerShdw>
           </a:effectLst>
         </p:spPr>
-        <p:txBody>
-          <a:bodyPr/>
-          <a:lstStyle/>
-          <a:p>
-            <a:endParaRPr lang="en-US"/>
-          </a:p>
-        </p:txBody>
       </p:sp>
       <p:sp>
         <p:nvSpPr>
@@ -11508,7 +11151,7 @@
           <a:bodyPr wrap="square" rtlCol="0" anchor="ctr"/>
           <a:lstStyle/>
           <a:p>
-            <a:pPr marL="0" indent="0" algn="ctr">
+            <a:pPr algn="ctr" indent="0" marL="0">
               <a:buNone/>
             </a:pPr>
             <a:r>
@@ -11544,7 +11187,7 @@
           <a:bodyPr wrap="square" rtlCol="0" anchor="ctr"/>
           <a:lstStyle/>
           <a:p>
-            <a:pPr marL="0" indent="0" algn="ctr">
+            <a:pPr algn="ctr" indent="0" marL="0">
               <a:buNone/>
             </a:pPr>
             <a:r>
@@ -11583,11 +11226,11 @@
           <a:bodyPr wrap="square" rtlCol="0" anchor="ctr"/>
           <a:lstStyle/>
           <a:p>
-            <a:pPr marL="0" indent="0" algn="ctr">
-              <a:buNone/>
-            </a:pPr>
-            <a:r>
-              <a:rPr lang="en-US" sz="1000" i="1" dirty="0">
+            <a:pPr algn="ctr" indent="0" marL="0">
+              <a:buNone/>
+            </a:pPr>
+            <a:r>
+              <a:rPr lang="en-US" sz="900" i="1" dirty="0">
                 <a:solidFill>
                   <a:srgbClr val="028090"/>
                 </a:solidFill>
@@ -11597,7 +11240,7 @@
               </a:rPr>
               <a:t>git push origin main</a:t>
             </a:r>
-            <a:endParaRPr lang="en-US" sz="1000" dirty="0"/>
+            <a:endParaRPr lang="en-US" sz="900" dirty="0"/>
           </a:p>
         </p:txBody>
       </p:sp>
@@ -11622,7 +11265,7 @@
           <a:bodyPr wrap="square" rtlCol="0" anchor="ctr"/>
           <a:lstStyle/>
           <a:p>
-            <a:pPr marL="0" indent="0" algn="ctr">
+            <a:pPr algn="ctr" indent="0" marL="0">
               <a:buNone/>
             </a:pPr>
             <a:r>
@@ -11661,20 +11304,13 @@
             <a:prstDash val="solid"/>
           </a:ln>
           <a:effectLst>
-            <a:outerShdw blurRad="101600" dist="38100" dir="8100000" algn="bl" rotWithShape="0">
+            <a:outerShdw sx="100000" sy="100000" kx="0" ky="0" algn="bl" rotWithShape="0" blurRad="101600" dist="38100" dir="8100000">
               <a:srgbClr val="000000">
                 <a:alpha val="15000"/>
               </a:srgbClr>
             </a:outerShdw>
           </a:effectLst>
         </p:spPr>
-        <p:txBody>
-          <a:bodyPr/>
-          <a:lstStyle/>
-          <a:p>
-            <a:endParaRPr lang="en-US"/>
-          </a:p>
-        </p:txBody>
       </p:sp>
       <p:sp>
         <p:nvSpPr>
@@ -11697,7 +11333,7 @@
           <a:bodyPr wrap="square" rtlCol="0" anchor="ctr"/>
           <a:lstStyle/>
           <a:p>
-            <a:pPr marL="0" indent="0" algn="ctr">
+            <a:pPr algn="ctr" indent="0" marL="0">
               <a:buNone/>
             </a:pPr>
             <a:r>
@@ -11733,7 +11369,7 @@
           <a:bodyPr wrap="square" rtlCol="0" anchor="ctr"/>
           <a:lstStyle/>
           <a:p>
-            <a:pPr marL="0" indent="0" algn="ctr">
+            <a:pPr algn="ctr" indent="0" marL="0">
               <a:buNone/>
             </a:pPr>
             <a:r>
@@ -11745,7 +11381,7 @@
                 <a:ea typeface="Calibri" pitchFamily="34" charset="-122"/>
                 <a:cs typeface="Calibri" pitchFamily="34" charset="-120"/>
               </a:rPr>
-              <a:t>Restore &amp; Build</a:t>
+              <a:t>Build &amp; Test</a:t>
             </a:r>
             <a:endParaRPr lang="en-US" sz="1300" dirty="0"/>
           </a:p>
@@ -11772,11 +11408,11 @@
           <a:bodyPr wrap="square" rtlCol="0" anchor="ctr"/>
           <a:lstStyle/>
           <a:p>
-            <a:pPr marL="0" indent="0" algn="ctr">
-              <a:buNone/>
-            </a:pPr>
-            <a:r>
-              <a:rPr lang="en-US" sz="1000" i="1" dirty="0">
+            <a:pPr algn="ctr" indent="0" marL="0">
+              <a:buNone/>
+            </a:pPr>
+            <a:r>
+              <a:rPr lang="en-US" sz="900" i="1" dirty="0">
                 <a:solidFill>
                   <a:srgbClr val="2980B9"/>
                 </a:solidFill>
@@ -11784,9 +11420,9 @@
                 <a:ea typeface="Calibri" pitchFamily="34" charset="-122"/>
                 <a:cs typeface="Calibri" pitchFamily="34" charset="-120"/>
               </a:rPr>
-              <a:t>dotnet build --Release</a:t>
-            </a:r>
-            <a:endParaRPr lang="en-US" sz="1000" dirty="0"/>
+              <a:t>GitHub Actions runs 30 tests</a:t>
+            </a:r>
+            <a:endParaRPr lang="en-US" sz="900" dirty="0"/>
           </a:p>
         </p:txBody>
       </p:sp>
@@ -11811,7 +11447,7 @@
           <a:bodyPr wrap="square" rtlCol="0" anchor="ctr"/>
           <a:lstStyle/>
           <a:p>
-            <a:pPr marL="0" indent="0" algn="ctr">
+            <a:pPr algn="ctr" indent="0" marL="0">
               <a:buNone/>
             </a:pPr>
             <a:r>
@@ -11850,20 +11486,13 @@
             <a:prstDash val="solid"/>
           </a:ln>
           <a:effectLst>
-            <a:outerShdw blurRad="101600" dist="38100" dir="8100000" algn="bl" rotWithShape="0">
+            <a:outerShdw sx="100000" sy="100000" kx="0" ky="0" algn="bl" rotWithShape="0" blurRad="101600" dist="38100" dir="8100000">
               <a:srgbClr val="000000">
                 <a:alpha val="15000"/>
               </a:srgbClr>
             </a:outerShdw>
           </a:effectLst>
         </p:spPr>
-        <p:txBody>
-          <a:bodyPr/>
-          <a:lstStyle/>
-          <a:p>
-            <a:endParaRPr lang="en-US"/>
-          </a:p>
-        </p:txBody>
       </p:sp>
       <p:sp>
         <p:nvSpPr>
@@ -11886,7 +11515,7 @@
           <a:bodyPr wrap="square" rtlCol="0" anchor="ctr"/>
           <a:lstStyle/>
           <a:p>
-            <a:pPr marL="0" indent="0" algn="ctr">
+            <a:pPr algn="ctr" indent="0" marL="0">
               <a:buNone/>
             </a:pPr>
             <a:r>
@@ -11895,7 +11524,7 @@
                   <a:srgbClr val="000000"/>
                 </a:solidFill>
               </a:rPr>
-              <a:t>🧪</a:t>
+              <a:t>🐳</a:t>
             </a:r>
             <a:endParaRPr lang="en-US" sz="2800" dirty="0"/>
           </a:p>
@@ -11922,7 +11551,7 @@
           <a:bodyPr wrap="square" rtlCol="0" anchor="ctr"/>
           <a:lstStyle/>
           <a:p>
-            <a:pPr marL="0" indent="0" algn="ctr">
+            <a:pPr algn="ctr" indent="0" marL="0">
               <a:buNone/>
             </a:pPr>
             <a:r>
@@ -11934,7 +11563,7 @@
                 <a:ea typeface="Calibri" pitchFamily="34" charset="-122"/>
                 <a:cs typeface="Calibri" pitchFamily="34" charset="-120"/>
               </a:rPr>
-              <a:t>Run 30 Tests</a:t>
+              <a:t>Build Docker</a:t>
             </a:r>
             <a:endParaRPr lang="en-US" sz="1300" dirty="0"/>
           </a:p>
@@ -11961,11 +11590,11 @@
           <a:bodyPr wrap="square" rtlCol="0" anchor="ctr"/>
           <a:lstStyle/>
           <a:p>
-            <a:pPr marL="0" indent="0" algn="ctr">
-              <a:buNone/>
-            </a:pPr>
-            <a:r>
-              <a:rPr lang="en-US" sz="1000" i="1" dirty="0">
+            <a:pPr algn="ctr" indent="0" marL="0">
+              <a:buNone/>
+            </a:pPr>
+            <a:r>
+              <a:rPr lang="en-US" sz="900" i="1" dirty="0">
                 <a:solidFill>
                   <a:srgbClr val="F39C12"/>
                 </a:solidFill>
@@ -11973,9 +11602,9 @@
                 <a:ea typeface="Calibri" pitchFamily="34" charset="-122"/>
                 <a:cs typeface="Calibri" pitchFamily="34" charset="-120"/>
               </a:rPr>
-              <a:t>dotnet test</a:t>
-            </a:r>
-            <a:endParaRPr lang="en-US" sz="1000" dirty="0"/>
+              <a:t>Render builds .NET 10 image</a:t>
+            </a:r>
+            <a:endParaRPr lang="en-US" sz="900" dirty="0"/>
           </a:p>
         </p:txBody>
       </p:sp>
@@ -12000,7 +11629,7 @@
           <a:bodyPr wrap="square" rtlCol="0" anchor="ctr"/>
           <a:lstStyle/>
           <a:p>
-            <a:pPr marL="0" indent="0" algn="ctr">
+            <a:pPr algn="ctr" indent="0" marL="0">
               <a:buNone/>
             </a:pPr>
             <a:r>
@@ -12039,20 +11668,13 @@
             <a:prstDash val="solid"/>
           </a:ln>
           <a:effectLst>
-            <a:outerShdw blurRad="101600" dist="38100" dir="8100000" algn="bl" rotWithShape="0">
+            <a:outerShdw sx="100000" sy="100000" kx="0" ky="0" algn="bl" rotWithShape="0" blurRad="101600" dist="38100" dir="8100000">
               <a:srgbClr val="000000">
                 <a:alpha val="15000"/>
               </a:srgbClr>
             </a:outerShdw>
           </a:effectLst>
         </p:spPr>
-        <p:txBody>
-          <a:bodyPr/>
-          <a:lstStyle/>
-          <a:p>
-            <a:endParaRPr lang="en-US"/>
-          </a:p>
-        </p:txBody>
       </p:sp>
       <p:sp>
         <p:nvSpPr>
@@ -12075,7 +11697,7 @@
           <a:bodyPr wrap="square" rtlCol="0" anchor="ctr"/>
           <a:lstStyle/>
           <a:p>
-            <a:pPr marL="0" indent="0" algn="ctr">
+            <a:pPr algn="ctr" indent="0" marL="0">
               <a:buNone/>
             </a:pPr>
             <a:r>
@@ -12111,7 +11733,7 @@
           <a:bodyPr wrap="square" rtlCol="0" anchor="ctr"/>
           <a:lstStyle/>
           <a:p>
-            <a:pPr marL="0" indent="0" algn="ctr">
+            <a:pPr algn="ctr" indent="0" marL="0">
               <a:buNone/>
             </a:pPr>
             <a:r>
@@ -12123,7 +11745,7 @@
                 <a:ea typeface="Calibri" pitchFamily="34" charset="-122"/>
                 <a:cs typeface="Calibri" pitchFamily="34" charset="-120"/>
               </a:rPr>
-              <a:t>Deploy to Azure</a:t>
+              <a:t>Deploy Live</a:t>
             </a:r>
             <a:endParaRPr lang="en-US" sz="1300" dirty="0"/>
           </a:p>
@@ -12150,11 +11772,11 @@
           <a:bodyPr wrap="square" rtlCol="0" anchor="ctr"/>
           <a:lstStyle/>
           <a:p>
-            <a:pPr marL="0" indent="0" algn="ctr">
-              <a:buNone/>
-            </a:pPr>
-            <a:r>
-              <a:rPr lang="en-US" sz="1000" i="1" dirty="0">
+            <a:pPr algn="ctr" indent="0" marL="0">
+              <a:buNone/>
+            </a:pPr>
+            <a:r>
+              <a:rPr lang="en-US" sz="900" i="1" dirty="0">
                 <a:solidFill>
                   <a:srgbClr val="27AE60"/>
                 </a:solidFill>
@@ -12162,9 +11784,9 @@
                 <a:ea typeface="Calibri" pitchFamily="34" charset="-122"/>
                 <a:cs typeface="Calibri" pitchFamily="34" charset="-120"/>
               </a:rPr>
-              <a:t>Azure App Service F1</a:t>
-            </a:r>
-            <a:endParaRPr lang="en-US" sz="1000" dirty="0"/>
+              <a:t>securetrace-api.onrender.com</a:t>
+            </a:r>
+            <a:endParaRPr lang="en-US" sz="900" dirty="0"/>
           </a:p>
         </p:txBody>
       </p:sp>
@@ -12192,13 +11814,6 @@
             <a:prstDash val="solid"/>
           </a:ln>
         </p:spPr>
-        <p:txBody>
-          <a:bodyPr/>
-          <a:lstStyle/>
-          <a:p>
-            <a:endParaRPr lang="en-US"/>
-          </a:p>
-        </p:txBody>
       </p:sp>
       <p:sp>
         <p:nvSpPr>
@@ -12221,7 +11836,7 @@
           <a:bodyPr wrap="square" rtlCol="0" anchor="ctr"/>
           <a:lstStyle/>
           <a:p>
-            <a:pPr marL="0" indent="0" algn="ctr">
+            <a:pPr algn="ctr" indent="0" marL="0">
               <a:buNone/>
             </a:pPr>
             <a:r>
@@ -12230,7 +11845,7 @@
                   <a:srgbClr val="27AE60"/>
                 </a:solidFill>
               </a:rPr>
-              <a:t>✅  Build &amp; Test — PASSING</a:t>
+              <a:t>✅ Build &amp; Test — PASSING</a:t>
             </a:r>
             <a:endParaRPr lang="en-US" sz="1300" dirty="0"/>
           </a:p>
@@ -12251,22 +11866,15 @@
             <a:avLst/>
           </a:prstGeom>
           <a:solidFill>
-            <a:srgbClr val="16213E"/>
+            <a:srgbClr val="1B4D1B"/>
           </a:solidFill>
           <a:ln w="12700">
             <a:solidFill>
-              <a:srgbClr val="028090"/>
+              <a:srgbClr val="27AE60"/>
             </a:solidFill>
             <a:prstDash val="solid"/>
           </a:ln>
         </p:spPr>
-        <p:txBody>
-          <a:bodyPr/>
-          <a:lstStyle/>
-          <a:p>
-            <a:endParaRPr lang="en-US"/>
-          </a:p>
-        </p:txBody>
       </p:sp>
       <p:sp>
         <p:nvSpPr>
@@ -12289,16 +11897,16 @@
           <a:bodyPr wrap="square" rtlCol="0" anchor="ctr"/>
           <a:lstStyle/>
           <a:p>
-            <a:pPr marL="0" indent="0" algn="ctr">
+            <a:pPr algn="ctr" indent="0" marL="0">
               <a:buNone/>
             </a:pPr>
             <a:r>
               <a:rPr lang="en-US" sz="1300" b="1" dirty="0">
                 <a:solidFill>
-                  <a:srgbClr val="028090"/>
-                </a:solidFill>
-              </a:rPr>
-              <a:t>⏳  Deployed on Azure</a:t>
+                  <a:srgbClr val="27AE60"/>
+                </a:solidFill>
+              </a:rPr>
+              <a:t>🌐 LIVE on Render Cloud</a:t>
             </a:r>
             <a:endParaRPr lang="en-US" sz="1300" dirty="0"/>
           </a:p>
@@ -12605,319 +12213,4 @@
     </a:ext>
   </a:extLst>
 </a:theme>
-</file>
-
-<file path=ppt/theme/theme2.xml><?xml version="1.0" encoding="utf-8"?>
-<a:theme xmlns:a="http://schemas.openxmlformats.org/drawingml/2006/main" name="Office Theme">
-  <a:themeElements>
-    <a:clrScheme name="Office">
-      <a:dk1>
-        <a:sysClr val="windowText" lastClr="000000"/>
-      </a:dk1>
-      <a:lt1>
-        <a:sysClr val="window" lastClr="FFFFFF"/>
-      </a:lt1>
-      <a:dk2>
-        <a:srgbClr val="0E2841"/>
-      </a:dk2>
-      <a:lt2>
-        <a:srgbClr val="E8E8E8"/>
-      </a:lt2>
-      <a:accent1>
-        <a:srgbClr val="156082"/>
-      </a:accent1>
-      <a:accent2>
-        <a:srgbClr val="E97132"/>
-      </a:accent2>
-      <a:accent3>
-        <a:srgbClr val="196B24"/>
-      </a:accent3>
-      <a:accent4>
-        <a:srgbClr val="0F9ED5"/>
-      </a:accent4>
-      <a:accent5>
-        <a:srgbClr val="A02B93"/>
-      </a:accent5>
-      <a:accent6>
-        <a:srgbClr val="4EA72E"/>
-      </a:accent6>
-      <a:hlink>
-        <a:srgbClr val="467886"/>
-      </a:hlink>
-      <a:folHlink>
-        <a:srgbClr val="96607D"/>
-      </a:folHlink>
-    </a:clrScheme>
-    <a:fontScheme name="Office">
-      <a:majorFont>
-        <a:latin typeface="Aptos Display" panose="02110004020202020204"/>
-        <a:ea typeface=""/>
-        <a:cs typeface=""/>
-        <a:font script="Jpan" typeface="游ゴシック Light"/>
-        <a:font script="Hang" typeface="맑은 고딕"/>
-        <a:font script="Hans" typeface="等线 Light"/>
-        <a:font script="Hant" typeface="新細明體"/>
-        <a:font script="Arab" typeface="Times New Roman"/>
-        <a:font script="Hebr" typeface="Times New Roman"/>
-        <a:font script="Thai" typeface="Angsana New"/>
-        <a:font script="Ethi" typeface="Nyala"/>
-        <a:font script="Beng" typeface="Vrinda"/>
-        <a:font script="Gujr" typeface="Shruti"/>
-        <a:font script="Khmr" typeface="MoolBoran"/>
-        <a:font script="Knda" typeface="Tunga"/>
-        <a:font script="Guru" typeface="Raavi"/>
-        <a:font script="Cans" typeface="Euphemia"/>
-        <a:font script="Cher" typeface="Plantagenet Cherokee"/>
-        <a:font script="Yiii" typeface="Microsoft Yi Baiti"/>
-        <a:font script="Tibt" typeface="Microsoft Himalaya"/>
-        <a:font script="Thaa" typeface="MV Boli"/>
-        <a:font script="Deva" typeface="Mangal"/>
-        <a:font script="Telu" typeface="Gautami"/>
-        <a:font script="Taml" typeface="Latha"/>
-        <a:font script="Syrc" typeface="Estrangelo Edessa"/>
-        <a:font script="Orya" typeface="Kalinga"/>
-        <a:font script="Mlym" typeface="Kartika"/>
-        <a:font script="Laoo" typeface="DokChampa"/>
-        <a:font script="Sinh" typeface="Iskoola Pota"/>
-        <a:font script="Mong" typeface="Mongolian Baiti"/>
-        <a:font script="Viet" typeface="Times New Roman"/>
-        <a:font script="Uigh" typeface="Microsoft Uighur"/>
-        <a:font script="Geor" typeface="Sylfaen"/>
-        <a:font script="Armn" typeface="Arial"/>
-        <a:font script="Bugi" typeface="Leelawadee UI"/>
-        <a:font script="Bopo" typeface="Microsoft JhengHei"/>
-        <a:font script="Java" typeface="Javanese Text"/>
-        <a:font script="Lisu" typeface="Segoe UI"/>
-        <a:font script="Mymr" typeface="Myanmar Text"/>
-        <a:font script="Nkoo" typeface="Ebrima"/>
-        <a:font script="Olck" typeface="Nirmala UI"/>
-        <a:font script="Osma" typeface="Ebrima"/>
-        <a:font script="Phag" typeface="Phagspa"/>
-        <a:font script="Syrn" typeface="Estrangelo Edessa"/>
-        <a:font script="Syrj" typeface="Estrangelo Edessa"/>
-        <a:font script="Syre" typeface="Estrangelo Edessa"/>
-        <a:font script="Sora" typeface="Nirmala UI"/>
-        <a:font script="Tale" typeface="Microsoft Tai Le"/>
-        <a:font script="Talu" typeface="Microsoft New Tai Lue"/>
-        <a:font script="Tfng" typeface="Ebrima"/>
-      </a:majorFont>
-      <a:minorFont>
-        <a:latin typeface="Aptos" panose="02110004020202020204"/>
-        <a:ea typeface=""/>
-        <a:cs typeface=""/>
-        <a:font script="Jpan" typeface="游ゴシック"/>
-        <a:font script="Hang" typeface="맑은 고딕"/>
-        <a:font script="Hans" typeface="等线"/>
-        <a:font script="Hant" typeface="新細明體"/>
-        <a:font script="Arab" typeface="Arial"/>
-        <a:font script="Hebr" typeface="Arial"/>
-        <a:font script="Thai" typeface="Cordia New"/>
-        <a:font script="Ethi" typeface="Nyala"/>
-        <a:font script="Beng" typeface="Vrinda"/>
-        <a:font script="Gujr" typeface="Shruti"/>
-        <a:font script="Khmr" typeface="DaunPenh"/>
-        <a:font script="Knda" typeface="Tunga"/>
-        <a:font script="Guru" typeface="Raavi"/>
-        <a:font script="Cans" typeface="Euphemia"/>
-        <a:font script="Cher" typeface="Plantagenet Cherokee"/>
-        <a:font script="Yiii" typeface="Microsoft Yi Baiti"/>
-        <a:font script="Tibt" typeface="Microsoft Himalaya"/>
-        <a:font script="Thaa" typeface="MV Boli"/>
-        <a:font script="Deva" typeface="Mangal"/>
-        <a:font script="Telu" typeface="Gautami"/>
-        <a:font script="Taml" typeface="Latha"/>
-        <a:font script="Syrc" typeface="Estrangelo Edessa"/>
-        <a:font script="Orya" typeface="Kalinga"/>
-        <a:font script="Mlym" typeface="Kartika"/>
-        <a:font script="Laoo" typeface="DokChampa"/>
-        <a:font script="Sinh" typeface="Iskoola Pota"/>
-        <a:font script="Mong" typeface="Mongolian Baiti"/>
-        <a:font script="Viet" typeface="Arial"/>
-        <a:font script="Uigh" typeface="Microsoft Uighur"/>
-        <a:font script="Geor" typeface="Sylfaen"/>
-        <a:font script="Armn" typeface="Arial"/>
-        <a:font script="Bugi" typeface="Leelawadee UI"/>
-        <a:font script="Bopo" typeface="Microsoft JhengHei"/>
-        <a:font script="Java" typeface="Javanese Text"/>
-        <a:font script="Lisu" typeface="Segoe UI"/>
-        <a:font script="Mymr" typeface="Myanmar Text"/>
-        <a:font script="Nkoo" typeface="Ebrima"/>
-        <a:font script="Olck" typeface="Nirmala UI"/>
-        <a:font script="Osma" typeface="Ebrima"/>
-        <a:font script="Phag" typeface="Phagspa"/>
-        <a:font script="Syrn" typeface="Estrangelo Edessa"/>
-        <a:font script="Syrj" typeface="Estrangelo Edessa"/>
-        <a:font script="Syre" typeface="Estrangelo Edessa"/>
-        <a:font script="Sora" typeface="Nirmala UI"/>
-        <a:font script="Tale" typeface="Microsoft Tai Le"/>
-        <a:font script="Talu" typeface="Microsoft New Tai Lue"/>
-        <a:font script="Tfng" typeface="Ebrima"/>
-      </a:minorFont>
-    </a:fontScheme>
-    <a:fmtScheme name="Office">
-      <a:fillStyleLst>
-        <a:solidFill>
-          <a:schemeClr val="phClr"/>
-        </a:solidFill>
-        <a:gradFill rotWithShape="1">
-          <a:gsLst>
-            <a:gs pos="0">
-              <a:schemeClr val="phClr">
-                <a:lumMod val="110000"/>
-                <a:satMod val="105000"/>
-                <a:tint val="67000"/>
-              </a:schemeClr>
-            </a:gs>
-            <a:gs pos="50000">
-              <a:schemeClr val="phClr">
-                <a:lumMod val="105000"/>
-                <a:satMod val="103000"/>
-                <a:tint val="73000"/>
-              </a:schemeClr>
-            </a:gs>
-            <a:gs pos="100000">
-              <a:schemeClr val="phClr">
-                <a:lumMod val="105000"/>
-                <a:satMod val="109000"/>
-                <a:tint val="81000"/>
-              </a:schemeClr>
-            </a:gs>
-          </a:gsLst>
-          <a:lin ang="5400000" scaled="0"/>
-        </a:gradFill>
-        <a:gradFill rotWithShape="1">
-          <a:gsLst>
-            <a:gs pos="0">
-              <a:schemeClr val="phClr">
-                <a:satMod val="103000"/>
-                <a:lumMod val="102000"/>
-                <a:tint val="94000"/>
-              </a:schemeClr>
-            </a:gs>
-            <a:gs pos="50000">
-              <a:schemeClr val="phClr">
-                <a:satMod val="110000"/>
-                <a:lumMod val="100000"/>
-                <a:shade val="100000"/>
-              </a:schemeClr>
-            </a:gs>
-            <a:gs pos="100000">
-              <a:schemeClr val="phClr">
-                <a:lumMod val="99000"/>
-                <a:satMod val="120000"/>
-                <a:shade val="78000"/>
-              </a:schemeClr>
-            </a:gs>
-          </a:gsLst>
-          <a:lin ang="5400000" scaled="0"/>
-        </a:gradFill>
-      </a:fillStyleLst>
-      <a:lnStyleLst>
-        <a:ln w="12700" cap="flat" cmpd="sng" algn="ctr">
-          <a:solidFill>
-            <a:schemeClr val="phClr"/>
-          </a:solidFill>
-          <a:prstDash val="solid"/>
-          <a:miter lim="800000"/>
-        </a:ln>
-        <a:ln w="19050" cap="flat" cmpd="sng" algn="ctr">
-          <a:solidFill>
-            <a:schemeClr val="phClr"/>
-          </a:solidFill>
-          <a:prstDash val="solid"/>
-          <a:miter lim="800000"/>
-        </a:ln>
-        <a:ln w="25400" cap="flat" cmpd="sng" algn="ctr">
-          <a:solidFill>
-            <a:schemeClr val="phClr"/>
-          </a:solidFill>
-          <a:prstDash val="solid"/>
-          <a:miter lim="800000"/>
-        </a:ln>
-      </a:lnStyleLst>
-      <a:effectStyleLst>
-        <a:effectStyle>
-          <a:effectLst/>
-        </a:effectStyle>
-        <a:effectStyle>
-          <a:effectLst/>
-        </a:effectStyle>
-        <a:effectStyle>
-          <a:effectLst>
-            <a:outerShdw blurRad="57150" dist="19050" dir="5400000" algn="ctr" rotWithShape="0">
-              <a:srgbClr val="000000">
-                <a:alpha val="63000"/>
-              </a:srgbClr>
-            </a:outerShdw>
-          </a:effectLst>
-        </a:effectStyle>
-      </a:effectStyleLst>
-      <a:bgFillStyleLst>
-        <a:solidFill>
-          <a:schemeClr val="phClr"/>
-        </a:solidFill>
-        <a:solidFill>
-          <a:schemeClr val="phClr">
-            <a:tint val="95000"/>
-            <a:satMod val="170000"/>
-          </a:schemeClr>
-        </a:solidFill>
-        <a:gradFill rotWithShape="1">
-          <a:gsLst>
-            <a:gs pos="0">
-              <a:schemeClr val="phClr">
-                <a:tint val="93000"/>
-                <a:satMod val="150000"/>
-                <a:shade val="98000"/>
-                <a:lumMod val="102000"/>
-              </a:schemeClr>
-            </a:gs>
-            <a:gs pos="50000">
-              <a:schemeClr val="phClr">
-                <a:tint val="98000"/>
-                <a:satMod val="130000"/>
-                <a:shade val="90000"/>
-                <a:lumMod val="103000"/>
-              </a:schemeClr>
-            </a:gs>
-            <a:gs pos="100000">
-              <a:schemeClr val="phClr">
-                <a:shade val="63000"/>
-                <a:satMod val="120000"/>
-              </a:schemeClr>
-            </a:gs>
-          </a:gsLst>
-          <a:lin ang="5400000" scaled="0"/>
-        </a:gradFill>
-      </a:bgFillStyleLst>
-    </a:fmtScheme>
-  </a:themeElements>
-  <a:objectDefaults>
-    <a:lnDef>
-      <a:spPr/>
-      <a:bodyPr/>
-      <a:lstStyle/>
-      <a:style>
-        <a:lnRef idx="2">
-          <a:schemeClr val="accent1"/>
-        </a:lnRef>
-        <a:fillRef idx="0">
-          <a:schemeClr val="accent1"/>
-        </a:fillRef>
-        <a:effectRef idx="1">
-          <a:schemeClr val="accent1"/>
-        </a:effectRef>
-        <a:fontRef idx="minor">
-          <a:schemeClr val="tx1"/>
-        </a:fontRef>
-      </a:style>
-    </a:lnDef>
-  </a:objectDefaults>
-  <a:extraClrSchemeLst/>
-  <a:extLst>
-    <a:ext uri="{05A4C25C-085E-4340-85A3-A5531E510DB2}">
-      <thm15:themeFamily xmlns:thm15="http://schemas.microsoft.com/office/thememl/2012/main" name="Office Theme" id="{2E142A2C-CD16-42D6-873A-C26D2A0506FA}" vid="{1BDDFF52-6CD6-40A5-AB3C-68EB2F1E4D0A}"/>
-    </a:ext>
-  </a:extLst>
-</a:theme>
 </file>